--- a/Izvestaj/Pametni sistem za praćenje i optimizaciju budžeta.pptx
+++ b/Izvestaj/Pametni sistem za praćenje i optimizaciju budžeta.pptx
@@ -4,22 +4,24 @@
   <p:sldMasterIdLst>
     <p:sldMasterId id="2147483714" r:id="rId1"/>
   </p:sldMasterIdLst>
+  <p:notesMasterIdLst>
+    <p:notesMasterId r:id="rId16"/>
+  </p:notesMasterIdLst>
   <p:sldIdLst>
     <p:sldId id="256" r:id="rId2"/>
-    <p:sldId id="257" r:id="rId3"/>
-    <p:sldId id="258" r:id="rId4"/>
-    <p:sldId id="259" r:id="rId5"/>
-    <p:sldId id="260" r:id="rId6"/>
-    <p:sldId id="261" r:id="rId7"/>
-    <p:sldId id="262" r:id="rId8"/>
-    <p:sldId id="263" r:id="rId9"/>
+    <p:sldId id="258" r:id="rId3"/>
+    <p:sldId id="259" r:id="rId4"/>
+    <p:sldId id="260" r:id="rId5"/>
+    <p:sldId id="261" r:id="rId6"/>
+    <p:sldId id="271" r:id="rId7"/>
+    <p:sldId id="263" r:id="rId8"/>
+    <p:sldId id="262" r:id="rId9"/>
     <p:sldId id="264" r:id="rId10"/>
-    <p:sldId id="265" r:id="rId11"/>
-    <p:sldId id="266" r:id="rId12"/>
-    <p:sldId id="268" r:id="rId13"/>
-    <p:sldId id="267" r:id="rId14"/>
-    <p:sldId id="269" r:id="rId15"/>
-    <p:sldId id="270" r:id="rId16"/>
+    <p:sldId id="266" r:id="rId11"/>
+    <p:sldId id="268" r:id="rId12"/>
+    <p:sldId id="267" r:id="rId13"/>
+    <p:sldId id="269" r:id="rId14"/>
+    <p:sldId id="270" r:id="rId15"/>
   </p:sldIdLst>
   <p:sldSz cx="12192000" cy="6858000"/>
   <p:notesSz cx="6858000" cy="9144000"/>
@@ -126,6 +128,458 @@
 </p:presentation>
 </file>
 
+<file path=ppt/notesMasters/notesMaster1.xml><?xml version="1.0" encoding="utf-8"?>
+<p:notesMaster xmlns:a="http://schemas.openxmlformats.org/drawingml/2006/main" xmlns:r="http://schemas.openxmlformats.org/officeDocument/2006/relationships" xmlns:p="http://schemas.openxmlformats.org/presentationml/2006/main">
+  <p:cSld>
+    <p:bg>
+      <p:bgRef idx="1001">
+        <a:schemeClr val="bg1"/>
+      </p:bgRef>
+    </p:bg>
+    <p:spTree>
+      <p:nvGrpSpPr>
+        <p:cNvPr id="1" name=""/>
+        <p:cNvGrpSpPr/>
+        <p:nvPr/>
+      </p:nvGrpSpPr>
+      <p:grpSpPr>
+        <a:xfrm>
+          <a:off x="0" y="0"/>
+          <a:ext cx="0" cy="0"/>
+          <a:chOff x="0" y="0"/>
+          <a:chExt cx="0" cy="0"/>
+        </a:xfrm>
+      </p:grpSpPr>
+      <p:sp>
+        <p:nvSpPr>
+          <p:cNvPr id="2" name="Header Placeholder 1"/>
+          <p:cNvSpPr>
+            <a:spLocks noGrp="1"/>
+          </p:cNvSpPr>
+          <p:nvPr>
+            <p:ph type="hdr" sz="quarter"/>
+          </p:nvPr>
+        </p:nvSpPr>
+        <p:spPr>
+          <a:xfrm>
+            <a:off x="0" y="0"/>
+            <a:ext cx="2971800" cy="458788"/>
+          </a:xfrm>
+          <a:prstGeom prst="rect">
+            <a:avLst/>
+          </a:prstGeom>
+        </p:spPr>
+        <p:txBody>
+          <a:bodyPr vert="horz" lIns="91440" tIns="45720" rIns="91440" bIns="45720" rtlCol="0"/>
+          <a:lstStyle>
+            <a:lvl1pPr algn="l">
+              <a:defRPr sz="1200"/>
+            </a:lvl1pPr>
+          </a:lstStyle>
+          <a:p>
+            <a:endParaRPr lang="sr-Latn-RS"/>
+          </a:p>
+        </p:txBody>
+      </p:sp>
+      <p:sp>
+        <p:nvSpPr>
+          <p:cNvPr id="3" name="Date Placeholder 2"/>
+          <p:cNvSpPr>
+            <a:spLocks noGrp="1"/>
+          </p:cNvSpPr>
+          <p:nvPr>
+            <p:ph type="dt" idx="1"/>
+          </p:nvPr>
+        </p:nvSpPr>
+        <p:spPr>
+          <a:xfrm>
+            <a:off x="3884613" y="0"/>
+            <a:ext cx="2971800" cy="458788"/>
+          </a:xfrm>
+          <a:prstGeom prst="rect">
+            <a:avLst/>
+          </a:prstGeom>
+        </p:spPr>
+        <p:txBody>
+          <a:bodyPr vert="horz" lIns="91440" tIns="45720" rIns="91440" bIns="45720" rtlCol="0"/>
+          <a:lstStyle>
+            <a:lvl1pPr algn="r">
+              <a:defRPr sz="1200"/>
+            </a:lvl1pPr>
+          </a:lstStyle>
+          <a:p>
+            <a:fld id="{A02F77DC-7873-4339-B327-E9F8B78F3580}" type="datetimeFigureOut">
+              <a:rPr lang="sr-Latn-RS" smtClean="0"/>
+              <a:t>27.2.2026.</a:t>
+            </a:fld>
+            <a:endParaRPr lang="sr-Latn-RS"/>
+          </a:p>
+        </p:txBody>
+      </p:sp>
+      <p:sp>
+        <p:nvSpPr>
+          <p:cNvPr id="4" name="Slide Image Placeholder 3"/>
+          <p:cNvSpPr>
+            <a:spLocks noGrp="1" noRot="1" noChangeAspect="1"/>
+          </p:cNvSpPr>
+          <p:nvPr>
+            <p:ph type="sldImg" idx="2"/>
+          </p:nvPr>
+        </p:nvSpPr>
+        <p:spPr>
+          <a:xfrm>
+            <a:off x="685800" y="1143000"/>
+            <a:ext cx="5486400" cy="3086100"/>
+          </a:xfrm>
+          <a:prstGeom prst="rect">
+            <a:avLst/>
+          </a:prstGeom>
+          <a:noFill/>
+          <a:ln w="12700">
+            <a:solidFill>
+              <a:prstClr val="black"/>
+            </a:solidFill>
+          </a:ln>
+        </p:spPr>
+        <p:txBody>
+          <a:bodyPr vert="horz" lIns="91440" tIns="45720" rIns="91440" bIns="45720" rtlCol="0" anchor="ctr"/>
+          <a:lstStyle/>
+          <a:p>
+            <a:endParaRPr lang="sr-Latn-RS"/>
+          </a:p>
+        </p:txBody>
+      </p:sp>
+      <p:sp>
+        <p:nvSpPr>
+          <p:cNvPr id="5" name="Notes Placeholder 4"/>
+          <p:cNvSpPr>
+            <a:spLocks noGrp="1"/>
+          </p:cNvSpPr>
+          <p:nvPr>
+            <p:ph type="body" sz="quarter" idx="3"/>
+          </p:nvPr>
+        </p:nvSpPr>
+        <p:spPr>
+          <a:xfrm>
+            <a:off x="685800" y="4400550"/>
+            <a:ext cx="5486400" cy="3600450"/>
+          </a:xfrm>
+          <a:prstGeom prst="rect">
+            <a:avLst/>
+          </a:prstGeom>
+        </p:spPr>
+        <p:txBody>
+          <a:bodyPr vert="horz" lIns="91440" tIns="45720" rIns="91440" bIns="45720" rtlCol="0"/>
+          <a:lstStyle/>
+          <a:p>
+            <a:pPr lvl="0"/>
+            <a:r>
+              <a:rPr lang="en-US"/>
+              <a:t>Click to edit Master text styles</a:t>
+            </a:r>
+          </a:p>
+          <a:p>
+            <a:pPr lvl="1"/>
+            <a:r>
+              <a:rPr lang="en-US"/>
+              <a:t>Second level</a:t>
+            </a:r>
+          </a:p>
+          <a:p>
+            <a:pPr lvl="2"/>
+            <a:r>
+              <a:rPr lang="en-US"/>
+              <a:t>Third level</a:t>
+            </a:r>
+          </a:p>
+          <a:p>
+            <a:pPr lvl="3"/>
+            <a:r>
+              <a:rPr lang="en-US"/>
+              <a:t>Fourth level</a:t>
+            </a:r>
+          </a:p>
+          <a:p>
+            <a:pPr lvl="4"/>
+            <a:r>
+              <a:rPr lang="en-US"/>
+              <a:t>Fifth level</a:t>
+            </a:r>
+            <a:endParaRPr lang="sr-Latn-RS"/>
+          </a:p>
+        </p:txBody>
+      </p:sp>
+      <p:sp>
+        <p:nvSpPr>
+          <p:cNvPr id="6" name="Footer Placeholder 5"/>
+          <p:cNvSpPr>
+            <a:spLocks noGrp="1"/>
+          </p:cNvSpPr>
+          <p:nvPr>
+            <p:ph type="ftr" sz="quarter" idx="4"/>
+          </p:nvPr>
+        </p:nvSpPr>
+        <p:spPr>
+          <a:xfrm>
+            <a:off x="0" y="8685213"/>
+            <a:ext cx="2971800" cy="458787"/>
+          </a:xfrm>
+          <a:prstGeom prst="rect">
+            <a:avLst/>
+          </a:prstGeom>
+        </p:spPr>
+        <p:txBody>
+          <a:bodyPr vert="horz" lIns="91440" tIns="45720" rIns="91440" bIns="45720" rtlCol="0" anchor="b"/>
+          <a:lstStyle>
+            <a:lvl1pPr algn="l">
+              <a:defRPr sz="1200"/>
+            </a:lvl1pPr>
+          </a:lstStyle>
+          <a:p>
+            <a:endParaRPr lang="sr-Latn-RS"/>
+          </a:p>
+        </p:txBody>
+      </p:sp>
+      <p:sp>
+        <p:nvSpPr>
+          <p:cNvPr id="7" name="Slide Number Placeholder 6"/>
+          <p:cNvSpPr>
+            <a:spLocks noGrp="1"/>
+          </p:cNvSpPr>
+          <p:nvPr>
+            <p:ph type="sldNum" sz="quarter" idx="5"/>
+          </p:nvPr>
+        </p:nvSpPr>
+        <p:spPr>
+          <a:xfrm>
+            <a:off x="3884613" y="8685213"/>
+            <a:ext cx="2971800" cy="458787"/>
+          </a:xfrm>
+          <a:prstGeom prst="rect">
+            <a:avLst/>
+          </a:prstGeom>
+        </p:spPr>
+        <p:txBody>
+          <a:bodyPr vert="horz" lIns="91440" tIns="45720" rIns="91440" bIns="45720" rtlCol="0" anchor="b"/>
+          <a:lstStyle>
+            <a:lvl1pPr algn="r">
+              <a:defRPr sz="1200"/>
+            </a:lvl1pPr>
+          </a:lstStyle>
+          <a:p>
+            <a:fld id="{4FC7460A-90DB-41A8-A38A-96DECAA7D495}" type="slidenum">
+              <a:rPr lang="sr-Latn-RS" smtClean="0"/>
+              <a:t>‹#›</a:t>
+            </a:fld>
+            <a:endParaRPr lang="sr-Latn-RS"/>
+          </a:p>
+        </p:txBody>
+      </p:sp>
+    </p:spTree>
+    <p:extLst>
+      <p:ext uri="{BB962C8B-B14F-4D97-AF65-F5344CB8AC3E}">
+        <p14:creationId xmlns:p14="http://schemas.microsoft.com/office/powerpoint/2010/main" val="3718872223"/>
+      </p:ext>
+    </p:extLst>
+  </p:cSld>
+  <p:clrMap bg1="lt1" tx1="dk1" bg2="lt2" tx2="dk2" accent1="accent1" accent2="accent2" accent3="accent3" accent4="accent4" accent5="accent5" accent6="accent6" hlink="hlink" folHlink="folHlink"/>
+  <p:notesStyle>
+    <a:lvl1pPr marL="0" algn="l" defTabSz="914400" rtl="0" eaLnBrk="1" latinLnBrk="0" hangingPunct="1">
+      <a:defRPr sz="1200" kern="1200">
+        <a:solidFill>
+          <a:schemeClr val="tx1"/>
+        </a:solidFill>
+        <a:latin typeface="+mn-lt"/>
+        <a:ea typeface="+mn-ea"/>
+        <a:cs typeface="+mn-cs"/>
+      </a:defRPr>
+    </a:lvl1pPr>
+    <a:lvl2pPr marL="457200" algn="l" defTabSz="914400" rtl="0" eaLnBrk="1" latinLnBrk="0" hangingPunct="1">
+      <a:defRPr sz="1200" kern="1200">
+        <a:solidFill>
+          <a:schemeClr val="tx1"/>
+        </a:solidFill>
+        <a:latin typeface="+mn-lt"/>
+        <a:ea typeface="+mn-ea"/>
+        <a:cs typeface="+mn-cs"/>
+      </a:defRPr>
+    </a:lvl2pPr>
+    <a:lvl3pPr marL="914400" algn="l" defTabSz="914400" rtl="0" eaLnBrk="1" latinLnBrk="0" hangingPunct="1">
+      <a:defRPr sz="1200" kern="1200">
+        <a:solidFill>
+          <a:schemeClr val="tx1"/>
+        </a:solidFill>
+        <a:latin typeface="+mn-lt"/>
+        <a:ea typeface="+mn-ea"/>
+        <a:cs typeface="+mn-cs"/>
+      </a:defRPr>
+    </a:lvl3pPr>
+    <a:lvl4pPr marL="1371600" algn="l" defTabSz="914400" rtl="0" eaLnBrk="1" latinLnBrk="0" hangingPunct="1">
+      <a:defRPr sz="1200" kern="1200">
+        <a:solidFill>
+          <a:schemeClr val="tx1"/>
+        </a:solidFill>
+        <a:latin typeface="+mn-lt"/>
+        <a:ea typeface="+mn-ea"/>
+        <a:cs typeface="+mn-cs"/>
+      </a:defRPr>
+    </a:lvl4pPr>
+    <a:lvl5pPr marL="1828800" algn="l" defTabSz="914400" rtl="0" eaLnBrk="1" latinLnBrk="0" hangingPunct="1">
+      <a:defRPr sz="1200" kern="1200">
+        <a:solidFill>
+          <a:schemeClr val="tx1"/>
+        </a:solidFill>
+        <a:latin typeface="+mn-lt"/>
+        <a:ea typeface="+mn-ea"/>
+        <a:cs typeface="+mn-cs"/>
+      </a:defRPr>
+    </a:lvl5pPr>
+    <a:lvl6pPr marL="2286000" algn="l" defTabSz="914400" rtl="0" eaLnBrk="1" latinLnBrk="0" hangingPunct="1">
+      <a:defRPr sz="1200" kern="1200">
+        <a:solidFill>
+          <a:schemeClr val="tx1"/>
+        </a:solidFill>
+        <a:latin typeface="+mn-lt"/>
+        <a:ea typeface="+mn-ea"/>
+        <a:cs typeface="+mn-cs"/>
+      </a:defRPr>
+    </a:lvl6pPr>
+    <a:lvl7pPr marL="2743200" algn="l" defTabSz="914400" rtl="0" eaLnBrk="1" latinLnBrk="0" hangingPunct="1">
+      <a:defRPr sz="1200" kern="1200">
+        <a:solidFill>
+          <a:schemeClr val="tx1"/>
+        </a:solidFill>
+        <a:latin typeface="+mn-lt"/>
+        <a:ea typeface="+mn-ea"/>
+        <a:cs typeface="+mn-cs"/>
+      </a:defRPr>
+    </a:lvl7pPr>
+    <a:lvl8pPr marL="3200400" algn="l" defTabSz="914400" rtl="0" eaLnBrk="1" latinLnBrk="0" hangingPunct="1">
+      <a:defRPr sz="1200" kern="1200">
+        <a:solidFill>
+          <a:schemeClr val="tx1"/>
+        </a:solidFill>
+        <a:latin typeface="+mn-lt"/>
+        <a:ea typeface="+mn-ea"/>
+        <a:cs typeface="+mn-cs"/>
+      </a:defRPr>
+    </a:lvl8pPr>
+    <a:lvl9pPr marL="3657600" algn="l" defTabSz="914400" rtl="0" eaLnBrk="1" latinLnBrk="0" hangingPunct="1">
+      <a:defRPr sz="1200" kern="1200">
+        <a:solidFill>
+          <a:schemeClr val="tx1"/>
+        </a:solidFill>
+        <a:latin typeface="+mn-lt"/>
+        <a:ea typeface="+mn-ea"/>
+        <a:cs typeface="+mn-cs"/>
+      </a:defRPr>
+    </a:lvl9pPr>
+  </p:notesStyle>
+</p:notesMaster>
+</file>
+
+<file path=ppt/notesSlides/notesSlide1.xml><?xml version="1.0" encoding="utf-8"?>
+<p:notes xmlns:a="http://schemas.openxmlformats.org/drawingml/2006/main" xmlns:r="http://schemas.openxmlformats.org/officeDocument/2006/relationships" xmlns:p="http://schemas.openxmlformats.org/presentationml/2006/main">
+  <p:cSld>
+    <p:spTree>
+      <p:nvGrpSpPr>
+        <p:cNvPr id="1" name=""/>
+        <p:cNvGrpSpPr/>
+        <p:nvPr/>
+      </p:nvGrpSpPr>
+      <p:grpSpPr>
+        <a:xfrm>
+          <a:off x="0" y="0"/>
+          <a:ext cx="0" cy="0"/>
+          <a:chOff x="0" y="0"/>
+          <a:chExt cx="0" cy="0"/>
+        </a:xfrm>
+      </p:grpSpPr>
+      <p:sp>
+        <p:nvSpPr>
+          <p:cNvPr id="2" name="Slide Image Placeholder 1"/>
+          <p:cNvSpPr>
+            <a:spLocks noGrp="1" noRot="1" noChangeAspect="1"/>
+          </p:cNvSpPr>
+          <p:nvPr>
+            <p:ph type="sldImg"/>
+          </p:nvPr>
+        </p:nvSpPr>
+        <p:spPr/>
+      </p:sp>
+      <p:sp>
+        <p:nvSpPr>
+          <p:cNvPr id="3" name="Notes Placeholder 2"/>
+          <p:cNvSpPr>
+            <a:spLocks noGrp="1"/>
+          </p:cNvSpPr>
+          <p:nvPr>
+            <p:ph type="body" idx="1"/>
+          </p:nvPr>
+        </p:nvSpPr>
+        <p:spPr/>
+        <p:txBody>
+          <a:bodyPr/>
+          <a:lstStyle/>
+          <a:p>
+            <a:r>
+              <a:rPr lang="sr-Latn-RS"/>
+              <a:t>MAE</a:t>
+            </a:r>
+            <a:r>
+              <a:rPr lang="en-US"/>
+              <a:t> – Srednja apsolutna greska (apsoltna vrednost srednje vrednosti izmedju realne I predvidjene vrednosti)</a:t>
+            </a:r>
+          </a:p>
+          <a:p>
+            <a:r>
+              <a:rPr lang="sr-Latn-RS"/>
+              <a:t>RMSE</a:t>
+            </a:r>
+            <a:r>
+              <a:rPr lang="en-US"/>
+              <a:t> – koren prosecne kvadratne vrednosti greske</a:t>
+            </a:r>
+            <a:endParaRPr lang="sr-Latn-RS"/>
+          </a:p>
+        </p:txBody>
+      </p:sp>
+      <p:sp>
+        <p:nvSpPr>
+          <p:cNvPr id="4" name="Slide Number Placeholder 3"/>
+          <p:cNvSpPr>
+            <a:spLocks noGrp="1"/>
+          </p:cNvSpPr>
+          <p:nvPr>
+            <p:ph type="sldNum" sz="quarter" idx="5"/>
+          </p:nvPr>
+        </p:nvSpPr>
+        <p:spPr/>
+        <p:txBody>
+          <a:bodyPr/>
+          <a:lstStyle/>
+          <a:p>
+            <a:fld id="{4FC7460A-90DB-41A8-A38A-96DECAA7D495}" type="slidenum">
+              <a:rPr lang="sr-Latn-RS" smtClean="0"/>
+              <a:t>5</a:t>
+            </a:fld>
+            <a:endParaRPr lang="sr-Latn-RS"/>
+          </a:p>
+        </p:txBody>
+      </p:sp>
+    </p:spTree>
+    <p:extLst>
+      <p:ext uri="{BB962C8B-B14F-4D97-AF65-F5344CB8AC3E}">
+        <p14:creationId xmlns:p14="http://schemas.microsoft.com/office/powerpoint/2010/main" val="1624633721"/>
+      </p:ext>
+    </p:extLst>
+  </p:cSld>
+  <p:clrMapOvr>
+    <a:masterClrMapping/>
+  </p:clrMapOvr>
+</p:notes>
+</file>
+
 <file path=ppt/slideLayouts/slideLayout1.xml><?xml version="1.0" encoding="utf-8"?>
 <p:sldLayout xmlns:a="http://schemas.openxmlformats.org/drawingml/2006/main" xmlns:r="http://schemas.openxmlformats.org/officeDocument/2006/relationships" xmlns:p="http://schemas.openxmlformats.org/presentationml/2006/main" type="title" preserve="1">
   <p:cSld name="Title Slide">
@@ -311,7 +765,7 @@
           <a:p>
             <a:fld id="{3C24FA54-30F0-49AA-A0F2-55E1A7CF0904}" type="datetimeFigureOut">
               <a:rPr lang="en-US" smtClean="0"/>
-              <a:t>1/17/2026</a:t>
+              <a:t>2/27/2026</a:t>
             </a:fld>
             <a:endParaRPr lang="en-US"/>
           </a:p>
@@ -609,7 +1063,7 @@
           <a:p>
             <a:fld id="{3C24FA54-30F0-49AA-A0F2-55E1A7CF0904}" type="datetimeFigureOut">
               <a:rPr lang="en-US" smtClean="0"/>
-              <a:t>1/17/2026</a:t>
+              <a:t>2/27/2026</a:t>
             </a:fld>
             <a:endParaRPr lang="en-US"/>
           </a:p>
@@ -801,7 +1255,7 @@
           <a:p>
             <a:fld id="{3C24FA54-30F0-49AA-A0F2-55E1A7CF0904}" type="datetimeFigureOut">
               <a:rPr lang="en-US" smtClean="0"/>
-              <a:t>1/17/2026</a:t>
+              <a:t>2/27/2026</a:t>
             </a:fld>
             <a:endParaRPr lang="en-US"/>
           </a:p>
@@ -1062,7 +1516,7 @@
           <a:p>
             <a:fld id="{3C24FA54-30F0-49AA-A0F2-55E1A7CF0904}" type="datetimeFigureOut">
               <a:rPr lang="en-US" smtClean="0"/>
-              <a:t>1/17/2026</a:t>
+              <a:t>2/27/2026</a:t>
             </a:fld>
             <a:endParaRPr lang="en-US"/>
           </a:p>
@@ -1486,7 +1940,7 @@
           <a:p>
             <a:fld id="{3C24FA54-30F0-49AA-A0F2-55E1A7CF0904}" type="datetimeFigureOut">
               <a:rPr lang="en-US" smtClean="0"/>
-              <a:t>1/17/2026</a:t>
+              <a:t>2/27/2026</a:t>
             </a:fld>
             <a:endParaRPr lang="en-US"/>
           </a:p>
@@ -2023,7 +2477,7 @@
           <a:p>
             <a:fld id="{3C24FA54-30F0-49AA-A0F2-55E1A7CF0904}" type="datetimeFigureOut">
               <a:rPr lang="en-US" smtClean="0"/>
-              <a:t>1/17/2026</a:t>
+              <a:t>2/27/2026</a:t>
             </a:fld>
             <a:endParaRPr lang="en-US"/>
           </a:p>
@@ -2887,7 +3341,7 @@
           <a:p>
             <a:fld id="{3C24FA54-30F0-49AA-A0F2-55E1A7CF0904}" type="datetimeFigureOut">
               <a:rPr lang="en-US" smtClean="0"/>
-              <a:t>1/17/2026</a:t>
+              <a:t>2/27/2026</a:t>
             </a:fld>
             <a:endParaRPr lang="en-US"/>
           </a:p>
@@ -3057,7 +3511,7 @@
           <a:p>
             <a:fld id="{3C24FA54-30F0-49AA-A0F2-55E1A7CF0904}" type="datetimeFigureOut">
               <a:rPr lang="en-US" smtClean="0"/>
-              <a:t>1/17/2026</a:t>
+              <a:t>2/27/2026</a:t>
             </a:fld>
             <a:endParaRPr lang="en-US"/>
           </a:p>
@@ -3241,7 +3695,7 @@
           <a:p>
             <a:fld id="{3C24FA54-30F0-49AA-A0F2-55E1A7CF0904}" type="datetimeFigureOut">
               <a:rPr lang="en-US" smtClean="0"/>
-              <a:t>1/17/2026</a:t>
+              <a:t>2/27/2026</a:t>
             </a:fld>
             <a:endParaRPr lang="en-US"/>
           </a:p>
@@ -3411,7 +3865,7 @@
           <a:p>
             <a:fld id="{3C24FA54-30F0-49AA-A0F2-55E1A7CF0904}" type="datetimeFigureOut">
               <a:rPr lang="en-US" smtClean="0"/>
-              <a:t>1/17/2026</a:t>
+              <a:t>2/27/2026</a:t>
             </a:fld>
             <a:endParaRPr lang="en-US"/>
           </a:p>
@@ -3655,7 +4109,7 @@
           <a:p>
             <a:fld id="{3C24FA54-30F0-49AA-A0F2-55E1A7CF0904}" type="datetimeFigureOut">
               <a:rPr lang="en-US" smtClean="0"/>
-              <a:t>1/17/2026</a:t>
+              <a:t>2/27/2026</a:t>
             </a:fld>
             <a:endParaRPr lang="en-US"/>
           </a:p>
@@ -3891,7 +4345,7 @@
           <a:p>
             <a:fld id="{3C24FA54-30F0-49AA-A0F2-55E1A7CF0904}" type="datetimeFigureOut">
               <a:rPr lang="en-US" smtClean="0"/>
-              <a:t>1/17/2026</a:t>
+              <a:t>2/27/2026</a:t>
             </a:fld>
             <a:endParaRPr lang="en-US"/>
           </a:p>
@@ -4357,7 +4811,7 @@
           <a:p>
             <a:fld id="{3C24FA54-30F0-49AA-A0F2-55E1A7CF0904}" type="datetimeFigureOut">
               <a:rPr lang="en-US" smtClean="0"/>
-              <a:t>1/17/2026</a:t>
+              <a:t>2/27/2026</a:t>
             </a:fld>
             <a:endParaRPr lang="en-US"/>
           </a:p>
@@ -4475,7 +4929,7 @@
           <a:p>
             <a:fld id="{3C24FA54-30F0-49AA-A0F2-55E1A7CF0904}" type="datetimeFigureOut">
               <a:rPr lang="en-US" smtClean="0"/>
-              <a:t>1/17/2026</a:t>
+              <a:t>2/27/2026</a:t>
             </a:fld>
             <a:endParaRPr lang="en-US"/>
           </a:p>
@@ -4570,7 +5024,7 @@
           <a:p>
             <a:fld id="{3C24FA54-30F0-49AA-A0F2-55E1A7CF0904}" type="datetimeFigureOut">
               <a:rPr lang="en-US" smtClean="0"/>
-              <a:t>1/17/2026</a:t>
+              <a:t>2/27/2026</a:t>
             </a:fld>
             <a:endParaRPr lang="en-US"/>
           </a:p>
@@ -4825,7 +5279,7 @@
           <a:p>
             <a:fld id="{3C24FA54-30F0-49AA-A0F2-55E1A7CF0904}" type="datetimeFigureOut">
               <a:rPr lang="en-US" smtClean="0"/>
-              <a:t>1/17/2026</a:t>
+              <a:t>2/27/2026</a:t>
             </a:fld>
             <a:endParaRPr lang="en-US"/>
           </a:p>
@@ -5125,7 +5579,7 @@
           <a:p>
             <a:fld id="{3C24FA54-30F0-49AA-A0F2-55E1A7CF0904}" type="datetimeFigureOut">
               <a:rPr lang="en-US" smtClean="0"/>
-              <a:t>1/17/2026</a:t>
+              <a:t>2/27/2026</a:t>
             </a:fld>
             <a:endParaRPr lang="en-US"/>
           </a:p>
@@ -5359,7 +5813,7 @@
           <a:p>
             <a:fld id="{3C24FA54-30F0-49AA-A0F2-55E1A7CF0904}" type="datetimeFigureOut">
               <a:rPr lang="en-US" smtClean="0"/>
-              <a:t>1/17/2026</a:t>
+              <a:t>2/27/2026</a:t>
             </a:fld>
             <a:endParaRPr lang="en-US"/>
           </a:p>
@@ -6160,32 +6614,18 @@
               <a:t>Predmet</a:t>
             </a:r>
             <a:r>
-              <a:rPr lang="en-US" sz="2400" dirty="0">
+              <a:rPr lang="en-US" sz="2400">
                 <a:latin typeface="Times New Roman" panose="02020603050405020304" pitchFamily="18" charset="0"/>
                 <a:cs typeface="Times New Roman" panose="02020603050405020304" pitchFamily="18" charset="0"/>
               </a:rPr>
               <a:t>: </a:t>
             </a:r>
             <a:r>
-              <a:rPr lang="en-US" sz="2400" dirty="0" err="1">
-                <a:latin typeface="Times New Roman" panose="02020603050405020304" pitchFamily="18" charset="0"/>
-                <a:cs typeface="Times New Roman" panose="02020603050405020304" pitchFamily="18" charset="0"/>
-              </a:rPr>
-              <a:t>Inteligentni</a:t>
-            </a:r>
-            <a:r>
-              <a:rPr lang="en-US" sz="2400" dirty="0">
-                <a:latin typeface="Times New Roman" panose="02020603050405020304" pitchFamily="18" charset="0"/>
-                <a:cs typeface="Times New Roman" panose="02020603050405020304" pitchFamily="18" charset="0"/>
-              </a:rPr>
-              <a:t> </a:t>
-            </a:r>
-            <a:r>
-              <a:rPr lang="en-US" sz="2400" dirty="0" err="1">
-                <a:latin typeface="Times New Roman" panose="02020603050405020304" pitchFamily="18" charset="0"/>
-                <a:cs typeface="Times New Roman" panose="02020603050405020304" pitchFamily="18" charset="0"/>
-              </a:rPr>
-              <a:t>sistemi</a:t>
+              <a:rPr lang="sr-Latn-RS" sz="2400">
+                <a:latin typeface="Times New Roman" panose="02020603050405020304" pitchFamily="18" charset="0"/>
+                <a:cs typeface="Times New Roman" panose="02020603050405020304" pitchFamily="18" charset="0"/>
+              </a:rPr>
+              <a:t>Duboko učenje</a:t>
             </a:r>
             <a:endParaRPr lang="en-US" sz="2400" dirty="0">
               <a:latin typeface="Times New Roman" panose="02020603050405020304" pitchFamily="18" charset="0"/>
@@ -6309,7 +6749,28 @@
                 <a:latin typeface="Times New Roman" panose="02020603050405020304" pitchFamily="18" charset="0"/>
                 <a:cs typeface="Times New Roman" panose="02020603050405020304" pitchFamily="18" charset="0"/>
               </a:rPr>
-              <a:t>                                       Prof. dr. Leonid V. Stoimenov</a:t>
+              <a:t>                                       Prof. dr</a:t>
+            </a:r>
+            <a:r>
+              <a:rPr lang="sr-Latn-RS" sz="2400">
+                <a:latin typeface="Times New Roman" panose="02020603050405020304" pitchFamily="18" charset="0"/>
+                <a:cs typeface="Times New Roman" panose="02020603050405020304" pitchFamily="18" charset="0"/>
+              </a:rPr>
+              <a:t>. </a:t>
+            </a:r>
+            <a:r>
+              <a:rPr lang="en-US" sz="2400">
+                <a:latin typeface="Times New Roman" panose="02020603050405020304" pitchFamily="18" charset="0"/>
+                <a:cs typeface="Times New Roman" panose="02020603050405020304" pitchFamily="18" charset="0"/>
+              </a:rPr>
+              <a:t>Aleksandar Milosavljevi</a:t>
+            </a:r>
+            <a:r>
+              <a:rPr lang="sr-Latn-RS" sz="2400">
+                <a:latin typeface="Times New Roman" panose="02020603050405020304" pitchFamily="18" charset="0"/>
+                <a:cs typeface="Times New Roman" panose="02020603050405020304" pitchFamily="18" charset="0"/>
+              </a:rPr>
+              <a:t>ć</a:t>
             </a:r>
             <a:endParaRPr lang="en-US" sz="2400" dirty="0">
               <a:latin typeface="Times New Roman" panose="02020603050405020304" pitchFamily="18" charset="0"/>
@@ -6350,7 +6811,35 @@
                 <a:latin typeface="Times New Roman" panose="02020603050405020304" pitchFamily="18" charset="0"/>
                 <a:cs typeface="Times New Roman" panose="02020603050405020304" pitchFamily="18" charset="0"/>
               </a:rPr>
-              <a:t>Niš, januar 2026. Godina</a:t>
+              <a:t>Niš</a:t>
+            </a:r>
+            <a:r>
+              <a:rPr lang="sr-Latn-RS" sz="2400">
+                <a:latin typeface="Times New Roman" panose="02020603050405020304" pitchFamily="18" charset="0"/>
+                <a:cs typeface="Times New Roman" panose="02020603050405020304" pitchFamily="18" charset="0"/>
+              </a:rPr>
+              <a:t>, </a:t>
+            </a:r>
+            <a:r>
+              <a:rPr lang="en-US" sz="2400">
+                <a:latin typeface="Times New Roman" panose="02020603050405020304" pitchFamily="18" charset="0"/>
+                <a:cs typeface="Times New Roman" panose="02020603050405020304" pitchFamily="18" charset="0"/>
+              </a:rPr>
+              <a:t>mart</a:t>
+            </a:r>
+            <a:r>
+              <a:rPr lang="sr-Latn-RS" sz="2400">
+                <a:latin typeface="Times New Roman" panose="02020603050405020304" pitchFamily="18" charset="0"/>
+                <a:cs typeface="Times New Roman" panose="02020603050405020304" pitchFamily="18" charset="0"/>
+              </a:rPr>
+              <a:t> </a:t>
+            </a:r>
+            <a:r>
+              <a:rPr lang="sr-Latn-RS" sz="2400" dirty="0">
+                <a:latin typeface="Times New Roman" panose="02020603050405020304" pitchFamily="18" charset="0"/>
+                <a:cs typeface="Times New Roman" panose="02020603050405020304" pitchFamily="18" charset="0"/>
+              </a:rPr>
+              <a:t>2026. Godina</a:t>
             </a:r>
             <a:endParaRPr lang="en-US" sz="2400" dirty="0">
               <a:latin typeface="Times New Roman" panose="02020603050405020304" pitchFamily="18" charset="0"/>
@@ -6400,240 +6889,6 @@
           <p:cNvPr id="2" name="Title 1">
             <a:extLst>
               <a:ext uri="{FF2B5EF4-FFF2-40B4-BE49-F238E27FC236}">
-                <a16:creationId xmlns:a16="http://schemas.microsoft.com/office/drawing/2014/main" id="{2396CF95-87B3-FB90-7CBB-767E7EE28FED}"/>
-              </a:ext>
-            </a:extLst>
-          </p:cNvPr>
-          <p:cNvSpPr>
-            <a:spLocks noGrp="1"/>
-          </p:cNvSpPr>
-          <p:nvPr>
-            <p:ph type="title"/>
-          </p:nvPr>
-        </p:nvSpPr>
-        <p:spPr>
-          <a:xfrm>
-            <a:off x="913795" y="478971"/>
-            <a:ext cx="10353762" cy="970450"/>
-          </a:xfrm>
-        </p:spPr>
-        <p:txBody>
-          <a:bodyPr>
-            <a:normAutofit/>
-          </a:bodyPr>
-          <a:lstStyle/>
-          <a:p>
-            <a:r>
-              <a:rPr lang="sr-Latn-RS" sz="4400" b="1" dirty="0">
-                <a:latin typeface="Times New Roman" panose="02020603050405020304" pitchFamily="18" charset="0"/>
-                <a:cs typeface="Times New Roman" panose="02020603050405020304" pitchFamily="18" charset="0"/>
-              </a:rPr>
-              <a:t>STATISTIČKA EVALUACIJA</a:t>
-            </a:r>
-            <a:endParaRPr lang="en-US" sz="4400" b="1" dirty="0">
-              <a:latin typeface="Times New Roman" panose="02020603050405020304" pitchFamily="18" charset="0"/>
-              <a:cs typeface="Times New Roman" panose="02020603050405020304" pitchFamily="18" charset="0"/>
-            </a:endParaRPr>
-          </a:p>
-        </p:txBody>
-      </p:sp>
-      <p:sp>
-        <p:nvSpPr>
-          <p:cNvPr id="3" name="Content Placeholder 2">
-            <a:extLst>
-              <a:ext uri="{FF2B5EF4-FFF2-40B4-BE49-F238E27FC236}">
-                <a16:creationId xmlns:a16="http://schemas.microsoft.com/office/drawing/2014/main" id="{79648274-DDEF-7D9A-AB1C-59C4342D3926}"/>
-              </a:ext>
-            </a:extLst>
-          </p:cNvPr>
-          <p:cNvSpPr>
-            <a:spLocks noGrp="1"/>
-          </p:cNvSpPr>
-          <p:nvPr>
-            <p:ph idx="1"/>
-          </p:nvPr>
-        </p:nvSpPr>
-        <p:spPr>
-          <a:xfrm>
-            <a:off x="913795" y="1979192"/>
-            <a:ext cx="10353762" cy="4058751"/>
-          </a:xfrm>
-        </p:spPr>
-        <p:txBody>
-          <a:bodyPr>
-            <a:normAutofit/>
-          </a:bodyPr>
-          <a:lstStyle/>
-          <a:p>
-            <a:r>
-              <a:rPr lang="en-US" sz="2400" dirty="0">
-                <a:latin typeface="Times New Roman" panose="02020603050405020304" pitchFamily="18" charset="0"/>
-                <a:cs typeface="Times New Roman" panose="02020603050405020304" pitchFamily="18" charset="0"/>
-              </a:rPr>
-              <a:t>MAE </a:t>
-            </a:r>
-            <a:r>
-              <a:rPr lang="en-US" sz="2400" dirty="0" err="1">
-                <a:latin typeface="Times New Roman" panose="02020603050405020304" pitchFamily="18" charset="0"/>
-                <a:cs typeface="Times New Roman" panose="02020603050405020304" pitchFamily="18" charset="0"/>
-              </a:rPr>
-              <a:t>i</a:t>
-            </a:r>
-            <a:r>
-              <a:rPr lang="en-US" sz="2400" dirty="0">
-                <a:latin typeface="Times New Roman" panose="02020603050405020304" pitchFamily="18" charset="0"/>
-                <a:cs typeface="Times New Roman" panose="02020603050405020304" pitchFamily="18" charset="0"/>
-              </a:rPr>
-              <a:t> RMSE </a:t>
-            </a:r>
-            <a:r>
-              <a:rPr lang="en-US" sz="2400" dirty="0" err="1">
-                <a:latin typeface="Times New Roman" panose="02020603050405020304" pitchFamily="18" charset="0"/>
-                <a:cs typeface="Times New Roman" panose="02020603050405020304" pitchFamily="18" charset="0"/>
-              </a:rPr>
-              <a:t>kao</a:t>
-            </a:r>
-            <a:r>
-              <a:rPr lang="en-US" sz="2400" dirty="0">
-                <a:latin typeface="Times New Roman" panose="02020603050405020304" pitchFamily="18" charset="0"/>
-                <a:cs typeface="Times New Roman" panose="02020603050405020304" pitchFamily="18" charset="0"/>
-              </a:rPr>
-              <a:t> </a:t>
-            </a:r>
-            <a:r>
-              <a:rPr lang="en-US" sz="2400" dirty="0" err="1">
-                <a:latin typeface="Times New Roman" panose="02020603050405020304" pitchFamily="18" charset="0"/>
-                <a:cs typeface="Times New Roman" panose="02020603050405020304" pitchFamily="18" charset="0"/>
-              </a:rPr>
-              <a:t>ključne</a:t>
-            </a:r>
-            <a:r>
-              <a:rPr lang="en-US" sz="2400" dirty="0">
-                <a:latin typeface="Times New Roman" panose="02020603050405020304" pitchFamily="18" charset="0"/>
-                <a:cs typeface="Times New Roman" panose="02020603050405020304" pitchFamily="18" charset="0"/>
-              </a:rPr>
-              <a:t> </a:t>
-            </a:r>
-            <a:r>
-              <a:rPr lang="en-US" sz="2400" dirty="0" err="1">
-                <a:latin typeface="Times New Roman" panose="02020603050405020304" pitchFamily="18" charset="0"/>
-                <a:cs typeface="Times New Roman" panose="02020603050405020304" pitchFamily="18" charset="0"/>
-              </a:rPr>
-              <a:t>metrike</a:t>
-            </a:r>
-            <a:endParaRPr lang="sr-Latn-RS" sz="2400" dirty="0">
-              <a:latin typeface="Times New Roman" panose="02020603050405020304" pitchFamily="18" charset="0"/>
-              <a:cs typeface="Times New Roman" panose="02020603050405020304" pitchFamily="18" charset="0"/>
-            </a:endParaRPr>
-          </a:p>
-          <a:p>
-            <a:r>
-              <a:rPr lang="en-US" sz="2400" dirty="0" err="1">
-                <a:latin typeface="Times New Roman" panose="02020603050405020304" pitchFamily="18" charset="0"/>
-                <a:cs typeface="Times New Roman" panose="02020603050405020304" pitchFamily="18" charset="0"/>
-              </a:rPr>
-              <a:t>Vizuelna</a:t>
-            </a:r>
-            <a:r>
-              <a:rPr lang="en-US" sz="2400" dirty="0">
-                <a:latin typeface="Times New Roman" panose="02020603050405020304" pitchFamily="18" charset="0"/>
-                <a:cs typeface="Times New Roman" panose="02020603050405020304" pitchFamily="18" charset="0"/>
-              </a:rPr>
-              <a:t> </a:t>
-            </a:r>
-            <a:r>
-              <a:rPr lang="en-US" sz="2400" dirty="0" err="1">
-                <a:latin typeface="Times New Roman" panose="02020603050405020304" pitchFamily="18" charset="0"/>
-                <a:cs typeface="Times New Roman" panose="02020603050405020304" pitchFamily="18" charset="0"/>
-              </a:rPr>
-              <a:t>analiza</a:t>
-            </a:r>
-            <a:r>
-              <a:rPr lang="en-US" sz="2400" dirty="0">
-                <a:latin typeface="Times New Roman" panose="02020603050405020304" pitchFamily="18" charset="0"/>
-                <a:cs typeface="Times New Roman" panose="02020603050405020304" pitchFamily="18" charset="0"/>
-              </a:rPr>
-              <a:t> </a:t>
-            </a:r>
-            <a:r>
-              <a:rPr lang="en-US" sz="2400" dirty="0" err="1">
-                <a:latin typeface="Times New Roman" panose="02020603050405020304" pitchFamily="18" charset="0"/>
-                <a:cs typeface="Times New Roman" panose="02020603050405020304" pitchFamily="18" charset="0"/>
-              </a:rPr>
-              <a:t>odstupanja</a:t>
-            </a:r>
-            <a:endParaRPr lang="sr-Latn-RS" sz="2400" dirty="0">
-              <a:latin typeface="Times New Roman" panose="02020603050405020304" pitchFamily="18" charset="0"/>
-              <a:cs typeface="Times New Roman" panose="02020603050405020304" pitchFamily="18" charset="0"/>
-            </a:endParaRPr>
-          </a:p>
-          <a:p>
-            <a:r>
-              <a:rPr lang="en-US" sz="2400" dirty="0" err="1">
-                <a:latin typeface="Times New Roman" panose="02020603050405020304" pitchFamily="18" charset="0"/>
-                <a:cs typeface="Times New Roman" panose="02020603050405020304" pitchFamily="18" charset="0"/>
-              </a:rPr>
-              <a:t>Uloga</a:t>
-            </a:r>
-            <a:r>
-              <a:rPr lang="en-US" sz="2400" dirty="0">
-                <a:latin typeface="Times New Roman" panose="02020603050405020304" pitchFamily="18" charset="0"/>
-                <a:cs typeface="Times New Roman" panose="02020603050405020304" pitchFamily="18" charset="0"/>
-              </a:rPr>
-              <a:t> </a:t>
-            </a:r>
-            <a:r>
-              <a:rPr lang="en-US" sz="2400" dirty="0" err="1">
-                <a:latin typeface="Times New Roman" panose="02020603050405020304" pitchFamily="18" charset="0"/>
-                <a:cs typeface="Times New Roman" panose="02020603050405020304" pitchFamily="18" charset="0"/>
-              </a:rPr>
-              <a:t>prozora</a:t>
-            </a:r>
-            <a:r>
-              <a:rPr lang="en-US" sz="2400" dirty="0">
-                <a:latin typeface="Times New Roman" panose="02020603050405020304" pitchFamily="18" charset="0"/>
-                <a:cs typeface="Times New Roman" panose="02020603050405020304" pitchFamily="18" charset="0"/>
-              </a:rPr>
-              <a:t> (window=7)</a:t>
-            </a:r>
-          </a:p>
-        </p:txBody>
-      </p:sp>
-    </p:spTree>
-    <p:extLst>
-      <p:ext uri="{BB962C8B-B14F-4D97-AF65-F5344CB8AC3E}">
-        <p14:creationId xmlns:p14="http://schemas.microsoft.com/office/powerpoint/2010/main" val="200358856"/>
-      </p:ext>
-    </p:extLst>
-  </p:cSld>
-  <p:clrMapOvr>
-    <a:masterClrMapping/>
-  </p:clrMapOvr>
-</p:sld>
-</file>
-
-<file path=ppt/slides/slide11.xml><?xml version="1.0" encoding="utf-8"?>
-<p:sld xmlns:a="http://schemas.openxmlformats.org/drawingml/2006/main" xmlns:r="http://schemas.openxmlformats.org/officeDocument/2006/relationships" xmlns:p="http://schemas.openxmlformats.org/presentationml/2006/main">
-  <p:cSld>
-    <p:spTree>
-      <p:nvGrpSpPr>
-        <p:cNvPr id="1" name=""/>
-        <p:cNvGrpSpPr/>
-        <p:nvPr/>
-      </p:nvGrpSpPr>
-      <p:grpSpPr>
-        <a:xfrm>
-          <a:off x="0" y="0"/>
-          <a:ext cx="0" cy="0"/>
-          <a:chOff x="0" y="0"/>
-          <a:chExt cx="0" cy="0"/>
-        </a:xfrm>
-      </p:grpSpPr>
-      <p:sp>
-        <p:nvSpPr>
-          <p:cNvPr id="2" name="Title 1">
-            <a:extLst>
-              <a:ext uri="{FF2B5EF4-FFF2-40B4-BE49-F238E27FC236}">
                 <a16:creationId xmlns:a16="http://schemas.microsoft.com/office/drawing/2014/main" id="{06E2ADA4-8AA0-A0F8-2F51-D6B795D08BE1}"/>
               </a:ext>
             </a:extLst>
@@ -6700,79 +6955,38 @@
           <a:lstStyle/>
           <a:p>
             <a:r>
-              <a:rPr lang="en-US" sz="2400" dirty="0" err="1">
-                <a:latin typeface="Times New Roman" panose="02020603050405020304" pitchFamily="18" charset="0"/>
-                <a:cs typeface="Times New Roman" panose="02020603050405020304" pitchFamily="18" charset="0"/>
-              </a:rPr>
-              <a:t>Automatska</a:t>
-            </a:r>
-            <a:r>
-              <a:rPr lang="en-US" sz="2400" dirty="0">
-                <a:latin typeface="Times New Roman" panose="02020603050405020304" pitchFamily="18" charset="0"/>
-                <a:cs typeface="Times New Roman" panose="02020603050405020304" pitchFamily="18" charset="0"/>
-              </a:rPr>
-              <a:t> </a:t>
-            </a:r>
-            <a:r>
-              <a:rPr lang="en-US" sz="2400" dirty="0" err="1">
-                <a:latin typeface="Times New Roman" panose="02020603050405020304" pitchFamily="18" charset="0"/>
-                <a:cs typeface="Times New Roman" panose="02020603050405020304" pitchFamily="18" charset="0"/>
-              </a:rPr>
-              <a:t>simulacija</a:t>
-            </a:r>
-            <a:endParaRPr lang="sr-Latn-RS" sz="2400" dirty="0">
-              <a:latin typeface="Times New Roman" panose="02020603050405020304" pitchFamily="18" charset="0"/>
-              <a:cs typeface="Times New Roman" panose="02020603050405020304" pitchFamily="18" charset="0"/>
-            </a:endParaRPr>
-          </a:p>
-          <a:p>
-            <a:r>
-              <a:rPr lang="en-US" sz="2400" dirty="0" err="1">
-                <a:latin typeface="Times New Roman" panose="02020603050405020304" pitchFamily="18" charset="0"/>
-                <a:cs typeface="Times New Roman" panose="02020603050405020304" pitchFamily="18" charset="0"/>
-              </a:rPr>
-              <a:t>Vizuelna</a:t>
-            </a:r>
-            <a:r>
-              <a:rPr lang="en-US" sz="2400" dirty="0">
-                <a:latin typeface="Times New Roman" panose="02020603050405020304" pitchFamily="18" charset="0"/>
-                <a:cs typeface="Times New Roman" panose="02020603050405020304" pitchFamily="18" charset="0"/>
-              </a:rPr>
-              <a:t> </a:t>
-            </a:r>
-            <a:r>
-              <a:rPr lang="en-US" sz="2400" dirty="0" err="1">
-                <a:latin typeface="Times New Roman" panose="02020603050405020304" pitchFamily="18" charset="0"/>
-                <a:cs typeface="Times New Roman" panose="02020603050405020304" pitchFamily="18" charset="0"/>
-              </a:rPr>
-              <a:t>transparentnost</a:t>
-            </a:r>
-            <a:endParaRPr lang="sr-Latn-RS" sz="2400" dirty="0">
-              <a:latin typeface="Times New Roman" panose="02020603050405020304" pitchFamily="18" charset="0"/>
-              <a:cs typeface="Times New Roman" panose="02020603050405020304" pitchFamily="18" charset="0"/>
-            </a:endParaRPr>
-          </a:p>
-          <a:p>
-            <a:r>
-              <a:rPr lang="en-US" sz="2400" dirty="0" err="1">
-                <a:latin typeface="Times New Roman" panose="02020603050405020304" pitchFamily="18" charset="0"/>
-                <a:cs typeface="Times New Roman" panose="02020603050405020304" pitchFamily="18" charset="0"/>
-              </a:rPr>
-              <a:t>Prilagodljivost</a:t>
-            </a:r>
-            <a:r>
-              <a:rPr lang="en-US" sz="2400" dirty="0">
-                <a:latin typeface="Times New Roman" panose="02020603050405020304" pitchFamily="18" charset="0"/>
-                <a:cs typeface="Times New Roman" panose="02020603050405020304" pitchFamily="18" charset="0"/>
-              </a:rPr>
-              <a:t> </a:t>
-            </a:r>
-            <a:r>
-              <a:rPr lang="en-US" sz="2400" dirty="0" err="1">
-                <a:latin typeface="Times New Roman" panose="02020603050405020304" pitchFamily="18" charset="0"/>
-                <a:cs typeface="Times New Roman" panose="02020603050405020304" pitchFamily="18" charset="0"/>
-              </a:rPr>
-              <a:t>korisniku</a:t>
+              <a:rPr lang="en-US" sz="2400">
+                <a:latin typeface="Times New Roman" panose="02020603050405020304" pitchFamily="18" charset="0"/>
+                <a:cs typeface="Times New Roman" panose="02020603050405020304" pitchFamily="18" charset="0"/>
+              </a:rPr>
+              <a:t>Preciznije predikcije – hvata kompleksne obrasce u podacima.</a:t>
+            </a:r>
+          </a:p>
+          <a:p>
+            <a:r>
+              <a:rPr lang="en-US" sz="2400">
+                <a:latin typeface="Times New Roman" panose="02020603050405020304" pitchFamily="18" charset="0"/>
+                <a:cs typeface="Times New Roman" panose="02020603050405020304" pitchFamily="18" charset="0"/>
+              </a:rPr>
+              <a:t>Brža analiza – automatski obrađuje velike količine istorijskih troškova.</a:t>
+            </a:r>
+          </a:p>
+          <a:p>
+            <a:r>
+              <a:rPr lang="en-US" sz="2400">
+                <a:latin typeface="Times New Roman" panose="02020603050405020304" pitchFamily="18" charset="0"/>
+                <a:cs typeface="Times New Roman" panose="02020603050405020304" pitchFamily="18" charset="0"/>
+              </a:rPr>
+              <a:t>Adaptivnost – prilagođava se promenama u trendovima i sezonalnosti.</a:t>
+            </a:r>
+          </a:p>
+          <a:p>
+            <a:r>
+              <a:rPr lang="en-US" sz="2400">
+                <a:latin typeface="Times New Roman" panose="02020603050405020304" pitchFamily="18" charset="0"/>
+                <a:cs typeface="Times New Roman" panose="02020603050405020304" pitchFamily="18" charset="0"/>
+              </a:rPr>
+              <a:t>Podrška u odlučivanju – pomaže pri planiranju budžeta i smanjenju rizika.</a:t>
             </a:r>
             <a:endParaRPr lang="en-US" sz="2400" dirty="0">
               <a:latin typeface="Times New Roman" panose="02020603050405020304" pitchFamily="18" charset="0"/>
@@ -6809,7 +7023,7 @@
         </p:blipFill>
         <p:spPr>
           <a:xfrm>
-            <a:off x="7092162" y="3429000"/>
+            <a:off x="7366482" y="3831336"/>
             <a:ext cx="2991267" cy="2010056"/>
           </a:xfrm>
           <a:prstGeom prst="rect">
@@ -6821,6 +7035,142 @@
     <p:extLst>
       <p:ext uri="{BB962C8B-B14F-4D97-AF65-F5344CB8AC3E}">
         <p14:creationId xmlns:p14="http://schemas.microsoft.com/office/powerpoint/2010/main" val="215659417"/>
+      </p:ext>
+    </p:extLst>
+  </p:cSld>
+  <p:clrMapOvr>
+    <a:masterClrMapping/>
+  </p:clrMapOvr>
+</p:sld>
+</file>
+
+<file path=ppt/slides/slide11.xml><?xml version="1.0" encoding="utf-8"?>
+<p:sld xmlns:a="http://schemas.openxmlformats.org/drawingml/2006/main" xmlns:r="http://schemas.openxmlformats.org/officeDocument/2006/relationships" xmlns:p="http://schemas.openxmlformats.org/presentationml/2006/main">
+  <p:cSld>
+    <p:spTree>
+      <p:nvGrpSpPr>
+        <p:cNvPr id="1" name=""/>
+        <p:cNvGrpSpPr/>
+        <p:nvPr/>
+      </p:nvGrpSpPr>
+      <p:grpSpPr>
+        <a:xfrm>
+          <a:off x="0" y="0"/>
+          <a:ext cx="0" cy="0"/>
+          <a:chOff x="0" y="0"/>
+          <a:chExt cx="0" cy="0"/>
+        </a:xfrm>
+      </p:grpSpPr>
+      <p:sp>
+        <p:nvSpPr>
+          <p:cNvPr id="2" name="Title 1">
+            <a:extLst>
+              <a:ext uri="{FF2B5EF4-FFF2-40B4-BE49-F238E27FC236}">
+                <a16:creationId xmlns:a16="http://schemas.microsoft.com/office/drawing/2014/main" id="{D38F9FF6-8B1C-E787-7DE1-3D0E0BC41CF2}"/>
+              </a:ext>
+            </a:extLst>
+          </p:cNvPr>
+          <p:cNvSpPr>
+            <a:spLocks noGrp="1"/>
+          </p:cNvSpPr>
+          <p:nvPr>
+            <p:ph type="title"/>
+          </p:nvPr>
+        </p:nvSpPr>
+        <p:spPr/>
+        <p:txBody>
+          <a:bodyPr>
+            <a:normAutofit/>
+          </a:bodyPr>
+          <a:lstStyle/>
+          <a:p>
+            <a:r>
+              <a:rPr lang="sr-Latn-RS" sz="4400" b="1" dirty="0">
+                <a:latin typeface="Times New Roman" panose="02020603050405020304" pitchFamily="18" charset="0"/>
+                <a:cs typeface="Times New Roman" panose="02020603050405020304" pitchFamily="18" charset="0"/>
+              </a:rPr>
+              <a:t>OGRANIČENJA I BUDUĆI RAD</a:t>
+            </a:r>
+            <a:endParaRPr lang="en-US" sz="4400" b="1" dirty="0">
+              <a:latin typeface="Times New Roman" panose="02020603050405020304" pitchFamily="18" charset="0"/>
+              <a:cs typeface="Times New Roman" panose="02020603050405020304" pitchFamily="18" charset="0"/>
+            </a:endParaRPr>
+          </a:p>
+        </p:txBody>
+      </p:sp>
+      <p:sp>
+        <p:nvSpPr>
+          <p:cNvPr id="3" name="Content Placeholder 2">
+            <a:extLst>
+              <a:ext uri="{FF2B5EF4-FFF2-40B4-BE49-F238E27FC236}">
+                <a16:creationId xmlns:a16="http://schemas.microsoft.com/office/drawing/2014/main" id="{4B0A5212-62FA-C3A3-177A-C4F2C1EE2C2F}"/>
+              </a:ext>
+            </a:extLst>
+          </p:cNvPr>
+          <p:cNvSpPr>
+            <a:spLocks noGrp="1"/>
+          </p:cNvSpPr>
+          <p:nvPr>
+            <p:ph idx="1"/>
+          </p:nvPr>
+        </p:nvSpPr>
+        <p:spPr>
+          <a:xfrm>
+            <a:off x="913795" y="2189650"/>
+            <a:ext cx="10353762" cy="3267722"/>
+          </a:xfrm>
+        </p:spPr>
+        <p:txBody>
+          <a:bodyPr>
+            <a:normAutofit/>
+          </a:bodyPr>
+          <a:lstStyle/>
+          <a:p>
+            <a:r>
+              <a:rPr lang="en-US" sz="2400">
+                <a:latin typeface="Times New Roman" panose="02020603050405020304" pitchFamily="18" charset="0"/>
+                <a:cs typeface="Times New Roman" panose="02020603050405020304" pitchFamily="18" charset="0"/>
+              </a:rPr>
+              <a:t>Ograničena tačnost – model precizno predviđa samo do ~60% slučajeva.</a:t>
+            </a:r>
+          </a:p>
+          <a:p>
+            <a:r>
+              <a:rPr lang="en-US" sz="2400">
+                <a:latin typeface="Times New Roman" panose="02020603050405020304" pitchFamily="18" charset="0"/>
+                <a:cs typeface="Times New Roman" panose="02020603050405020304" pitchFamily="18" charset="0"/>
+              </a:rPr>
+              <a:t>Neprilagođeno potpuno dinamičnim troškovima – nagli, neočekivani skokovi troškova se teško predviđaju.</a:t>
+            </a:r>
+          </a:p>
+          <a:p>
+            <a:r>
+              <a:rPr lang="en-US" sz="2400">
+                <a:latin typeface="Times New Roman" panose="02020603050405020304" pitchFamily="18" charset="0"/>
+                <a:cs typeface="Times New Roman" panose="02020603050405020304" pitchFamily="18" charset="0"/>
+              </a:rPr>
+              <a:t>Zavisnost od istorijskih podataka – kvalitet predikcija zavisi od dostupnosti i pouzdanosti prethodnih podataka.</a:t>
+            </a:r>
+          </a:p>
+          <a:p>
+            <a:r>
+              <a:rPr lang="en-US" sz="2400">
+                <a:latin typeface="Times New Roman" panose="02020603050405020304" pitchFamily="18" charset="0"/>
+                <a:cs typeface="Times New Roman" panose="02020603050405020304" pitchFamily="18" charset="0"/>
+              </a:rPr>
+              <a:t>Ograničena generalizacija – model može slabije raditi na novim tipovima troškova ili u potpuno drugačijim uslovima.</a:t>
+            </a:r>
+            <a:endParaRPr lang="en-US" sz="2400" dirty="0">
+              <a:latin typeface="Times New Roman" panose="02020603050405020304" pitchFamily="18" charset="0"/>
+              <a:cs typeface="Times New Roman" panose="02020603050405020304" pitchFamily="18" charset="0"/>
+            </a:endParaRPr>
+          </a:p>
+        </p:txBody>
+      </p:sp>
+    </p:spTree>
+    <p:extLst>
+      <p:ext uri="{BB962C8B-B14F-4D97-AF65-F5344CB8AC3E}">
+        <p14:creationId xmlns:p14="http://schemas.microsoft.com/office/powerpoint/2010/main" val="276411350"/>
       </p:ext>
     </p:extLst>
   </p:cSld>
@@ -6852,277 +7202,6 @@
           <p:cNvPr id="2" name="Title 1">
             <a:extLst>
               <a:ext uri="{FF2B5EF4-FFF2-40B4-BE49-F238E27FC236}">
-                <a16:creationId xmlns:a16="http://schemas.microsoft.com/office/drawing/2014/main" id="{D38F9FF6-8B1C-E787-7DE1-3D0E0BC41CF2}"/>
-              </a:ext>
-            </a:extLst>
-          </p:cNvPr>
-          <p:cNvSpPr>
-            <a:spLocks noGrp="1"/>
-          </p:cNvSpPr>
-          <p:nvPr>
-            <p:ph type="title"/>
-          </p:nvPr>
-        </p:nvSpPr>
-        <p:spPr/>
-        <p:txBody>
-          <a:bodyPr>
-            <a:normAutofit/>
-          </a:bodyPr>
-          <a:lstStyle/>
-          <a:p>
-            <a:r>
-              <a:rPr lang="sr-Latn-RS" sz="4400" b="1" dirty="0">
-                <a:latin typeface="Times New Roman" panose="02020603050405020304" pitchFamily="18" charset="0"/>
-                <a:cs typeface="Times New Roman" panose="02020603050405020304" pitchFamily="18" charset="0"/>
-              </a:rPr>
-              <a:t>OGRANIČENJA I BUDUĆI RAD</a:t>
-            </a:r>
-            <a:endParaRPr lang="en-US" sz="4400" b="1" dirty="0">
-              <a:latin typeface="Times New Roman" panose="02020603050405020304" pitchFamily="18" charset="0"/>
-              <a:cs typeface="Times New Roman" panose="02020603050405020304" pitchFamily="18" charset="0"/>
-            </a:endParaRPr>
-          </a:p>
-        </p:txBody>
-      </p:sp>
-      <p:sp>
-        <p:nvSpPr>
-          <p:cNvPr id="3" name="Content Placeholder 2">
-            <a:extLst>
-              <a:ext uri="{FF2B5EF4-FFF2-40B4-BE49-F238E27FC236}">
-                <a16:creationId xmlns:a16="http://schemas.microsoft.com/office/drawing/2014/main" id="{4B0A5212-62FA-C3A3-177A-C4F2C1EE2C2F}"/>
-              </a:ext>
-            </a:extLst>
-          </p:cNvPr>
-          <p:cNvSpPr>
-            <a:spLocks noGrp="1"/>
-          </p:cNvSpPr>
-          <p:nvPr>
-            <p:ph idx="1"/>
-          </p:nvPr>
-        </p:nvSpPr>
-        <p:spPr>
-          <a:xfrm>
-            <a:off x="913795" y="2189650"/>
-            <a:ext cx="10353762" cy="3267722"/>
-          </a:xfrm>
-        </p:spPr>
-        <p:txBody>
-          <a:bodyPr>
-            <a:normAutofit/>
-          </a:bodyPr>
-          <a:lstStyle/>
-          <a:p>
-            <a:r>
-              <a:rPr lang="en-US" sz="2400" dirty="0" err="1">
-                <a:latin typeface="Times New Roman" panose="02020603050405020304" pitchFamily="18" charset="0"/>
-                <a:cs typeface="Times New Roman" panose="02020603050405020304" pitchFamily="18" charset="0"/>
-              </a:rPr>
-              <a:t>Trenutna</a:t>
-            </a:r>
-            <a:r>
-              <a:rPr lang="en-US" sz="2400" dirty="0">
-                <a:latin typeface="Times New Roman" panose="02020603050405020304" pitchFamily="18" charset="0"/>
-                <a:cs typeface="Times New Roman" panose="02020603050405020304" pitchFamily="18" charset="0"/>
-              </a:rPr>
-              <a:t> </a:t>
-            </a:r>
-            <a:r>
-              <a:rPr lang="en-US" sz="2400" dirty="0" err="1">
-                <a:latin typeface="Times New Roman" panose="02020603050405020304" pitchFamily="18" charset="0"/>
-                <a:cs typeface="Times New Roman" panose="02020603050405020304" pitchFamily="18" charset="0"/>
-              </a:rPr>
-              <a:t>tačnost</a:t>
-            </a:r>
-            <a:r>
-              <a:rPr lang="en-US" sz="2400" dirty="0">
-                <a:latin typeface="Times New Roman" panose="02020603050405020304" pitchFamily="18" charset="0"/>
-                <a:cs typeface="Times New Roman" panose="02020603050405020304" pitchFamily="18" charset="0"/>
-              </a:rPr>
-              <a:t> </a:t>
-            </a:r>
-            <a:r>
-              <a:rPr lang="en-US" sz="2400" dirty="0" err="1">
-                <a:latin typeface="Times New Roman" panose="02020603050405020304" pitchFamily="18" charset="0"/>
-                <a:cs typeface="Times New Roman" panose="02020603050405020304" pitchFamily="18" charset="0"/>
-              </a:rPr>
-              <a:t>može</a:t>
-            </a:r>
-            <a:r>
-              <a:rPr lang="en-US" sz="2400" dirty="0">
-                <a:latin typeface="Times New Roman" panose="02020603050405020304" pitchFamily="18" charset="0"/>
-                <a:cs typeface="Times New Roman" panose="02020603050405020304" pitchFamily="18" charset="0"/>
-              </a:rPr>
-              <a:t> </a:t>
-            </a:r>
-            <a:r>
-              <a:rPr lang="en-US" sz="2400" dirty="0" err="1">
-                <a:latin typeface="Times New Roman" panose="02020603050405020304" pitchFamily="18" charset="0"/>
-                <a:cs typeface="Times New Roman" panose="02020603050405020304" pitchFamily="18" charset="0"/>
-              </a:rPr>
-              <a:t>biti</a:t>
-            </a:r>
-            <a:r>
-              <a:rPr lang="en-US" sz="2400" dirty="0">
-                <a:latin typeface="Times New Roman" panose="02020603050405020304" pitchFamily="18" charset="0"/>
-                <a:cs typeface="Times New Roman" panose="02020603050405020304" pitchFamily="18" charset="0"/>
-              </a:rPr>
-              <a:t> </a:t>
-            </a:r>
-            <a:r>
-              <a:rPr lang="en-US" sz="2400" dirty="0" err="1">
-                <a:latin typeface="Times New Roman" panose="02020603050405020304" pitchFamily="18" charset="0"/>
-                <a:cs typeface="Times New Roman" panose="02020603050405020304" pitchFamily="18" charset="0"/>
-              </a:rPr>
-              <a:t>niska</a:t>
-            </a:r>
-            <a:endParaRPr lang="sr-Latn-RS" sz="2400" dirty="0">
-              <a:latin typeface="Times New Roman" panose="02020603050405020304" pitchFamily="18" charset="0"/>
-              <a:cs typeface="Times New Roman" panose="02020603050405020304" pitchFamily="18" charset="0"/>
-            </a:endParaRPr>
-          </a:p>
-          <a:p>
-            <a:r>
-              <a:rPr lang="en-US" sz="2400" dirty="0" err="1">
-                <a:latin typeface="Times New Roman" panose="02020603050405020304" pitchFamily="18" charset="0"/>
-                <a:cs typeface="Times New Roman" panose="02020603050405020304" pitchFamily="18" charset="0"/>
-              </a:rPr>
-              <a:t>Potencijal</a:t>
-            </a:r>
-            <a:r>
-              <a:rPr lang="en-US" sz="2400" dirty="0">
-                <a:latin typeface="Times New Roman" panose="02020603050405020304" pitchFamily="18" charset="0"/>
-                <a:cs typeface="Times New Roman" panose="02020603050405020304" pitchFamily="18" charset="0"/>
-              </a:rPr>
-              <a:t> za </a:t>
-            </a:r>
-            <a:r>
-              <a:rPr lang="en-US" sz="2400" dirty="0" err="1">
-                <a:latin typeface="Times New Roman" panose="02020603050405020304" pitchFamily="18" charset="0"/>
-                <a:cs typeface="Times New Roman" panose="02020603050405020304" pitchFamily="18" charset="0"/>
-              </a:rPr>
-              <a:t>dodavanje</a:t>
-            </a:r>
-            <a:r>
-              <a:rPr lang="en-US" sz="2400" dirty="0">
-                <a:latin typeface="Times New Roman" panose="02020603050405020304" pitchFamily="18" charset="0"/>
-                <a:cs typeface="Times New Roman" panose="02020603050405020304" pitchFamily="18" charset="0"/>
-              </a:rPr>
-              <a:t> </a:t>
-            </a:r>
-            <a:r>
-              <a:rPr lang="en-US" sz="2400" dirty="0" err="1">
-                <a:latin typeface="Times New Roman" panose="02020603050405020304" pitchFamily="18" charset="0"/>
-                <a:cs typeface="Times New Roman" panose="02020603050405020304" pitchFamily="18" charset="0"/>
-              </a:rPr>
-              <a:t>sezonskih</a:t>
-            </a:r>
-            <a:r>
-              <a:rPr lang="en-US" sz="2400" dirty="0">
-                <a:latin typeface="Times New Roman" panose="02020603050405020304" pitchFamily="18" charset="0"/>
-                <a:cs typeface="Times New Roman" panose="02020603050405020304" pitchFamily="18" charset="0"/>
-              </a:rPr>
-              <a:t> </a:t>
-            </a:r>
-            <a:r>
-              <a:rPr lang="en-US" sz="2400" dirty="0" err="1">
-                <a:latin typeface="Times New Roman" panose="02020603050405020304" pitchFamily="18" charset="0"/>
-                <a:cs typeface="Times New Roman" panose="02020603050405020304" pitchFamily="18" charset="0"/>
-              </a:rPr>
-              <a:t>faktora</a:t>
-            </a:r>
-            <a:endParaRPr lang="sr-Latn-RS" sz="2400" dirty="0">
-              <a:latin typeface="Times New Roman" panose="02020603050405020304" pitchFamily="18" charset="0"/>
-              <a:cs typeface="Times New Roman" panose="02020603050405020304" pitchFamily="18" charset="0"/>
-            </a:endParaRPr>
-          </a:p>
-          <a:p>
-            <a:r>
-              <a:rPr lang="en-US" sz="2400" dirty="0">
-                <a:latin typeface="Times New Roman" panose="02020603050405020304" pitchFamily="18" charset="0"/>
-                <a:cs typeface="Times New Roman" panose="02020603050405020304" pitchFamily="18" charset="0"/>
-              </a:rPr>
-              <a:t>Plan za </a:t>
-            </a:r>
-            <a:r>
-              <a:rPr lang="en-US" sz="2400" dirty="0" err="1">
-                <a:latin typeface="Times New Roman" panose="02020603050405020304" pitchFamily="18" charset="0"/>
-                <a:cs typeface="Times New Roman" panose="02020603050405020304" pitchFamily="18" charset="0"/>
-              </a:rPr>
-              <a:t>poboljšanje</a:t>
-            </a:r>
-            <a:r>
-              <a:rPr lang="en-US" sz="2400" dirty="0">
-                <a:latin typeface="Times New Roman" panose="02020603050405020304" pitchFamily="18" charset="0"/>
-                <a:cs typeface="Times New Roman" panose="02020603050405020304" pitchFamily="18" charset="0"/>
-              </a:rPr>
-              <a:t> </a:t>
-            </a:r>
-            <a:r>
-              <a:rPr lang="en-US" sz="2400" dirty="0" err="1">
-                <a:latin typeface="Times New Roman" panose="02020603050405020304" pitchFamily="18" charset="0"/>
-                <a:cs typeface="Times New Roman" panose="02020603050405020304" pitchFamily="18" charset="0"/>
-              </a:rPr>
-              <a:t>modela</a:t>
-            </a:r>
-            <a:r>
-              <a:rPr lang="en-US" sz="2400" dirty="0">
-                <a:latin typeface="Times New Roman" panose="02020603050405020304" pitchFamily="18" charset="0"/>
-                <a:cs typeface="Times New Roman" panose="02020603050405020304" pitchFamily="18" charset="0"/>
-              </a:rPr>
-              <a:t> </a:t>
-            </a:r>
-            <a:r>
-              <a:rPr lang="en-US" sz="2400" dirty="0" err="1">
-                <a:latin typeface="Times New Roman" panose="02020603050405020304" pitchFamily="18" charset="0"/>
-                <a:cs typeface="Times New Roman" panose="02020603050405020304" pitchFamily="18" charset="0"/>
-              </a:rPr>
-              <a:t>i</a:t>
-            </a:r>
-            <a:r>
-              <a:rPr lang="en-US" sz="2400" dirty="0">
-                <a:latin typeface="Times New Roman" panose="02020603050405020304" pitchFamily="18" charset="0"/>
-                <a:cs typeface="Times New Roman" panose="02020603050405020304" pitchFamily="18" charset="0"/>
-              </a:rPr>
-              <a:t> UI</a:t>
-            </a:r>
-          </a:p>
-        </p:txBody>
-      </p:sp>
-    </p:spTree>
-    <p:extLst>
-      <p:ext uri="{BB962C8B-B14F-4D97-AF65-F5344CB8AC3E}">
-        <p14:creationId xmlns:p14="http://schemas.microsoft.com/office/powerpoint/2010/main" val="276411350"/>
-      </p:ext>
-    </p:extLst>
-  </p:cSld>
-  <p:clrMapOvr>
-    <a:masterClrMapping/>
-  </p:clrMapOvr>
-</p:sld>
-</file>
-
-<file path=ppt/slides/slide13.xml><?xml version="1.0" encoding="utf-8"?>
-<p:sld xmlns:a="http://schemas.openxmlformats.org/drawingml/2006/main" xmlns:r="http://schemas.openxmlformats.org/officeDocument/2006/relationships" xmlns:p="http://schemas.openxmlformats.org/presentationml/2006/main">
-  <p:cSld>
-    <p:spTree>
-      <p:nvGrpSpPr>
-        <p:cNvPr id="1" name=""/>
-        <p:cNvGrpSpPr/>
-        <p:nvPr/>
-      </p:nvGrpSpPr>
-      <p:grpSpPr>
-        <a:xfrm>
-          <a:off x="0" y="0"/>
-          <a:ext cx="0" cy="0"/>
-          <a:chOff x="0" y="0"/>
-          <a:chExt cx="0" cy="0"/>
-        </a:xfrm>
-      </p:grpSpPr>
-      <p:sp>
-        <p:nvSpPr>
-          <p:cNvPr id="2" name="Title 1">
-            <a:extLst>
-              <a:ext uri="{FF2B5EF4-FFF2-40B4-BE49-F238E27FC236}">
                 <a16:creationId xmlns:a16="http://schemas.microsoft.com/office/drawing/2014/main" id="{71E9F6FC-28E4-884F-19B5-A0218336F31F}"/>
               </a:ext>
             </a:extLst>
@@ -7189,289 +7268,37 @@
           <a:lstStyle/>
           <a:p>
             <a:r>
-              <a:rPr lang="en-US" sz="2400" dirty="0" err="1">
-                <a:latin typeface="Times New Roman" panose="02020603050405020304" pitchFamily="18" charset="0"/>
-                <a:cs typeface="Times New Roman" panose="02020603050405020304" pitchFamily="18" charset="0"/>
-              </a:rPr>
-              <a:t>AccountantAI</a:t>
-            </a:r>
-            <a:r>
-              <a:rPr lang="en-US" sz="2400" dirty="0">
-                <a:latin typeface="Times New Roman" panose="02020603050405020304" pitchFamily="18" charset="0"/>
-                <a:cs typeface="Times New Roman" panose="02020603050405020304" pitchFamily="18" charset="0"/>
-              </a:rPr>
-              <a:t> </a:t>
-            </a:r>
-            <a:r>
-              <a:rPr lang="en-US" sz="2400" dirty="0" err="1">
-                <a:latin typeface="Times New Roman" panose="02020603050405020304" pitchFamily="18" charset="0"/>
-                <a:cs typeface="Times New Roman" panose="02020603050405020304" pitchFamily="18" charset="0"/>
-              </a:rPr>
-              <a:t>pokazuje</a:t>
-            </a:r>
-            <a:r>
-              <a:rPr lang="en-US" sz="2400" dirty="0">
-                <a:latin typeface="Times New Roman" panose="02020603050405020304" pitchFamily="18" charset="0"/>
-                <a:cs typeface="Times New Roman" panose="02020603050405020304" pitchFamily="18" charset="0"/>
-              </a:rPr>
-              <a:t> </a:t>
-            </a:r>
-            <a:r>
-              <a:rPr lang="en-US" sz="2400" dirty="0" err="1">
-                <a:latin typeface="Times New Roman" panose="02020603050405020304" pitchFamily="18" charset="0"/>
-                <a:cs typeface="Times New Roman" panose="02020603050405020304" pitchFamily="18" charset="0"/>
-              </a:rPr>
-              <a:t>primenu</a:t>
-            </a:r>
-            <a:r>
-              <a:rPr lang="en-US" sz="2400" dirty="0">
-                <a:latin typeface="Times New Roman" panose="02020603050405020304" pitchFamily="18" charset="0"/>
-                <a:cs typeface="Times New Roman" panose="02020603050405020304" pitchFamily="18" charset="0"/>
-              </a:rPr>
-              <a:t> AI u </a:t>
-            </a:r>
-            <a:r>
-              <a:rPr lang="en-US" sz="2400" dirty="0" err="1">
-                <a:latin typeface="Times New Roman" panose="02020603050405020304" pitchFamily="18" charset="0"/>
-                <a:cs typeface="Times New Roman" panose="02020603050405020304" pitchFamily="18" charset="0"/>
-              </a:rPr>
-              <a:t>predikciji</a:t>
-            </a:r>
-            <a:r>
-              <a:rPr lang="en-US" sz="2400" dirty="0">
-                <a:latin typeface="Times New Roman" panose="02020603050405020304" pitchFamily="18" charset="0"/>
-                <a:cs typeface="Times New Roman" panose="02020603050405020304" pitchFamily="18" charset="0"/>
-              </a:rPr>
-              <a:t> </a:t>
-            </a:r>
-            <a:r>
-              <a:rPr lang="en-US" sz="2400" dirty="0" err="1">
-                <a:latin typeface="Times New Roman" panose="02020603050405020304" pitchFamily="18" charset="0"/>
-                <a:cs typeface="Times New Roman" panose="02020603050405020304" pitchFamily="18" charset="0"/>
-              </a:rPr>
-              <a:t>dnevnih</a:t>
-            </a:r>
-            <a:r>
-              <a:rPr lang="en-US" sz="2400" dirty="0">
-                <a:latin typeface="Times New Roman" panose="02020603050405020304" pitchFamily="18" charset="0"/>
-                <a:cs typeface="Times New Roman" panose="02020603050405020304" pitchFamily="18" charset="0"/>
-              </a:rPr>
-              <a:t> </a:t>
-            </a:r>
-            <a:r>
-              <a:rPr lang="en-US" sz="2400" dirty="0" err="1">
-                <a:latin typeface="Times New Roman" panose="02020603050405020304" pitchFamily="18" charset="0"/>
-                <a:cs typeface="Times New Roman" panose="02020603050405020304" pitchFamily="18" charset="0"/>
-              </a:rPr>
-              <a:t>troškova</a:t>
-            </a:r>
-            <a:endParaRPr lang="sr-Latn-RS" sz="2400" dirty="0">
+              <a:rPr lang="en-US" sz="2400">
+                <a:latin typeface="Times New Roman" panose="02020603050405020304" pitchFamily="18" charset="0"/>
+                <a:cs typeface="Times New Roman" panose="02020603050405020304" pitchFamily="18" charset="0"/>
+              </a:rPr>
+              <a:t>AccountantAI pokazuje primenu AI u predikciji dnevnih troškova</a:t>
+            </a:r>
+            <a:endParaRPr lang="sr-Latn-RS" sz="2400">
               <a:latin typeface="Times New Roman" panose="02020603050405020304" pitchFamily="18" charset="0"/>
               <a:cs typeface="Times New Roman" panose="02020603050405020304" pitchFamily="18" charset="0"/>
             </a:endParaRPr>
           </a:p>
           <a:p>
             <a:r>
-              <a:rPr lang="en-US" sz="2400" dirty="0" err="1">
-                <a:latin typeface="Times New Roman" panose="02020603050405020304" pitchFamily="18" charset="0"/>
-                <a:cs typeface="Times New Roman" panose="02020603050405020304" pitchFamily="18" charset="0"/>
-              </a:rPr>
-              <a:t>Rezultati</a:t>
-            </a:r>
-            <a:r>
-              <a:rPr lang="en-US" sz="2400" dirty="0">
-                <a:latin typeface="Times New Roman" panose="02020603050405020304" pitchFamily="18" charset="0"/>
-                <a:cs typeface="Times New Roman" panose="02020603050405020304" pitchFamily="18" charset="0"/>
-              </a:rPr>
-              <a:t> </a:t>
-            </a:r>
-            <a:r>
-              <a:rPr lang="en-US" sz="2400" dirty="0" err="1">
-                <a:latin typeface="Times New Roman" panose="02020603050405020304" pitchFamily="18" charset="0"/>
-                <a:cs typeface="Times New Roman" panose="02020603050405020304" pitchFamily="18" charset="0"/>
-              </a:rPr>
-              <a:t>ukazuju</a:t>
-            </a:r>
-            <a:r>
-              <a:rPr lang="en-US" sz="2400" dirty="0">
-                <a:latin typeface="Times New Roman" panose="02020603050405020304" pitchFamily="18" charset="0"/>
-                <a:cs typeface="Times New Roman" panose="02020603050405020304" pitchFamily="18" charset="0"/>
-              </a:rPr>
-              <a:t> </a:t>
-            </a:r>
-            <a:r>
-              <a:rPr lang="en-US" sz="2400" dirty="0" err="1">
-                <a:latin typeface="Times New Roman" panose="02020603050405020304" pitchFamily="18" charset="0"/>
-                <a:cs typeface="Times New Roman" panose="02020603050405020304" pitchFamily="18" charset="0"/>
-              </a:rPr>
-              <a:t>na</a:t>
-            </a:r>
-            <a:r>
-              <a:rPr lang="en-US" sz="2400" dirty="0">
-                <a:latin typeface="Times New Roman" panose="02020603050405020304" pitchFamily="18" charset="0"/>
-                <a:cs typeface="Times New Roman" panose="02020603050405020304" pitchFamily="18" charset="0"/>
-              </a:rPr>
-              <a:t> </a:t>
-            </a:r>
-            <a:r>
-              <a:rPr lang="en-US" sz="2400" dirty="0" err="1">
-                <a:latin typeface="Times New Roman" panose="02020603050405020304" pitchFamily="18" charset="0"/>
-                <a:cs typeface="Times New Roman" panose="02020603050405020304" pitchFamily="18" charset="0"/>
-              </a:rPr>
-              <a:t>razlike</a:t>
-            </a:r>
-            <a:r>
-              <a:rPr lang="en-US" sz="2400" dirty="0">
-                <a:latin typeface="Times New Roman" panose="02020603050405020304" pitchFamily="18" charset="0"/>
-                <a:cs typeface="Times New Roman" panose="02020603050405020304" pitchFamily="18" charset="0"/>
-              </a:rPr>
-              <a:t> </a:t>
-            </a:r>
-            <a:r>
-              <a:rPr lang="en-US" sz="2400" dirty="0" err="1">
-                <a:latin typeface="Times New Roman" panose="02020603050405020304" pitchFamily="18" charset="0"/>
-                <a:cs typeface="Times New Roman" panose="02020603050405020304" pitchFamily="18" charset="0"/>
-              </a:rPr>
-              <a:t>između</a:t>
-            </a:r>
-            <a:r>
-              <a:rPr lang="en-US" sz="2400" dirty="0">
-                <a:latin typeface="Times New Roman" panose="02020603050405020304" pitchFamily="18" charset="0"/>
-                <a:cs typeface="Times New Roman" panose="02020603050405020304" pitchFamily="18" charset="0"/>
-              </a:rPr>
-              <a:t> multi-model </a:t>
-            </a:r>
-            <a:r>
-              <a:rPr lang="en-US" sz="2400" dirty="0" err="1">
-                <a:latin typeface="Times New Roman" panose="02020603050405020304" pitchFamily="18" charset="0"/>
-                <a:cs typeface="Times New Roman" panose="02020603050405020304" pitchFamily="18" charset="0"/>
-              </a:rPr>
-              <a:t>i</a:t>
-            </a:r>
-            <a:r>
-              <a:rPr lang="en-US" sz="2400" dirty="0">
-                <a:latin typeface="Times New Roman" panose="02020603050405020304" pitchFamily="18" charset="0"/>
-                <a:cs typeface="Times New Roman" panose="02020603050405020304" pitchFamily="18" charset="0"/>
-              </a:rPr>
-              <a:t> single-model </a:t>
-            </a:r>
-            <a:r>
-              <a:rPr lang="en-US" sz="2400" dirty="0" err="1">
-                <a:latin typeface="Times New Roman" panose="02020603050405020304" pitchFamily="18" charset="0"/>
-                <a:cs typeface="Times New Roman" panose="02020603050405020304" pitchFamily="18" charset="0"/>
-              </a:rPr>
-              <a:t>pristupa</a:t>
-            </a:r>
-            <a:endParaRPr lang="sr-Latn-RS" sz="2400" dirty="0">
+              <a:rPr lang="en-US" sz="2400">
+                <a:latin typeface="Times New Roman" panose="02020603050405020304" pitchFamily="18" charset="0"/>
+                <a:cs typeface="Times New Roman" panose="02020603050405020304" pitchFamily="18" charset="0"/>
+              </a:rPr>
+              <a:t>Rezultati ukazuju na razlike između multi-model i single-model pristupa</a:t>
+            </a:r>
+            <a:endParaRPr lang="sr-Latn-RS" sz="2400">
               <a:latin typeface="Times New Roman" panose="02020603050405020304" pitchFamily="18" charset="0"/>
               <a:cs typeface="Times New Roman" panose="02020603050405020304" pitchFamily="18" charset="0"/>
             </a:endParaRPr>
           </a:p>
           <a:p>
             <a:r>
-              <a:rPr lang="en-US" sz="2400" dirty="0" err="1">
-                <a:latin typeface="Times New Roman" panose="02020603050405020304" pitchFamily="18" charset="0"/>
-                <a:cs typeface="Times New Roman" panose="02020603050405020304" pitchFamily="18" charset="0"/>
-              </a:rPr>
-              <a:t>Projekat</a:t>
-            </a:r>
-            <a:r>
-              <a:rPr lang="en-US" sz="2400" dirty="0">
-                <a:latin typeface="Times New Roman" panose="02020603050405020304" pitchFamily="18" charset="0"/>
-                <a:cs typeface="Times New Roman" panose="02020603050405020304" pitchFamily="18" charset="0"/>
-              </a:rPr>
-              <a:t> </a:t>
-            </a:r>
-            <a:r>
-              <a:rPr lang="en-US" sz="2400" dirty="0" err="1">
-                <a:latin typeface="Times New Roman" panose="02020603050405020304" pitchFamily="18" charset="0"/>
-                <a:cs typeface="Times New Roman" panose="02020603050405020304" pitchFamily="18" charset="0"/>
-              </a:rPr>
-              <a:t>daje</a:t>
-            </a:r>
-            <a:r>
-              <a:rPr lang="en-US" sz="2400" dirty="0">
-                <a:latin typeface="Times New Roman" panose="02020603050405020304" pitchFamily="18" charset="0"/>
-                <a:cs typeface="Times New Roman" panose="02020603050405020304" pitchFamily="18" charset="0"/>
-              </a:rPr>
-              <a:t> </a:t>
-            </a:r>
-            <a:r>
-              <a:rPr lang="en-US" sz="2400" dirty="0" err="1">
-                <a:latin typeface="Times New Roman" panose="02020603050405020304" pitchFamily="18" charset="0"/>
-                <a:cs typeface="Times New Roman" panose="02020603050405020304" pitchFamily="18" charset="0"/>
-              </a:rPr>
-              <a:t>osnovu</a:t>
-            </a:r>
-            <a:r>
-              <a:rPr lang="en-US" sz="2400" dirty="0">
-                <a:latin typeface="Times New Roman" panose="02020603050405020304" pitchFamily="18" charset="0"/>
-                <a:cs typeface="Times New Roman" panose="02020603050405020304" pitchFamily="18" charset="0"/>
-              </a:rPr>
-              <a:t> za </a:t>
-            </a:r>
-            <a:r>
-              <a:rPr lang="en-US" sz="2400" dirty="0" err="1">
-                <a:latin typeface="Times New Roman" panose="02020603050405020304" pitchFamily="18" charset="0"/>
-                <a:cs typeface="Times New Roman" panose="02020603050405020304" pitchFamily="18" charset="0"/>
-              </a:rPr>
-              <a:t>dalja</a:t>
-            </a:r>
-            <a:r>
-              <a:rPr lang="en-US" sz="2400" dirty="0">
-                <a:latin typeface="Times New Roman" panose="02020603050405020304" pitchFamily="18" charset="0"/>
-                <a:cs typeface="Times New Roman" panose="02020603050405020304" pitchFamily="18" charset="0"/>
-              </a:rPr>
-              <a:t> </a:t>
-            </a:r>
-            <a:r>
-              <a:rPr lang="en-US" sz="2400" dirty="0" err="1">
-                <a:latin typeface="Times New Roman" panose="02020603050405020304" pitchFamily="18" charset="0"/>
-                <a:cs typeface="Times New Roman" panose="02020603050405020304" pitchFamily="18" charset="0"/>
-              </a:rPr>
-              <a:t>istraživanja</a:t>
-            </a:r>
-            <a:r>
-              <a:rPr lang="en-US" sz="2400" dirty="0">
-                <a:latin typeface="Times New Roman" panose="02020603050405020304" pitchFamily="18" charset="0"/>
-                <a:cs typeface="Times New Roman" panose="02020603050405020304" pitchFamily="18" charset="0"/>
-              </a:rPr>
-              <a:t> </a:t>
-            </a:r>
-            <a:r>
-              <a:rPr lang="en-US" sz="2400" dirty="0" err="1">
-                <a:latin typeface="Times New Roman" panose="02020603050405020304" pitchFamily="18" charset="0"/>
-                <a:cs typeface="Times New Roman" panose="02020603050405020304" pitchFamily="18" charset="0"/>
-              </a:rPr>
-              <a:t>i</a:t>
-            </a:r>
-            <a:r>
-              <a:rPr lang="en-US" sz="2400" dirty="0">
-                <a:latin typeface="Times New Roman" panose="02020603050405020304" pitchFamily="18" charset="0"/>
-                <a:cs typeface="Times New Roman" panose="02020603050405020304" pitchFamily="18" charset="0"/>
-              </a:rPr>
-              <a:t> </a:t>
-            </a:r>
-            <a:r>
-              <a:rPr lang="en-US" sz="2400" dirty="0" err="1">
-                <a:latin typeface="Times New Roman" panose="02020603050405020304" pitchFamily="18" charset="0"/>
-                <a:cs typeface="Times New Roman" panose="02020603050405020304" pitchFamily="18" charset="0"/>
-              </a:rPr>
-              <a:t>unapređenja</a:t>
-            </a:r>
-            <a:r>
-              <a:rPr lang="en-US" sz="2400" dirty="0">
-                <a:latin typeface="Times New Roman" panose="02020603050405020304" pitchFamily="18" charset="0"/>
-                <a:cs typeface="Times New Roman" panose="02020603050405020304" pitchFamily="18" charset="0"/>
-              </a:rPr>
-              <a:t> </a:t>
-            </a:r>
-            <a:r>
-              <a:rPr lang="en-US" sz="2400" dirty="0" err="1">
-                <a:latin typeface="Times New Roman" panose="02020603050405020304" pitchFamily="18" charset="0"/>
-                <a:cs typeface="Times New Roman" panose="02020603050405020304" pitchFamily="18" charset="0"/>
-              </a:rPr>
-              <a:t>modela</a:t>
+              <a:rPr lang="en-US" sz="2400">
+                <a:latin typeface="Times New Roman" panose="02020603050405020304" pitchFamily="18" charset="0"/>
+                <a:cs typeface="Times New Roman" panose="02020603050405020304" pitchFamily="18" charset="0"/>
+              </a:rPr>
+              <a:t>Projekat daje osnovu za dalja istraživanja i unapređenja modela</a:t>
             </a:r>
             <a:endParaRPr lang="en-US" sz="2400" dirty="0">
               <a:latin typeface="Times New Roman" panose="02020603050405020304" pitchFamily="18" charset="0"/>
@@ -7508,7 +7335,7 @@
         </p:blipFill>
         <p:spPr>
           <a:xfrm>
-            <a:off x="9419771" y="4376195"/>
+            <a:off x="8861987" y="3955280"/>
             <a:ext cx="2772229" cy="2481805"/>
           </a:xfrm>
           <a:prstGeom prst="rect">
@@ -7529,7 +7356,7 @@
 </p:sld>
 </file>
 
-<file path=ppt/slides/slide14.xml><?xml version="1.0" encoding="utf-8"?>
+<file path=ppt/slides/slide13.xml><?xml version="1.0" encoding="utf-8"?>
 <p:sld xmlns:a="http://schemas.openxmlformats.org/drawingml/2006/main" xmlns:r="http://schemas.openxmlformats.org/officeDocument/2006/relationships" xmlns:p="http://schemas.openxmlformats.org/presentationml/2006/main">
   <p:cSld>
     <p:spTree>
@@ -7778,7 +7605,7 @@
 </p:sld>
 </file>
 
-<file path=ppt/slides/slide15.xml><?xml version="1.0" encoding="utf-8"?>
+<file path=ppt/slides/slide14.xml><?xml version="1.0" encoding="utf-8"?>
 <p:sld xmlns:a="http://schemas.openxmlformats.org/drawingml/2006/main" xmlns:r="http://schemas.openxmlformats.org/officeDocument/2006/relationships" xmlns:p="http://schemas.openxmlformats.org/presentationml/2006/main">
   <p:cSld>
     <p:spTree>
@@ -7872,488 +7699,6 @@
           <p:cNvPr id="2" name="Title 1">
             <a:extLst>
               <a:ext uri="{FF2B5EF4-FFF2-40B4-BE49-F238E27FC236}">
-                <a16:creationId xmlns:a16="http://schemas.microsoft.com/office/drawing/2014/main" id="{EE958CCB-CAEC-803D-DD7B-412405A31531}"/>
-              </a:ext>
-            </a:extLst>
-          </p:cNvPr>
-          <p:cNvSpPr>
-            <a:spLocks noGrp="1"/>
-          </p:cNvSpPr>
-          <p:nvPr>
-            <p:ph type="title"/>
-          </p:nvPr>
-        </p:nvSpPr>
-        <p:spPr>
-          <a:xfrm>
-            <a:off x="913795" y="-105624"/>
-            <a:ext cx="10353762" cy="970450"/>
-          </a:xfrm>
-        </p:spPr>
-        <p:txBody>
-          <a:bodyPr>
-            <a:normAutofit/>
-          </a:bodyPr>
-          <a:lstStyle/>
-          <a:p>
-            <a:r>
-              <a:rPr lang="sr-Latn-RS" sz="4400" b="1" dirty="0">
-                <a:latin typeface="Times New Roman" panose="02020603050405020304" pitchFamily="18" charset="0"/>
-                <a:cs typeface="Times New Roman" panose="02020603050405020304" pitchFamily="18" charset="0"/>
-              </a:rPr>
-              <a:t>SADRŽAJ</a:t>
-            </a:r>
-            <a:endParaRPr lang="en-US" sz="4400" b="1" dirty="0">
-              <a:latin typeface="Times New Roman" panose="02020603050405020304" pitchFamily="18" charset="0"/>
-              <a:cs typeface="Times New Roman" panose="02020603050405020304" pitchFamily="18" charset="0"/>
-            </a:endParaRPr>
-          </a:p>
-        </p:txBody>
-      </p:sp>
-      <p:sp>
-        <p:nvSpPr>
-          <p:cNvPr id="3" name="Content Placeholder 2">
-            <a:extLst>
-              <a:ext uri="{FF2B5EF4-FFF2-40B4-BE49-F238E27FC236}">
-                <a16:creationId xmlns:a16="http://schemas.microsoft.com/office/drawing/2014/main" id="{418FB8A4-89E6-18C5-5401-3EEAD95A2D1A}"/>
-              </a:ext>
-            </a:extLst>
-          </p:cNvPr>
-          <p:cNvSpPr>
-            <a:spLocks noGrp="1"/>
-          </p:cNvSpPr>
-          <p:nvPr>
-            <p:ph idx="1"/>
-          </p:nvPr>
-        </p:nvSpPr>
-        <p:spPr>
-          <a:xfrm>
-            <a:off x="777993" y="701864"/>
-            <a:ext cx="10353762" cy="6065601"/>
-          </a:xfrm>
-        </p:spPr>
-        <p:txBody>
-          <a:bodyPr>
-            <a:noAutofit/>
-          </a:bodyPr>
-          <a:lstStyle/>
-          <a:p>
-            <a:pPr marL="494100" indent="-457200">
-              <a:buFont typeface="+mj-lt"/>
-              <a:buAutoNum type="arabicPeriod"/>
-            </a:pPr>
-            <a:r>
-              <a:rPr lang="en-US" sz="2200" dirty="0" err="1">
-                <a:latin typeface="Times New Roman" panose="02020603050405020304" pitchFamily="18" charset="0"/>
-                <a:cs typeface="Times New Roman" panose="02020603050405020304" pitchFamily="18" charset="0"/>
-              </a:rPr>
-              <a:t>Naslovni</a:t>
-            </a:r>
-            <a:r>
-              <a:rPr lang="en-US" sz="2200" dirty="0">
-                <a:latin typeface="Times New Roman" panose="02020603050405020304" pitchFamily="18" charset="0"/>
-                <a:cs typeface="Times New Roman" panose="02020603050405020304" pitchFamily="18" charset="0"/>
-              </a:rPr>
-              <a:t> </a:t>
-            </a:r>
-            <a:r>
-              <a:rPr lang="en-US" sz="2200" dirty="0" err="1">
-                <a:latin typeface="Times New Roman" panose="02020603050405020304" pitchFamily="18" charset="0"/>
-                <a:cs typeface="Times New Roman" panose="02020603050405020304" pitchFamily="18" charset="0"/>
-              </a:rPr>
-              <a:t>slajd</a:t>
-            </a:r>
-            <a:endParaRPr lang="sr-Latn-RS" sz="2200" dirty="0">
-              <a:latin typeface="Times New Roman" panose="02020603050405020304" pitchFamily="18" charset="0"/>
-              <a:cs typeface="Times New Roman" panose="02020603050405020304" pitchFamily="18" charset="0"/>
-            </a:endParaRPr>
-          </a:p>
-          <a:p>
-            <a:pPr marL="494100" indent="-457200">
-              <a:buFont typeface="+mj-lt"/>
-              <a:buAutoNum type="arabicPeriod"/>
-            </a:pPr>
-            <a:r>
-              <a:rPr lang="sr-Latn-RS" sz="2200" dirty="0">
-                <a:latin typeface="Times New Roman" panose="02020603050405020304" pitchFamily="18" charset="0"/>
-                <a:cs typeface="Times New Roman" panose="02020603050405020304" pitchFamily="18" charset="0"/>
-              </a:rPr>
-              <a:t>Sadržaj</a:t>
-            </a:r>
-          </a:p>
-          <a:p>
-            <a:pPr marL="494100" indent="-457200">
-              <a:buFont typeface="+mj-lt"/>
-              <a:buAutoNum type="arabicPeriod"/>
-            </a:pPr>
-            <a:r>
-              <a:rPr lang="en-US" sz="2200" dirty="0" err="1">
-                <a:latin typeface="Times New Roman" panose="02020603050405020304" pitchFamily="18" charset="0"/>
-                <a:cs typeface="Times New Roman" panose="02020603050405020304" pitchFamily="18" charset="0"/>
-              </a:rPr>
-              <a:t>Motivacija</a:t>
-            </a:r>
-            <a:r>
-              <a:rPr lang="en-US" sz="2200" dirty="0">
-                <a:latin typeface="Times New Roman" panose="02020603050405020304" pitchFamily="18" charset="0"/>
-                <a:cs typeface="Times New Roman" panose="02020603050405020304" pitchFamily="18" charset="0"/>
-              </a:rPr>
-              <a:t> </a:t>
-            </a:r>
-            <a:r>
-              <a:rPr lang="en-US" sz="2200" dirty="0" err="1">
-                <a:latin typeface="Times New Roman" panose="02020603050405020304" pitchFamily="18" charset="0"/>
-                <a:cs typeface="Times New Roman" panose="02020603050405020304" pitchFamily="18" charset="0"/>
-              </a:rPr>
-              <a:t>i</a:t>
-            </a:r>
-            <a:r>
-              <a:rPr lang="en-US" sz="2200" dirty="0">
-                <a:latin typeface="Times New Roman" panose="02020603050405020304" pitchFamily="18" charset="0"/>
-                <a:cs typeface="Times New Roman" panose="02020603050405020304" pitchFamily="18" charset="0"/>
-              </a:rPr>
-              <a:t> problem</a:t>
-            </a:r>
-            <a:endParaRPr lang="sr-Latn-RS" sz="2200" dirty="0">
-              <a:latin typeface="Times New Roman" panose="02020603050405020304" pitchFamily="18" charset="0"/>
-              <a:cs typeface="Times New Roman" panose="02020603050405020304" pitchFamily="18" charset="0"/>
-            </a:endParaRPr>
-          </a:p>
-          <a:p>
-            <a:pPr marL="494100" indent="-457200">
-              <a:buFont typeface="+mj-lt"/>
-              <a:buAutoNum type="arabicPeriod"/>
-            </a:pPr>
-            <a:r>
-              <a:rPr lang="en-US" sz="2200" dirty="0" err="1">
-                <a:latin typeface="Times New Roman" panose="02020603050405020304" pitchFamily="18" charset="0"/>
-                <a:cs typeface="Times New Roman" panose="02020603050405020304" pitchFamily="18" charset="0"/>
-              </a:rPr>
-              <a:t>Opis</a:t>
-            </a:r>
-            <a:r>
-              <a:rPr lang="en-US" sz="2200" dirty="0">
-                <a:latin typeface="Times New Roman" panose="02020603050405020304" pitchFamily="18" charset="0"/>
-                <a:cs typeface="Times New Roman" panose="02020603050405020304" pitchFamily="18" charset="0"/>
-              </a:rPr>
-              <a:t> </a:t>
-            </a:r>
-            <a:r>
-              <a:rPr lang="en-US" sz="2200" dirty="0" err="1">
-                <a:latin typeface="Times New Roman" panose="02020603050405020304" pitchFamily="18" charset="0"/>
-                <a:cs typeface="Times New Roman" panose="02020603050405020304" pitchFamily="18" charset="0"/>
-              </a:rPr>
-              <a:t>rešenja</a:t>
-            </a:r>
-            <a:endParaRPr lang="sr-Latn-RS" sz="2200" dirty="0">
-              <a:latin typeface="Times New Roman" panose="02020603050405020304" pitchFamily="18" charset="0"/>
-              <a:cs typeface="Times New Roman" panose="02020603050405020304" pitchFamily="18" charset="0"/>
-            </a:endParaRPr>
-          </a:p>
-          <a:p>
-            <a:pPr marL="494100" indent="-457200">
-              <a:buFont typeface="+mj-lt"/>
-              <a:buAutoNum type="arabicPeriod"/>
-            </a:pPr>
-            <a:r>
-              <a:rPr lang="en-US" sz="2200" dirty="0" err="1">
-                <a:latin typeface="Times New Roman" panose="02020603050405020304" pitchFamily="18" charset="0"/>
-                <a:cs typeface="Times New Roman" panose="02020603050405020304" pitchFamily="18" charset="0"/>
-              </a:rPr>
-              <a:t>Tehnologije</a:t>
-            </a:r>
-            <a:r>
-              <a:rPr lang="en-US" sz="2200" dirty="0">
-                <a:latin typeface="Times New Roman" panose="02020603050405020304" pitchFamily="18" charset="0"/>
-                <a:cs typeface="Times New Roman" panose="02020603050405020304" pitchFamily="18" charset="0"/>
-              </a:rPr>
-              <a:t> </a:t>
-            </a:r>
-            <a:r>
-              <a:rPr lang="en-US" sz="2200" dirty="0" err="1">
-                <a:latin typeface="Times New Roman" panose="02020603050405020304" pitchFamily="18" charset="0"/>
-                <a:cs typeface="Times New Roman" panose="02020603050405020304" pitchFamily="18" charset="0"/>
-              </a:rPr>
-              <a:t>i</a:t>
-            </a:r>
-            <a:r>
-              <a:rPr lang="en-US" sz="2200" dirty="0">
-                <a:latin typeface="Times New Roman" panose="02020603050405020304" pitchFamily="18" charset="0"/>
-                <a:cs typeface="Times New Roman" panose="02020603050405020304" pitchFamily="18" charset="0"/>
-              </a:rPr>
-              <a:t> </a:t>
-            </a:r>
-            <a:r>
-              <a:rPr lang="en-US" sz="2200" dirty="0" err="1">
-                <a:latin typeface="Times New Roman" panose="02020603050405020304" pitchFamily="18" charset="0"/>
-                <a:cs typeface="Times New Roman" panose="02020603050405020304" pitchFamily="18" charset="0"/>
-              </a:rPr>
-              <a:t>arhitektura</a:t>
-            </a:r>
-            <a:endParaRPr lang="sr-Latn-RS" sz="2200" dirty="0">
-              <a:latin typeface="Times New Roman" panose="02020603050405020304" pitchFamily="18" charset="0"/>
-              <a:cs typeface="Times New Roman" panose="02020603050405020304" pitchFamily="18" charset="0"/>
-            </a:endParaRPr>
-          </a:p>
-          <a:p>
-            <a:pPr marL="494100" indent="-457200">
-              <a:buFont typeface="+mj-lt"/>
-              <a:buAutoNum type="arabicPeriod"/>
-            </a:pPr>
-            <a:r>
-              <a:rPr lang="en-US" sz="2200" dirty="0" err="1">
-                <a:latin typeface="Times New Roman" panose="02020603050405020304" pitchFamily="18" charset="0"/>
-                <a:cs typeface="Times New Roman" panose="02020603050405020304" pitchFamily="18" charset="0"/>
-              </a:rPr>
-              <a:t>Korisnički</a:t>
-            </a:r>
-            <a:r>
-              <a:rPr lang="en-US" sz="2200" dirty="0">
-                <a:latin typeface="Times New Roman" panose="02020603050405020304" pitchFamily="18" charset="0"/>
-                <a:cs typeface="Times New Roman" panose="02020603050405020304" pitchFamily="18" charset="0"/>
-              </a:rPr>
-              <a:t> </a:t>
-            </a:r>
-            <a:r>
-              <a:rPr lang="en-US" sz="2200" dirty="0" err="1">
-                <a:latin typeface="Times New Roman" panose="02020603050405020304" pitchFamily="18" charset="0"/>
-                <a:cs typeface="Times New Roman" panose="02020603050405020304" pitchFamily="18" charset="0"/>
-              </a:rPr>
-              <a:t>interfejs</a:t>
-            </a:r>
-            <a:r>
-              <a:rPr lang="en-US" sz="2200" dirty="0">
-                <a:latin typeface="Times New Roman" panose="02020603050405020304" pitchFamily="18" charset="0"/>
-                <a:cs typeface="Times New Roman" panose="02020603050405020304" pitchFamily="18" charset="0"/>
-              </a:rPr>
-              <a:t> (UI)</a:t>
-            </a:r>
-            <a:endParaRPr lang="sr-Latn-RS" sz="2200" dirty="0">
-              <a:latin typeface="Times New Roman" panose="02020603050405020304" pitchFamily="18" charset="0"/>
-              <a:cs typeface="Times New Roman" panose="02020603050405020304" pitchFamily="18" charset="0"/>
-            </a:endParaRPr>
-          </a:p>
-          <a:p>
-            <a:pPr marL="494100" indent="-457200">
-              <a:buFont typeface="+mj-lt"/>
-              <a:buAutoNum type="arabicPeriod"/>
-            </a:pPr>
-            <a:r>
-              <a:rPr lang="en-US" sz="2200" dirty="0" err="1">
-                <a:latin typeface="Times New Roman" panose="02020603050405020304" pitchFamily="18" charset="0"/>
-                <a:cs typeface="Times New Roman" panose="02020603050405020304" pitchFamily="18" charset="0"/>
-              </a:rPr>
-              <a:t>Simulacija</a:t>
-            </a:r>
-            <a:r>
-              <a:rPr lang="en-US" sz="2200" dirty="0">
-                <a:latin typeface="Times New Roman" panose="02020603050405020304" pitchFamily="18" charset="0"/>
-                <a:cs typeface="Times New Roman" panose="02020603050405020304" pitchFamily="18" charset="0"/>
-              </a:rPr>
-              <a:t>: Multi-model</a:t>
-            </a:r>
-            <a:endParaRPr lang="sr-Latn-RS" sz="2200" dirty="0">
-              <a:latin typeface="Times New Roman" panose="02020603050405020304" pitchFamily="18" charset="0"/>
-              <a:cs typeface="Times New Roman" panose="02020603050405020304" pitchFamily="18" charset="0"/>
-            </a:endParaRPr>
-          </a:p>
-          <a:p>
-            <a:pPr marL="494100" indent="-457200">
-              <a:buFont typeface="+mj-lt"/>
-              <a:buAutoNum type="arabicPeriod"/>
-            </a:pPr>
-            <a:r>
-              <a:rPr lang="en-US" sz="2200" dirty="0" err="1">
-                <a:latin typeface="Times New Roman" panose="02020603050405020304" pitchFamily="18" charset="0"/>
-                <a:cs typeface="Times New Roman" panose="02020603050405020304" pitchFamily="18" charset="0"/>
-              </a:rPr>
-              <a:t>Simulacija</a:t>
-            </a:r>
-            <a:r>
-              <a:rPr lang="en-US" sz="2200" dirty="0">
-                <a:latin typeface="Times New Roman" panose="02020603050405020304" pitchFamily="18" charset="0"/>
-                <a:cs typeface="Times New Roman" panose="02020603050405020304" pitchFamily="18" charset="0"/>
-              </a:rPr>
-              <a:t>: Single-model</a:t>
-            </a:r>
-            <a:endParaRPr lang="sr-Latn-RS" sz="2200" dirty="0">
-              <a:latin typeface="Times New Roman" panose="02020603050405020304" pitchFamily="18" charset="0"/>
-              <a:cs typeface="Times New Roman" panose="02020603050405020304" pitchFamily="18" charset="0"/>
-            </a:endParaRPr>
-          </a:p>
-          <a:p>
-            <a:pPr marL="494100" indent="-457200">
-              <a:buFont typeface="+mj-lt"/>
-              <a:buAutoNum type="arabicPeriod"/>
-            </a:pPr>
-            <a:r>
-              <a:rPr lang="en-US" sz="2200" dirty="0">
-                <a:latin typeface="Times New Roman" panose="02020603050405020304" pitchFamily="18" charset="0"/>
-                <a:cs typeface="Times New Roman" panose="02020603050405020304" pitchFamily="18" charset="0"/>
-              </a:rPr>
-              <a:t>Rolling </a:t>
-            </a:r>
-            <a:r>
-              <a:rPr lang="en-US" sz="2200" dirty="0" err="1">
-                <a:latin typeface="Times New Roman" panose="02020603050405020304" pitchFamily="18" charset="0"/>
-                <a:cs typeface="Times New Roman" panose="02020603050405020304" pitchFamily="18" charset="0"/>
-              </a:rPr>
-              <a:t>predikcije</a:t>
-            </a:r>
-            <a:endParaRPr lang="sr-Latn-RS" sz="2200" dirty="0">
-              <a:latin typeface="Times New Roman" panose="02020603050405020304" pitchFamily="18" charset="0"/>
-              <a:cs typeface="Times New Roman" panose="02020603050405020304" pitchFamily="18" charset="0"/>
-            </a:endParaRPr>
-          </a:p>
-          <a:p>
-            <a:pPr marL="494100" indent="-457200">
-              <a:buFont typeface="+mj-lt"/>
-              <a:buAutoNum type="arabicPeriod"/>
-            </a:pPr>
-            <a:r>
-              <a:rPr lang="en-US" sz="2200" dirty="0" err="1">
-                <a:latin typeface="Times New Roman" panose="02020603050405020304" pitchFamily="18" charset="0"/>
-                <a:cs typeface="Times New Roman" panose="02020603050405020304" pitchFamily="18" charset="0"/>
-              </a:rPr>
-              <a:t>Statistička</a:t>
-            </a:r>
-            <a:r>
-              <a:rPr lang="en-US" sz="2200" dirty="0">
-                <a:latin typeface="Times New Roman" panose="02020603050405020304" pitchFamily="18" charset="0"/>
-                <a:cs typeface="Times New Roman" panose="02020603050405020304" pitchFamily="18" charset="0"/>
-              </a:rPr>
-              <a:t> </a:t>
-            </a:r>
-            <a:r>
-              <a:rPr lang="en-US" sz="2200" dirty="0" err="1">
-                <a:latin typeface="Times New Roman" panose="02020603050405020304" pitchFamily="18" charset="0"/>
-                <a:cs typeface="Times New Roman" panose="02020603050405020304" pitchFamily="18" charset="0"/>
-              </a:rPr>
-              <a:t>evaluacija</a:t>
-            </a:r>
-            <a:endParaRPr lang="sr-Latn-RS" sz="2200" dirty="0">
-              <a:latin typeface="Times New Roman" panose="02020603050405020304" pitchFamily="18" charset="0"/>
-              <a:cs typeface="Times New Roman" panose="02020603050405020304" pitchFamily="18" charset="0"/>
-            </a:endParaRPr>
-          </a:p>
-          <a:p>
-            <a:pPr marL="494100" indent="-457200">
-              <a:buFont typeface="+mj-lt"/>
-              <a:buAutoNum type="arabicPeriod"/>
-            </a:pPr>
-            <a:r>
-              <a:rPr lang="en-US" sz="2200" dirty="0" err="1">
-                <a:latin typeface="Times New Roman" panose="02020603050405020304" pitchFamily="18" charset="0"/>
-                <a:cs typeface="Times New Roman" panose="02020603050405020304" pitchFamily="18" charset="0"/>
-              </a:rPr>
-              <a:t>Ograničenja</a:t>
-            </a:r>
-            <a:r>
-              <a:rPr lang="en-US" sz="2200" dirty="0">
-                <a:latin typeface="Times New Roman" panose="02020603050405020304" pitchFamily="18" charset="0"/>
-                <a:cs typeface="Times New Roman" panose="02020603050405020304" pitchFamily="18" charset="0"/>
-              </a:rPr>
-              <a:t> </a:t>
-            </a:r>
-            <a:r>
-              <a:rPr lang="en-US" sz="2200" dirty="0" err="1">
-                <a:latin typeface="Times New Roman" panose="02020603050405020304" pitchFamily="18" charset="0"/>
-                <a:cs typeface="Times New Roman" panose="02020603050405020304" pitchFamily="18" charset="0"/>
-              </a:rPr>
-              <a:t>i</a:t>
-            </a:r>
-            <a:r>
-              <a:rPr lang="en-US" sz="2200" dirty="0">
-                <a:latin typeface="Times New Roman" panose="02020603050405020304" pitchFamily="18" charset="0"/>
-                <a:cs typeface="Times New Roman" panose="02020603050405020304" pitchFamily="18" charset="0"/>
-              </a:rPr>
-              <a:t> </a:t>
-            </a:r>
-            <a:r>
-              <a:rPr lang="en-US" sz="2200" dirty="0" err="1">
-                <a:latin typeface="Times New Roman" panose="02020603050405020304" pitchFamily="18" charset="0"/>
-                <a:cs typeface="Times New Roman" panose="02020603050405020304" pitchFamily="18" charset="0"/>
-              </a:rPr>
-              <a:t>budući</a:t>
-            </a:r>
-            <a:r>
-              <a:rPr lang="en-US" sz="2200" dirty="0">
-                <a:latin typeface="Times New Roman" panose="02020603050405020304" pitchFamily="18" charset="0"/>
-                <a:cs typeface="Times New Roman" panose="02020603050405020304" pitchFamily="18" charset="0"/>
-              </a:rPr>
-              <a:t> rad</a:t>
-            </a:r>
-            <a:endParaRPr lang="sr-Latn-RS" sz="2200" dirty="0">
-              <a:latin typeface="Times New Roman" panose="02020603050405020304" pitchFamily="18" charset="0"/>
-              <a:cs typeface="Times New Roman" panose="02020603050405020304" pitchFamily="18" charset="0"/>
-            </a:endParaRPr>
-          </a:p>
-          <a:p>
-            <a:pPr marL="494100" indent="-457200">
-              <a:buFont typeface="+mj-lt"/>
-              <a:buAutoNum type="arabicPeriod"/>
-            </a:pPr>
-            <a:r>
-              <a:rPr lang="sr-Latn-RS" sz="2200" dirty="0">
-                <a:latin typeface="Times New Roman" panose="02020603050405020304" pitchFamily="18" charset="0"/>
-                <a:cs typeface="Times New Roman" panose="02020603050405020304" pitchFamily="18" charset="0"/>
-              </a:rPr>
-              <a:t>Zaključak</a:t>
-            </a:r>
-          </a:p>
-          <a:p>
-            <a:pPr marL="494100" indent="-457200">
-              <a:buFont typeface="+mj-lt"/>
-              <a:buAutoNum type="arabicPeriod"/>
-            </a:pPr>
-            <a:r>
-              <a:rPr lang="sr-Latn-RS" sz="2200" dirty="0">
-                <a:latin typeface="Times New Roman" panose="02020603050405020304" pitchFamily="18" charset="0"/>
-                <a:cs typeface="Times New Roman" panose="02020603050405020304" pitchFamily="18" charset="0"/>
-              </a:rPr>
-              <a:t>Literatura i izvori</a:t>
-            </a:r>
-            <a:endParaRPr lang="en-US" sz="2200" dirty="0">
-              <a:latin typeface="Times New Roman" panose="02020603050405020304" pitchFamily="18" charset="0"/>
-              <a:cs typeface="Times New Roman" panose="02020603050405020304" pitchFamily="18" charset="0"/>
-            </a:endParaRPr>
-          </a:p>
-        </p:txBody>
-      </p:sp>
-    </p:spTree>
-    <p:extLst>
-      <p:ext uri="{BB962C8B-B14F-4D97-AF65-F5344CB8AC3E}">
-        <p14:creationId xmlns:p14="http://schemas.microsoft.com/office/powerpoint/2010/main" val="1024917866"/>
-      </p:ext>
-    </p:extLst>
-  </p:cSld>
-  <p:clrMapOvr>
-    <a:masterClrMapping/>
-  </p:clrMapOvr>
-</p:sld>
-</file>
-
-<file path=ppt/slides/slide3.xml><?xml version="1.0" encoding="utf-8"?>
-<p:sld xmlns:a="http://schemas.openxmlformats.org/drawingml/2006/main" xmlns:r="http://schemas.openxmlformats.org/officeDocument/2006/relationships" xmlns:p="http://schemas.openxmlformats.org/presentationml/2006/main">
-  <p:cSld>
-    <p:spTree>
-      <p:nvGrpSpPr>
-        <p:cNvPr id="1" name=""/>
-        <p:cNvGrpSpPr/>
-        <p:nvPr/>
-      </p:nvGrpSpPr>
-      <p:grpSpPr>
-        <a:xfrm>
-          <a:off x="0" y="0"/>
-          <a:ext cx="0" cy="0"/>
-          <a:chOff x="0" y="0"/>
-          <a:chExt cx="0" cy="0"/>
-        </a:xfrm>
-      </p:grpSpPr>
-      <p:sp>
-        <p:nvSpPr>
-          <p:cNvPr id="2" name="Title 1">
-            <a:extLst>
-              <a:ext uri="{FF2B5EF4-FFF2-40B4-BE49-F238E27FC236}">
                 <a16:creationId xmlns:a16="http://schemas.microsoft.com/office/drawing/2014/main" id="{660C4F0A-F475-E9F8-8BB6-176E5E74536A}"/>
               </a:ext>
             </a:extLst>
@@ -8427,214 +7772,62 @@
           <a:lstStyle/>
           <a:p>
             <a:r>
-              <a:rPr lang="en-US" sz="2400" dirty="0" err="1">
-                <a:latin typeface="Times New Roman" panose="02020603050405020304" pitchFamily="18" charset="0"/>
-                <a:cs typeface="Times New Roman" panose="02020603050405020304" pitchFamily="18" charset="0"/>
-              </a:rPr>
-              <a:t>Zašto</a:t>
-            </a:r>
-            <a:r>
-              <a:rPr lang="en-US" sz="2400" dirty="0">
-                <a:latin typeface="Times New Roman" panose="02020603050405020304" pitchFamily="18" charset="0"/>
-                <a:cs typeface="Times New Roman" panose="02020603050405020304" pitchFamily="18" charset="0"/>
-              </a:rPr>
-              <a:t> je </a:t>
-            </a:r>
-            <a:r>
-              <a:rPr lang="en-US" sz="2400" dirty="0" err="1">
-                <a:latin typeface="Times New Roman" panose="02020603050405020304" pitchFamily="18" charset="0"/>
-                <a:cs typeface="Times New Roman" panose="02020603050405020304" pitchFamily="18" charset="0"/>
-              </a:rPr>
-              <a:t>teško</a:t>
-            </a:r>
-            <a:r>
-              <a:rPr lang="en-US" sz="2400" dirty="0">
-                <a:latin typeface="Times New Roman" panose="02020603050405020304" pitchFamily="18" charset="0"/>
-                <a:cs typeface="Times New Roman" panose="02020603050405020304" pitchFamily="18" charset="0"/>
-              </a:rPr>
-              <a:t> </a:t>
-            </a:r>
-            <a:r>
-              <a:rPr lang="en-US" sz="2400" dirty="0" err="1">
-                <a:latin typeface="Times New Roman" panose="02020603050405020304" pitchFamily="18" charset="0"/>
-                <a:cs typeface="Times New Roman" panose="02020603050405020304" pitchFamily="18" charset="0"/>
-              </a:rPr>
-              <a:t>planirati</a:t>
-            </a:r>
-            <a:r>
-              <a:rPr lang="en-US" sz="2400" dirty="0">
-                <a:latin typeface="Times New Roman" panose="02020603050405020304" pitchFamily="18" charset="0"/>
-                <a:cs typeface="Times New Roman" panose="02020603050405020304" pitchFamily="18" charset="0"/>
-              </a:rPr>
-              <a:t> </a:t>
-            </a:r>
-            <a:r>
-              <a:rPr lang="en-US" sz="2400" dirty="0" err="1">
-                <a:latin typeface="Times New Roman" panose="02020603050405020304" pitchFamily="18" charset="0"/>
-                <a:cs typeface="Times New Roman" panose="02020603050405020304" pitchFamily="18" charset="0"/>
-              </a:rPr>
-              <a:t>dnevne</a:t>
-            </a:r>
-            <a:r>
-              <a:rPr lang="en-US" sz="2400" dirty="0">
-                <a:latin typeface="Times New Roman" panose="02020603050405020304" pitchFamily="18" charset="0"/>
-                <a:cs typeface="Times New Roman" panose="02020603050405020304" pitchFamily="18" charset="0"/>
-              </a:rPr>
-              <a:t> </a:t>
-            </a:r>
-            <a:r>
-              <a:rPr lang="en-US" sz="2400" dirty="0" err="1">
-                <a:latin typeface="Times New Roman" panose="02020603050405020304" pitchFamily="18" charset="0"/>
-                <a:cs typeface="Times New Roman" panose="02020603050405020304" pitchFamily="18" charset="0"/>
-              </a:rPr>
-              <a:t>troškove</a:t>
-            </a:r>
-            <a:r>
-              <a:rPr lang="en-US" sz="2400" dirty="0">
-                <a:latin typeface="Times New Roman" panose="02020603050405020304" pitchFamily="18" charset="0"/>
-                <a:cs typeface="Times New Roman" panose="02020603050405020304" pitchFamily="18" charset="0"/>
-              </a:rPr>
-              <a:t>?</a:t>
-            </a:r>
-            <a:endParaRPr lang="sr-Latn-RS" sz="2400" dirty="0">
-              <a:latin typeface="Times New Roman" panose="02020603050405020304" pitchFamily="18" charset="0"/>
-              <a:cs typeface="Times New Roman" panose="02020603050405020304" pitchFamily="18" charset="0"/>
-            </a:endParaRPr>
-          </a:p>
-          <a:p>
-            <a:r>
-              <a:rPr lang="en-US" sz="2400" dirty="0" err="1">
-                <a:latin typeface="Times New Roman" panose="02020603050405020304" pitchFamily="18" charset="0"/>
-                <a:cs typeface="Times New Roman" panose="02020603050405020304" pitchFamily="18" charset="0"/>
-              </a:rPr>
-              <a:t>Potreba</a:t>
-            </a:r>
-            <a:r>
-              <a:rPr lang="en-US" sz="2400" dirty="0">
-                <a:latin typeface="Times New Roman" panose="02020603050405020304" pitchFamily="18" charset="0"/>
-                <a:cs typeface="Times New Roman" panose="02020603050405020304" pitchFamily="18" charset="0"/>
-              </a:rPr>
-              <a:t> za </a:t>
-            </a:r>
-            <a:r>
-              <a:rPr lang="en-US" sz="2400" dirty="0" err="1">
-                <a:latin typeface="Times New Roman" panose="02020603050405020304" pitchFamily="18" charset="0"/>
-                <a:cs typeface="Times New Roman" panose="02020603050405020304" pitchFamily="18" charset="0"/>
-              </a:rPr>
-              <a:t>automatizovanom</a:t>
-            </a:r>
-            <a:r>
-              <a:rPr lang="en-US" sz="2400" dirty="0">
-                <a:latin typeface="Times New Roman" panose="02020603050405020304" pitchFamily="18" charset="0"/>
-                <a:cs typeface="Times New Roman" panose="02020603050405020304" pitchFamily="18" charset="0"/>
-              </a:rPr>
-              <a:t> </a:t>
-            </a:r>
-            <a:r>
-              <a:rPr lang="en-US" sz="2400" dirty="0" err="1">
-                <a:latin typeface="Times New Roman" panose="02020603050405020304" pitchFamily="18" charset="0"/>
-                <a:cs typeface="Times New Roman" panose="02020603050405020304" pitchFamily="18" charset="0"/>
-              </a:rPr>
-              <a:t>predikcijom</a:t>
-            </a:r>
-            <a:endParaRPr lang="sr-Latn-RS" sz="2400" dirty="0">
-              <a:latin typeface="Times New Roman" panose="02020603050405020304" pitchFamily="18" charset="0"/>
-              <a:cs typeface="Times New Roman" panose="02020603050405020304" pitchFamily="18" charset="0"/>
-            </a:endParaRPr>
-          </a:p>
-          <a:p>
-            <a:r>
-              <a:rPr lang="en-US" sz="2400" b="1" dirty="0" err="1">
-                <a:latin typeface="Times New Roman" panose="02020603050405020304" pitchFamily="18" charset="0"/>
-                <a:cs typeface="Times New Roman" panose="02020603050405020304" pitchFamily="18" charset="0"/>
-              </a:rPr>
-              <a:t>Cilj</a:t>
-            </a:r>
-            <a:r>
-              <a:rPr lang="en-US" sz="2400" b="1" dirty="0">
-                <a:latin typeface="Times New Roman" panose="02020603050405020304" pitchFamily="18" charset="0"/>
-                <a:cs typeface="Times New Roman" panose="02020603050405020304" pitchFamily="18" charset="0"/>
-              </a:rPr>
-              <a:t>: </a:t>
-            </a:r>
-            <a:r>
-              <a:rPr lang="en-US" sz="2400" dirty="0" err="1">
-                <a:latin typeface="Times New Roman" panose="02020603050405020304" pitchFamily="18" charset="0"/>
-                <a:cs typeface="Times New Roman" panose="02020603050405020304" pitchFamily="18" charset="0"/>
-              </a:rPr>
-              <a:t>Precizno</a:t>
-            </a:r>
-            <a:r>
-              <a:rPr lang="en-US" sz="2400" dirty="0">
-                <a:latin typeface="Times New Roman" panose="02020603050405020304" pitchFamily="18" charset="0"/>
-                <a:cs typeface="Times New Roman" panose="02020603050405020304" pitchFamily="18" charset="0"/>
-              </a:rPr>
-              <a:t> </a:t>
-            </a:r>
-            <a:r>
-              <a:rPr lang="en-US" sz="2400" dirty="0" err="1">
-                <a:latin typeface="Times New Roman" panose="02020603050405020304" pitchFamily="18" charset="0"/>
-                <a:cs typeface="Times New Roman" panose="02020603050405020304" pitchFamily="18" charset="0"/>
-              </a:rPr>
-              <a:t>predviđanje</a:t>
-            </a:r>
-            <a:r>
-              <a:rPr lang="en-US" sz="2400" dirty="0">
-                <a:latin typeface="Times New Roman" panose="02020603050405020304" pitchFamily="18" charset="0"/>
-                <a:cs typeface="Times New Roman" panose="02020603050405020304" pitchFamily="18" charset="0"/>
-              </a:rPr>
-              <a:t> </a:t>
-            </a:r>
-            <a:r>
-              <a:rPr lang="en-US" sz="2400" dirty="0" err="1">
-                <a:latin typeface="Times New Roman" panose="02020603050405020304" pitchFamily="18" charset="0"/>
-                <a:cs typeface="Times New Roman" panose="02020603050405020304" pitchFamily="18" charset="0"/>
-              </a:rPr>
-              <a:t>uz</a:t>
-            </a:r>
-            <a:r>
-              <a:rPr lang="en-US" sz="2400" dirty="0">
-                <a:latin typeface="Times New Roman" panose="02020603050405020304" pitchFamily="18" charset="0"/>
-                <a:cs typeface="Times New Roman" panose="02020603050405020304" pitchFamily="18" charset="0"/>
-              </a:rPr>
-              <a:t> </a:t>
-            </a:r>
-            <a:r>
-              <a:rPr lang="en-US" sz="2400" dirty="0" err="1">
-                <a:latin typeface="Times New Roman" panose="02020603050405020304" pitchFamily="18" charset="0"/>
-                <a:cs typeface="Times New Roman" panose="02020603050405020304" pitchFamily="18" charset="0"/>
-              </a:rPr>
-              <a:t>prihvatljiv</a:t>
-            </a:r>
-            <a:r>
-              <a:rPr lang="en-US" sz="2400" dirty="0">
-                <a:latin typeface="Times New Roman" panose="02020603050405020304" pitchFamily="18" charset="0"/>
-                <a:cs typeface="Times New Roman" panose="02020603050405020304" pitchFamily="18" charset="0"/>
-              </a:rPr>
-              <a:t> </a:t>
-            </a:r>
-            <a:r>
-              <a:rPr lang="en-US" sz="2400" dirty="0" err="1">
-                <a:latin typeface="Times New Roman" panose="02020603050405020304" pitchFamily="18" charset="0"/>
-                <a:cs typeface="Times New Roman" panose="02020603050405020304" pitchFamily="18" charset="0"/>
-              </a:rPr>
-              <a:t>stepen</a:t>
-            </a:r>
-            <a:r>
-              <a:rPr lang="en-US" sz="2400" dirty="0">
-                <a:latin typeface="Times New Roman" panose="02020603050405020304" pitchFamily="18" charset="0"/>
-                <a:cs typeface="Times New Roman" panose="02020603050405020304" pitchFamily="18" charset="0"/>
-              </a:rPr>
-              <a:t> </a:t>
-            </a:r>
-            <a:r>
-              <a:rPr lang="en-US" sz="2400" dirty="0" err="1">
-                <a:latin typeface="Times New Roman" panose="02020603050405020304" pitchFamily="18" charset="0"/>
-                <a:cs typeface="Times New Roman" panose="02020603050405020304" pitchFamily="18" charset="0"/>
-              </a:rPr>
-              <a:t>greške</a:t>
-            </a:r>
-            <a:endParaRPr lang="en-US" sz="2400" dirty="0">
+              <a:rPr lang="en-US" sz="2400">
+                <a:latin typeface="Times New Roman" panose="02020603050405020304" pitchFamily="18" charset="0"/>
+                <a:cs typeface="Times New Roman" panose="02020603050405020304" pitchFamily="18" charset="0"/>
+              </a:rPr>
+              <a:t>U savremenom poslovanju i ličnim finansijama, troškovi često variraju iz dana u dan i teško ih je precizno planirati. </a:t>
+            </a:r>
+          </a:p>
+          <a:p>
+            <a:r>
+              <a:rPr lang="en-US" sz="2400">
+                <a:latin typeface="Times New Roman" panose="02020603050405020304" pitchFamily="18" charset="0"/>
+                <a:cs typeface="Times New Roman" panose="02020603050405020304" pitchFamily="18" charset="0"/>
+              </a:rPr>
+              <a:t>Neočekivane oscilacije mogu dovesti do:</a:t>
+            </a:r>
+          </a:p>
+          <a:p>
+            <a:pPr lvl="1"/>
+            <a:r>
+              <a:rPr lang="en-US" sz="2200">
+                <a:latin typeface="Times New Roman" panose="02020603050405020304" pitchFamily="18" charset="0"/>
+                <a:cs typeface="Times New Roman" panose="02020603050405020304" pitchFamily="18" charset="0"/>
+              </a:rPr>
+              <a:t>prekoračenja budžeta</a:t>
+            </a:r>
+          </a:p>
+          <a:p>
+            <a:pPr lvl="1"/>
+            <a:r>
+              <a:rPr lang="en-US" sz="2200">
+                <a:latin typeface="Times New Roman" panose="02020603050405020304" pitchFamily="18" charset="0"/>
+                <a:cs typeface="Times New Roman" panose="02020603050405020304" pitchFamily="18" charset="0"/>
+              </a:rPr>
+              <a:t>lošeg upravljanja resursima</a:t>
+            </a:r>
+          </a:p>
+          <a:p>
+            <a:pPr lvl="1"/>
+            <a:r>
+              <a:rPr lang="en-US" sz="2200">
+                <a:latin typeface="Times New Roman" panose="02020603050405020304" pitchFamily="18" charset="0"/>
+                <a:cs typeface="Times New Roman" panose="02020603050405020304" pitchFamily="18" charset="0"/>
+              </a:rPr>
+              <a:t>smanjene finansijske stabilnosti</a:t>
+            </a:r>
+          </a:p>
+          <a:p>
+            <a:pPr lvl="1"/>
+            <a:r>
+              <a:rPr lang="en-US" sz="2200">
+                <a:latin typeface="Times New Roman" panose="02020603050405020304" pitchFamily="18" charset="0"/>
+                <a:cs typeface="Times New Roman" panose="02020603050405020304" pitchFamily="18" charset="0"/>
+              </a:rPr>
+              <a:t>nemogućnosti pravovremenog reagovanja</a:t>
+            </a:r>
+            <a:endParaRPr lang="en-US" sz="2200" dirty="0">
               <a:latin typeface="Times New Roman" panose="02020603050405020304" pitchFamily="18" charset="0"/>
               <a:cs typeface="Times New Roman" panose="02020603050405020304" pitchFamily="18" charset="0"/>
             </a:endParaRPr>
@@ -8669,7 +7862,7 @@
         </p:blipFill>
         <p:spPr>
           <a:xfrm>
-            <a:off x="8115300" y="4635360"/>
+            <a:off x="7502652" y="4165891"/>
             <a:ext cx="4076700" cy="2222640"/>
           </a:xfrm>
           <a:prstGeom prst="rect">
@@ -8690,7 +7883,7 @@
 </p:sld>
 </file>
 
-<file path=ppt/slides/slide4.xml><?xml version="1.0" encoding="utf-8"?>
+<file path=ppt/slides/slide3.xml><?xml version="1.0" encoding="utf-8"?>
 <p:sld xmlns:a="http://schemas.openxmlformats.org/drawingml/2006/main" xmlns:r="http://schemas.openxmlformats.org/officeDocument/2006/relationships" xmlns:p="http://schemas.openxmlformats.org/presentationml/2006/main">
   <p:cSld>
     <p:spTree>
@@ -8778,151 +7971,80 @@
           <a:lstStyle/>
           <a:p>
             <a:r>
-              <a:rPr lang="en-US" sz="2400" dirty="0">
-                <a:latin typeface="Times New Roman" panose="02020603050405020304" pitchFamily="18" charset="0"/>
-                <a:cs typeface="Times New Roman" panose="02020603050405020304" pitchFamily="18" charset="0"/>
-              </a:rPr>
-              <a:t>Rolling </a:t>
-            </a:r>
-            <a:r>
-              <a:rPr lang="en-US" sz="2400" dirty="0" err="1">
-                <a:latin typeface="Times New Roman" panose="02020603050405020304" pitchFamily="18" charset="0"/>
-                <a:cs typeface="Times New Roman" panose="02020603050405020304" pitchFamily="18" charset="0"/>
-              </a:rPr>
-              <a:t>predikcija</a:t>
-            </a:r>
-            <a:r>
-              <a:rPr lang="en-US" sz="2400" dirty="0">
-                <a:latin typeface="Times New Roman" panose="02020603050405020304" pitchFamily="18" charset="0"/>
-                <a:cs typeface="Times New Roman" panose="02020603050405020304" pitchFamily="18" charset="0"/>
-              </a:rPr>
-              <a:t> </a:t>
-            </a:r>
-            <a:r>
-              <a:rPr lang="en-US" sz="2400" dirty="0" err="1">
-                <a:latin typeface="Times New Roman" panose="02020603050405020304" pitchFamily="18" charset="0"/>
-                <a:cs typeface="Times New Roman" panose="02020603050405020304" pitchFamily="18" charset="0"/>
-              </a:rPr>
-              <a:t>troškova</a:t>
-            </a:r>
-            <a:endParaRPr lang="sr-Latn-RS" sz="2400" dirty="0">
-              <a:latin typeface="Times New Roman" panose="02020603050405020304" pitchFamily="18" charset="0"/>
-              <a:cs typeface="Times New Roman" panose="02020603050405020304" pitchFamily="18" charset="0"/>
-            </a:endParaRPr>
-          </a:p>
-          <a:p>
-            <a:r>
-              <a:rPr lang="en-US" sz="2400" dirty="0" err="1">
-                <a:latin typeface="Times New Roman" panose="02020603050405020304" pitchFamily="18" charset="0"/>
-                <a:cs typeface="Times New Roman" panose="02020603050405020304" pitchFamily="18" charset="0"/>
-              </a:rPr>
-              <a:t>Korišćenje</a:t>
-            </a:r>
-            <a:r>
-              <a:rPr lang="en-US" sz="2400" dirty="0">
-                <a:latin typeface="Times New Roman" panose="02020603050405020304" pitchFamily="18" charset="0"/>
-                <a:cs typeface="Times New Roman" panose="02020603050405020304" pitchFamily="18" charset="0"/>
-              </a:rPr>
-              <a:t> </a:t>
-            </a:r>
-            <a:r>
-              <a:rPr lang="en-US" sz="2400" dirty="0" err="1">
-                <a:latin typeface="Times New Roman" panose="02020603050405020304" pitchFamily="18" charset="0"/>
-                <a:cs typeface="Times New Roman" panose="02020603050405020304" pitchFamily="18" charset="0"/>
-              </a:rPr>
-              <a:t>više</a:t>
-            </a:r>
-            <a:r>
-              <a:rPr lang="en-US" sz="2400" dirty="0">
-                <a:latin typeface="Times New Roman" panose="02020603050405020304" pitchFamily="18" charset="0"/>
-                <a:cs typeface="Times New Roman" panose="02020603050405020304" pitchFamily="18" charset="0"/>
-              </a:rPr>
-              <a:t> </a:t>
-            </a:r>
-            <a:r>
-              <a:rPr lang="en-US" sz="2400" dirty="0" err="1">
-                <a:latin typeface="Times New Roman" panose="02020603050405020304" pitchFamily="18" charset="0"/>
-                <a:cs typeface="Times New Roman" panose="02020603050405020304" pitchFamily="18" charset="0"/>
-              </a:rPr>
-              <a:t>modela</a:t>
-            </a:r>
-            <a:r>
-              <a:rPr lang="en-US" sz="2400" dirty="0">
-                <a:latin typeface="Times New Roman" panose="02020603050405020304" pitchFamily="18" charset="0"/>
-                <a:cs typeface="Times New Roman" panose="02020603050405020304" pitchFamily="18" charset="0"/>
-              </a:rPr>
-              <a:t> (low, mid, high)</a:t>
-            </a:r>
-            <a:endParaRPr lang="sr-Latn-RS" sz="2400" dirty="0">
-              <a:latin typeface="Times New Roman" panose="02020603050405020304" pitchFamily="18" charset="0"/>
-              <a:cs typeface="Times New Roman" panose="02020603050405020304" pitchFamily="18" charset="0"/>
-            </a:endParaRPr>
-          </a:p>
-          <a:p>
-            <a:r>
-              <a:rPr lang="en-US" sz="2400" dirty="0" err="1">
-                <a:latin typeface="Times New Roman" panose="02020603050405020304" pitchFamily="18" charset="0"/>
-                <a:cs typeface="Times New Roman" panose="02020603050405020304" pitchFamily="18" charset="0"/>
-              </a:rPr>
-              <a:t>Vizuelni</a:t>
-            </a:r>
-            <a:r>
-              <a:rPr lang="en-US" sz="2400" dirty="0">
-                <a:latin typeface="Times New Roman" panose="02020603050405020304" pitchFamily="18" charset="0"/>
-                <a:cs typeface="Times New Roman" panose="02020603050405020304" pitchFamily="18" charset="0"/>
-              </a:rPr>
-              <a:t> </a:t>
-            </a:r>
-            <a:r>
-              <a:rPr lang="en-US" sz="2400" dirty="0" err="1">
-                <a:latin typeface="Times New Roman" panose="02020603050405020304" pitchFamily="18" charset="0"/>
-                <a:cs typeface="Times New Roman" panose="02020603050405020304" pitchFamily="18" charset="0"/>
-              </a:rPr>
-              <a:t>prikaz</a:t>
-            </a:r>
-            <a:r>
-              <a:rPr lang="en-US" sz="2400" dirty="0">
-                <a:latin typeface="Times New Roman" panose="02020603050405020304" pitchFamily="18" charset="0"/>
-                <a:cs typeface="Times New Roman" panose="02020603050405020304" pitchFamily="18" charset="0"/>
-              </a:rPr>
-              <a:t> </a:t>
-            </a:r>
-            <a:r>
-              <a:rPr lang="en-US" sz="2400" dirty="0" err="1">
-                <a:latin typeface="Times New Roman" panose="02020603050405020304" pitchFamily="18" charset="0"/>
-                <a:cs typeface="Times New Roman" panose="02020603050405020304" pitchFamily="18" charset="0"/>
-              </a:rPr>
-              <a:t>predikcija</a:t>
-            </a:r>
-            <a:r>
-              <a:rPr lang="en-US" sz="2400" dirty="0">
-                <a:latin typeface="Times New Roman" panose="02020603050405020304" pitchFamily="18" charset="0"/>
-                <a:cs typeface="Times New Roman" panose="02020603050405020304" pitchFamily="18" charset="0"/>
-              </a:rPr>
-              <a:t> </a:t>
-            </a:r>
-            <a:r>
-              <a:rPr lang="en-US" sz="2400" dirty="0" err="1">
-                <a:latin typeface="Times New Roman" panose="02020603050405020304" pitchFamily="18" charset="0"/>
-                <a:cs typeface="Times New Roman" panose="02020603050405020304" pitchFamily="18" charset="0"/>
-              </a:rPr>
-              <a:t>i</a:t>
-            </a:r>
-            <a:r>
-              <a:rPr lang="en-US" sz="2400" dirty="0">
-                <a:latin typeface="Times New Roman" panose="02020603050405020304" pitchFamily="18" charset="0"/>
-                <a:cs typeface="Times New Roman" panose="02020603050405020304" pitchFamily="18" charset="0"/>
-              </a:rPr>
-              <a:t> </a:t>
-            </a:r>
-            <a:r>
-              <a:rPr lang="en-US" sz="2400" dirty="0" err="1">
-                <a:latin typeface="Times New Roman" panose="02020603050405020304" pitchFamily="18" charset="0"/>
-                <a:cs typeface="Times New Roman" panose="02020603050405020304" pitchFamily="18" charset="0"/>
-              </a:rPr>
-              <a:t>grešaka</a:t>
-            </a:r>
-            <a:endParaRPr lang="en-US" sz="2400" dirty="0">
+              <a:rPr lang="en-US" sz="2400">
+                <a:latin typeface="Times New Roman" panose="02020603050405020304" pitchFamily="18" charset="0"/>
+                <a:cs typeface="Times New Roman" panose="02020603050405020304" pitchFamily="18" charset="0"/>
+              </a:rPr>
+              <a:t>Sistem koristi Rolling Window pristup za obradu vremenskih serija</a:t>
+            </a:r>
+          </a:p>
+          <a:p>
+            <a:r>
+              <a:rPr lang="en-US" sz="2400">
+                <a:latin typeface="Times New Roman" panose="02020603050405020304" pitchFamily="18" charset="0"/>
+                <a:cs typeface="Times New Roman" panose="02020603050405020304" pitchFamily="18" charset="0"/>
+              </a:rPr>
+              <a:t>Model trenira nad poslednjih N dana radi adaptacije na promene u trendu</a:t>
+            </a:r>
+          </a:p>
+          <a:p>
+            <a:r>
+              <a:rPr lang="en-US" sz="2400">
+                <a:latin typeface="Times New Roman" panose="02020603050405020304" pitchFamily="18" charset="0"/>
+                <a:cs typeface="Times New Roman" panose="02020603050405020304" pitchFamily="18" charset="0"/>
+              </a:rPr>
+              <a:t>Implementirana je multi-model arhitektura</a:t>
+            </a:r>
+          </a:p>
+          <a:p>
+            <a:r>
+              <a:rPr lang="en-US" sz="2400">
+                <a:latin typeface="Times New Roman" panose="02020603050405020304" pitchFamily="18" charset="0"/>
+                <a:cs typeface="Times New Roman" panose="02020603050405020304" pitchFamily="18" charset="0"/>
+              </a:rPr>
+              <a:t>Koriste se 3 specijalizovana modela:</a:t>
+            </a:r>
+          </a:p>
+          <a:p>
+            <a:pPr lvl="1"/>
+            <a:r>
+              <a:rPr lang="en-US" sz="2200">
+                <a:latin typeface="Times New Roman" panose="02020603050405020304" pitchFamily="18" charset="0"/>
+                <a:cs typeface="Times New Roman" panose="02020603050405020304" pitchFamily="18" charset="0"/>
+              </a:rPr>
+              <a:t>Model za male troškove</a:t>
+            </a:r>
+          </a:p>
+          <a:p>
+            <a:pPr lvl="1"/>
+            <a:r>
+              <a:rPr lang="en-US" sz="2200">
+                <a:latin typeface="Times New Roman" panose="02020603050405020304" pitchFamily="18" charset="0"/>
+                <a:cs typeface="Times New Roman" panose="02020603050405020304" pitchFamily="18" charset="0"/>
+              </a:rPr>
+              <a:t>Model za srednje troškove</a:t>
+            </a:r>
+          </a:p>
+          <a:p>
+            <a:pPr lvl="1"/>
+            <a:r>
+              <a:rPr lang="en-US" sz="2200">
+                <a:latin typeface="Times New Roman" panose="02020603050405020304" pitchFamily="18" charset="0"/>
+                <a:cs typeface="Times New Roman" panose="02020603050405020304" pitchFamily="18" charset="0"/>
+              </a:rPr>
+              <a:t>Model za velike troškove</a:t>
+            </a:r>
+          </a:p>
+          <a:p>
+            <a:pPr lvl="1"/>
+            <a:r>
+              <a:rPr lang="en-US" sz="2200">
+                <a:latin typeface="Times New Roman" panose="02020603050405020304" pitchFamily="18" charset="0"/>
+                <a:cs typeface="Times New Roman" panose="02020603050405020304" pitchFamily="18" charset="0"/>
+              </a:rPr>
+              <a:t>Podela omogućava veću preciznost i stabilnije predikcije</a:t>
+            </a:r>
+            <a:endParaRPr lang="en-US" sz="2200" dirty="0">
               <a:latin typeface="Times New Roman" panose="02020603050405020304" pitchFamily="18" charset="0"/>
               <a:cs typeface="Times New Roman" panose="02020603050405020304" pitchFamily="18" charset="0"/>
             </a:endParaRPr>
@@ -8957,7 +8079,7 @@
         </p:blipFill>
         <p:spPr>
           <a:xfrm>
-            <a:off x="6090676" y="3761824"/>
+            <a:off x="6401572" y="4052109"/>
             <a:ext cx="4801270" cy="1267002"/>
           </a:xfrm>
           <a:prstGeom prst="rect">
@@ -8978,7 +8100,7 @@
 </p:sld>
 </file>
 
-<file path=ppt/slides/slide5.xml><?xml version="1.0" encoding="utf-8"?>
+<file path=ppt/slides/slide4.xml><?xml version="1.0" encoding="utf-8"?>
 <p:sld xmlns:a="http://schemas.openxmlformats.org/drawingml/2006/main" xmlns:r="http://schemas.openxmlformats.org/officeDocument/2006/relationships" xmlns:p="http://schemas.openxmlformats.org/presentationml/2006/main">
   <p:cSld>
     <p:spTree>
@@ -9087,6 +8209,58 @@
               <a:t> (.h5 </a:t>
             </a:r>
             <a:r>
+              <a:rPr lang="en-US" sz="2400" err="1">
+                <a:latin typeface="Times New Roman" panose="02020603050405020304" pitchFamily="18" charset="0"/>
+                <a:cs typeface="Times New Roman" panose="02020603050405020304" pitchFamily="18" charset="0"/>
+              </a:rPr>
+              <a:t>modeli</a:t>
+            </a:r>
+            <a:r>
+              <a:rPr lang="en-US" sz="2400">
+                <a:latin typeface="Times New Roman" panose="02020603050405020304" pitchFamily="18" charset="0"/>
+                <a:cs typeface="Times New Roman" panose="02020603050405020304" pitchFamily="18" charset="0"/>
+              </a:rPr>
+              <a:t>)</a:t>
+            </a:r>
+          </a:p>
+          <a:p>
+            <a:r>
+              <a:rPr lang="sr-Latn-RS" sz="2400">
+                <a:latin typeface="Times New Roman" panose="02020603050405020304" pitchFamily="18" charset="0"/>
+                <a:cs typeface="Times New Roman" panose="02020603050405020304" pitchFamily="18" charset="0"/>
+              </a:rPr>
+              <a:t>Numpy, Pandas</a:t>
+            </a:r>
+            <a:r>
+              <a:rPr lang="en-US" sz="2400">
+                <a:latin typeface="Times New Roman" panose="02020603050405020304" pitchFamily="18" charset="0"/>
+                <a:cs typeface="Times New Roman" panose="02020603050405020304" pitchFamily="18" charset="0"/>
+              </a:rPr>
+              <a:t>, Matplotlib, SciKit-learn</a:t>
+            </a:r>
+          </a:p>
+          <a:p>
+            <a:r>
+              <a:rPr lang="en-US" sz="2400">
+                <a:latin typeface="Times New Roman" panose="02020603050405020304" pitchFamily="18" charset="0"/>
+                <a:cs typeface="Times New Roman" panose="02020603050405020304" pitchFamily="18" charset="0"/>
+              </a:rPr>
+              <a:t>FastApi</a:t>
+            </a:r>
+            <a:endParaRPr lang="sr-Latn-RS" sz="2400">
+              <a:latin typeface="Times New Roman" panose="02020603050405020304" pitchFamily="18" charset="0"/>
+              <a:cs typeface="Times New Roman" panose="02020603050405020304" pitchFamily="18" charset="0"/>
+            </a:endParaRPr>
+          </a:p>
+          <a:p>
+            <a:r>
+              <a:rPr lang="en-US" sz="2400">
+                <a:latin typeface="Times New Roman" panose="02020603050405020304" pitchFamily="18" charset="0"/>
+                <a:cs typeface="Times New Roman" panose="02020603050405020304" pitchFamily="18" charset="0"/>
+              </a:rPr>
+              <a:t>LSTM </a:t>
+            </a:r>
+            <a:r>
               <a:rPr lang="en-US" sz="2400" dirty="0" err="1">
                 <a:latin typeface="Times New Roman" panose="02020603050405020304" pitchFamily="18" charset="0"/>
                 <a:cs typeface="Times New Roman" panose="02020603050405020304" pitchFamily="18" charset="0"/>
@@ -9098,7 +8272,28 @@
                 <a:latin typeface="Times New Roman" panose="02020603050405020304" pitchFamily="18" charset="0"/>
                 <a:cs typeface="Times New Roman" panose="02020603050405020304" pitchFamily="18" charset="0"/>
               </a:rPr>
-              <a:t>)</a:t>
+              <a:t> za </a:t>
+            </a:r>
+            <a:r>
+              <a:rPr lang="en-US" sz="2400" dirty="0" err="1">
+                <a:latin typeface="Times New Roman" panose="02020603050405020304" pitchFamily="18" charset="0"/>
+                <a:cs typeface="Times New Roman" panose="02020603050405020304" pitchFamily="18" charset="0"/>
+              </a:rPr>
+              <a:t>vremenske</a:t>
+            </a:r>
+            <a:r>
+              <a:rPr lang="en-US" sz="2400" dirty="0">
+                <a:latin typeface="Times New Roman" panose="02020603050405020304" pitchFamily="18" charset="0"/>
+                <a:cs typeface="Times New Roman" panose="02020603050405020304" pitchFamily="18" charset="0"/>
+              </a:rPr>
+              <a:t> </a:t>
+            </a:r>
+            <a:r>
+              <a:rPr lang="en-US" sz="2400" dirty="0" err="1">
+                <a:latin typeface="Times New Roman" panose="02020603050405020304" pitchFamily="18" charset="0"/>
+                <a:cs typeface="Times New Roman" panose="02020603050405020304" pitchFamily="18" charset="0"/>
+              </a:rPr>
+              <a:t>serije</a:t>
             </a:r>
             <a:endParaRPr lang="sr-Latn-RS" sz="2400" dirty="0">
               <a:latin typeface="Times New Roman" panose="02020603050405020304" pitchFamily="18" charset="0"/>
@@ -9111,64 +8306,16 @@
                 <a:latin typeface="Times New Roman" panose="02020603050405020304" pitchFamily="18" charset="0"/>
                 <a:cs typeface="Times New Roman" panose="02020603050405020304" pitchFamily="18" charset="0"/>
               </a:rPr>
-              <a:t>LSTM </a:t>
-            </a:r>
-            <a:r>
-              <a:rPr lang="en-US" sz="2400" dirty="0" err="1">
-                <a:latin typeface="Times New Roman" panose="02020603050405020304" pitchFamily="18" charset="0"/>
-                <a:cs typeface="Times New Roman" panose="02020603050405020304" pitchFamily="18" charset="0"/>
-              </a:rPr>
-              <a:t>modeli</a:t>
-            </a:r>
-            <a:r>
-              <a:rPr lang="en-US" sz="2400" dirty="0">
-                <a:latin typeface="Times New Roman" panose="02020603050405020304" pitchFamily="18" charset="0"/>
-                <a:cs typeface="Times New Roman" panose="02020603050405020304" pitchFamily="18" charset="0"/>
-              </a:rPr>
-              <a:t> za </a:t>
-            </a:r>
-            <a:r>
-              <a:rPr lang="en-US" sz="2400" dirty="0" err="1">
-                <a:latin typeface="Times New Roman" panose="02020603050405020304" pitchFamily="18" charset="0"/>
-                <a:cs typeface="Times New Roman" panose="02020603050405020304" pitchFamily="18" charset="0"/>
-              </a:rPr>
-              <a:t>vremenske</a:t>
-            </a:r>
-            <a:r>
-              <a:rPr lang="en-US" sz="2400" dirty="0">
-                <a:latin typeface="Times New Roman" panose="02020603050405020304" pitchFamily="18" charset="0"/>
-                <a:cs typeface="Times New Roman" panose="02020603050405020304" pitchFamily="18" charset="0"/>
-              </a:rPr>
-              <a:t> </a:t>
-            </a:r>
-            <a:r>
-              <a:rPr lang="en-US" sz="2400" dirty="0" err="1">
-                <a:latin typeface="Times New Roman" panose="02020603050405020304" pitchFamily="18" charset="0"/>
-                <a:cs typeface="Times New Roman" panose="02020603050405020304" pitchFamily="18" charset="0"/>
-              </a:rPr>
-              <a:t>serije</a:t>
-            </a:r>
-            <a:endParaRPr lang="sr-Latn-RS" sz="2400" dirty="0">
-              <a:latin typeface="Times New Roman" panose="02020603050405020304" pitchFamily="18" charset="0"/>
-              <a:cs typeface="Times New Roman" panose="02020603050405020304" pitchFamily="18" charset="0"/>
-            </a:endParaRPr>
-          </a:p>
-          <a:p>
-            <a:r>
-              <a:rPr lang="en-US" sz="2400" dirty="0">
-                <a:latin typeface="Times New Roman" panose="02020603050405020304" pitchFamily="18" charset="0"/>
-                <a:cs typeface="Times New Roman" panose="02020603050405020304" pitchFamily="18" charset="0"/>
-              </a:rPr>
-              <a:t>Multi-model vs. Single-model </a:t>
-            </a:r>
-            <a:r>
-              <a:rPr lang="en-US" sz="2400" dirty="0" err="1">
-                <a:latin typeface="Times New Roman" panose="02020603050405020304" pitchFamily="18" charset="0"/>
-                <a:cs typeface="Times New Roman" panose="02020603050405020304" pitchFamily="18" charset="0"/>
-              </a:rPr>
-              <a:t>pristupi</a:t>
-            </a:r>
-            <a:endParaRPr lang="en-US" sz="2400" dirty="0">
+              <a:t>Multi-model vs. </a:t>
+            </a:r>
+            <a:r>
+              <a:rPr lang="en-US" sz="2400">
+                <a:latin typeface="Times New Roman" panose="02020603050405020304" pitchFamily="18" charset="0"/>
+                <a:cs typeface="Times New Roman" panose="02020603050405020304" pitchFamily="18" charset="0"/>
+              </a:rPr>
+              <a:t>Single-model pristupi</a:t>
+            </a:r>
+            <a:endParaRPr lang="sr-Latn-RS" sz="2400">
               <a:latin typeface="Times New Roman" panose="02020603050405020304" pitchFamily="18" charset="0"/>
               <a:cs typeface="Times New Roman" panose="02020603050405020304" pitchFamily="18" charset="0"/>
             </a:endParaRPr>
@@ -9203,7 +8350,7 @@
         </p:blipFill>
         <p:spPr>
           <a:xfrm>
-            <a:off x="10019608" y="2916687"/>
+            <a:off x="10147624" y="2057151"/>
             <a:ext cx="1247949" cy="1209844"/>
           </a:xfrm>
           <a:prstGeom prst="rect">
@@ -9239,7 +8386,7 @@
         </p:blipFill>
         <p:spPr>
           <a:xfrm>
-            <a:off x="6523834" y="4960053"/>
+            <a:off x="6090676" y="4402269"/>
             <a:ext cx="5668166" cy="1867161"/>
           </a:xfrm>
           <a:prstGeom prst="rect">
@@ -9275,7 +8422,7 @@
         </p:blipFill>
         <p:spPr>
           <a:xfrm>
-            <a:off x="6948546" y="3042284"/>
+            <a:off x="7076562" y="2182748"/>
             <a:ext cx="1324160" cy="990738"/>
           </a:xfrm>
           <a:prstGeom prst="rect">
@@ -9287,6 +8434,340 @@
     <p:extLst>
       <p:ext uri="{BB962C8B-B14F-4D97-AF65-F5344CB8AC3E}">
         <p14:creationId xmlns:p14="http://schemas.microsoft.com/office/powerpoint/2010/main" val="2537469559"/>
+      </p:ext>
+    </p:extLst>
+  </p:cSld>
+  <p:clrMapOvr>
+    <a:masterClrMapping/>
+  </p:clrMapOvr>
+</p:sld>
+</file>
+
+<file path=ppt/slides/slide5.xml><?xml version="1.0" encoding="utf-8"?>
+<p:sld xmlns:a="http://schemas.openxmlformats.org/drawingml/2006/main" xmlns:r="http://schemas.openxmlformats.org/officeDocument/2006/relationships" xmlns:p="http://schemas.openxmlformats.org/presentationml/2006/main">
+  <p:cSld>
+    <p:spTree>
+      <p:nvGrpSpPr>
+        <p:cNvPr id="1" name=""/>
+        <p:cNvGrpSpPr/>
+        <p:nvPr/>
+      </p:nvGrpSpPr>
+      <p:grpSpPr>
+        <a:xfrm>
+          <a:off x="0" y="0"/>
+          <a:ext cx="0" cy="0"/>
+          <a:chOff x="0" y="0"/>
+          <a:chExt cx="0" cy="0"/>
+        </a:xfrm>
+      </p:grpSpPr>
+      <p:sp>
+        <p:nvSpPr>
+          <p:cNvPr id="2" name="Title 1">
+            <a:extLst>
+              <a:ext uri="{FF2B5EF4-FFF2-40B4-BE49-F238E27FC236}">
+                <a16:creationId xmlns:a16="http://schemas.microsoft.com/office/drawing/2014/main" id="{3EE38D53-E81B-E14B-06A4-97EAAE8C00B4}"/>
+              </a:ext>
+            </a:extLst>
+          </p:cNvPr>
+          <p:cNvSpPr>
+            <a:spLocks noGrp="1"/>
+          </p:cNvSpPr>
+          <p:nvPr>
+            <p:ph type="title"/>
+          </p:nvPr>
+        </p:nvSpPr>
+        <p:spPr>
+          <a:xfrm>
+            <a:off x="913794" y="741233"/>
+            <a:ext cx="10353762" cy="970450"/>
+          </a:xfrm>
+        </p:spPr>
+        <p:txBody>
+          <a:bodyPr>
+            <a:normAutofit/>
+          </a:bodyPr>
+          <a:lstStyle/>
+          <a:p>
+            <a:r>
+              <a:rPr lang="en-US" sz="4400" b="1">
+                <a:latin typeface="Times New Roman" panose="02020603050405020304" pitchFamily="18" charset="0"/>
+                <a:cs typeface="Times New Roman" panose="02020603050405020304" pitchFamily="18" charset="0"/>
+              </a:rPr>
+              <a:t>STATISTIKA GRESKE</a:t>
+            </a:r>
+            <a:endParaRPr lang="en-US" sz="4400" b="1" dirty="0">
+              <a:latin typeface="Times New Roman" panose="02020603050405020304" pitchFamily="18" charset="0"/>
+              <a:cs typeface="Times New Roman" panose="02020603050405020304" pitchFamily="18" charset="0"/>
+            </a:endParaRPr>
+          </a:p>
+        </p:txBody>
+      </p:sp>
+      <p:sp>
+        <p:nvSpPr>
+          <p:cNvPr id="3" name="Content Placeholder 2">
+            <a:extLst>
+              <a:ext uri="{FF2B5EF4-FFF2-40B4-BE49-F238E27FC236}">
+                <a16:creationId xmlns:a16="http://schemas.microsoft.com/office/drawing/2014/main" id="{C6C87EDF-59D9-2DBC-D23D-F9843223E3CF}"/>
+              </a:ext>
+            </a:extLst>
+          </p:cNvPr>
+          <p:cNvSpPr>
+            <a:spLocks noGrp="1"/>
+          </p:cNvSpPr>
+          <p:nvPr>
+            <p:ph idx="1"/>
+          </p:nvPr>
+        </p:nvSpPr>
+        <p:spPr>
+          <a:xfrm>
+            <a:off x="321246" y="2191335"/>
+            <a:ext cx="11538857" cy="3216923"/>
+          </a:xfrm>
+        </p:spPr>
+        <p:txBody>
+          <a:bodyPr>
+            <a:normAutofit/>
+          </a:bodyPr>
+          <a:lstStyle/>
+          <a:p>
+            <a:r>
+              <a:rPr lang="en-US" sz="2400">
+                <a:latin typeface="Times New Roman" panose="02020603050405020304" pitchFamily="18" charset="0"/>
+                <a:cs typeface="Times New Roman" panose="02020603050405020304" pitchFamily="18" charset="0"/>
+              </a:rPr>
+              <a:t>Greške </a:t>
+            </a:r>
+            <a:r>
+              <a:rPr lang="en-US" sz="2400" dirty="0">
+                <a:latin typeface="Times New Roman" panose="02020603050405020304" pitchFamily="18" charset="0"/>
+                <a:cs typeface="Times New Roman" panose="02020603050405020304" pitchFamily="18" charset="0"/>
+              </a:rPr>
+              <a:t>se </a:t>
+            </a:r>
+            <a:r>
+              <a:rPr lang="en-US" sz="2400" dirty="0" err="1">
+                <a:latin typeface="Times New Roman" panose="02020603050405020304" pitchFamily="18" charset="0"/>
+                <a:cs typeface="Times New Roman" panose="02020603050405020304" pitchFamily="18" charset="0"/>
+              </a:rPr>
+              <a:t>prikazuju</a:t>
+            </a:r>
+            <a:r>
+              <a:rPr lang="en-US" sz="2400" dirty="0">
+                <a:latin typeface="Times New Roman" panose="02020603050405020304" pitchFamily="18" charset="0"/>
+                <a:cs typeface="Times New Roman" panose="02020603050405020304" pitchFamily="18" charset="0"/>
+              </a:rPr>
+              <a:t> </a:t>
+            </a:r>
+            <a:r>
+              <a:rPr lang="en-US" sz="2400" err="1">
+                <a:latin typeface="Times New Roman" panose="02020603050405020304" pitchFamily="18" charset="0"/>
+                <a:cs typeface="Times New Roman" panose="02020603050405020304" pitchFamily="18" charset="0"/>
+              </a:rPr>
+              <a:t>kroz</a:t>
+            </a:r>
+            <a:r>
+              <a:rPr lang="en-US" sz="2400">
+                <a:latin typeface="Times New Roman" panose="02020603050405020304" pitchFamily="18" charset="0"/>
+                <a:cs typeface="Times New Roman" panose="02020603050405020304" pitchFamily="18" charset="0"/>
+              </a:rPr>
+              <a:t> </a:t>
+            </a:r>
+            <a:r>
+              <a:rPr lang="en-US" sz="2400" b="1">
+                <a:latin typeface="Times New Roman" panose="02020603050405020304" pitchFamily="18" charset="0"/>
+                <a:cs typeface="Times New Roman" panose="02020603050405020304" pitchFamily="18" charset="0"/>
+              </a:rPr>
+              <a:t>MAE(Mean Absolute Error) </a:t>
+            </a:r>
+            <a:r>
+              <a:rPr lang="en-US" sz="2400" b="1" err="1">
+                <a:latin typeface="Times New Roman" panose="02020603050405020304" pitchFamily="18" charset="0"/>
+                <a:cs typeface="Times New Roman" panose="02020603050405020304" pitchFamily="18" charset="0"/>
+              </a:rPr>
+              <a:t>i</a:t>
+            </a:r>
+            <a:r>
+              <a:rPr lang="en-US" sz="2400" b="1">
+                <a:latin typeface="Times New Roman" panose="02020603050405020304" pitchFamily="18" charset="0"/>
+                <a:cs typeface="Times New Roman" panose="02020603050405020304" pitchFamily="18" charset="0"/>
+              </a:rPr>
+              <a:t> RMSE(</a:t>
+            </a:r>
+            <a:r>
+              <a:rPr lang="en-GB" sz="2400" b="1"/>
+              <a:t>Root Mean Square Error</a:t>
+            </a:r>
+            <a:r>
+              <a:rPr lang="en-US" sz="2400" b="1">
+                <a:latin typeface="Times New Roman" panose="02020603050405020304" pitchFamily="18" charset="0"/>
+                <a:cs typeface="Times New Roman" panose="02020603050405020304" pitchFamily="18" charset="0"/>
+              </a:rPr>
+              <a:t>)</a:t>
+            </a:r>
+            <a:r>
+              <a:rPr lang="en-US" sz="2400">
+                <a:latin typeface="Times New Roman" panose="02020603050405020304" pitchFamily="18" charset="0"/>
+                <a:cs typeface="Times New Roman" panose="02020603050405020304" pitchFamily="18" charset="0"/>
+              </a:rPr>
+              <a:t>, a </a:t>
+            </a:r>
+            <a:r>
+              <a:rPr lang="en-US" sz="2400" dirty="0" err="1">
+                <a:latin typeface="Times New Roman" panose="02020603050405020304" pitchFamily="18" charset="0"/>
+                <a:cs typeface="Times New Roman" panose="02020603050405020304" pitchFamily="18" charset="0"/>
+              </a:rPr>
+              <a:t>predikcije</a:t>
+            </a:r>
+            <a:r>
+              <a:rPr lang="en-US" sz="2400" dirty="0">
+                <a:latin typeface="Times New Roman" panose="02020603050405020304" pitchFamily="18" charset="0"/>
+                <a:cs typeface="Times New Roman" panose="02020603050405020304" pitchFamily="18" charset="0"/>
+              </a:rPr>
+              <a:t> </a:t>
+            </a:r>
+            <a:r>
+              <a:rPr lang="en-US" sz="2400" dirty="0" err="1">
+                <a:latin typeface="Times New Roman" panose="02020603050405020304" pitchFamily="18" charset="0"/>
+                <a:cs typeface="Times New Roman" panose="02020603050405020304" pitchFamily="18" charset="0"/>
+              </a:rPr>
+              <a:t>su</a:t>
+            </a:r>
+            <a:r>
+              <a:rPr lang="en-US" sz="2400" dirty="0">
+                <a:latin typeface="Times New Roman" panose="02020603050405020304" pitchFamily="18" charset="0"/>
+                <a:cs typeface="Times New Roman" panose="02020603050405020304" pitchFamily="18" charset="0"/>
+              </a:rPr>
+              <a:t> </a:t>
+            </a:r>
+            <a:r>
+              <a:rPr lang="en-US" sz="2400" dirty="0" err="1">
+                <a:latin typeface="Times New Roman" panose="02020603050405020304" pitchFamily="18" charset="0"/>
+                <a:cs typeface="Times New Roman" panose="02020603050405020304" pitchFamily="18" charset="0"/>
+              </a:rPr>
+              <a:t>vizuelno</a:t>
+            </a:r>
+            <a:r>
+              <a:rPr lang="en-US" sz="2400" dirty="0">
+                <a:latin typeface="Times New Roman" panose="02020603050405020304" pitchFamily="18" charset="0"/>
+                <a:cs typeface="Times New Roman" panose="02020603050405020304" pitchFamily="18" charset="0"/>
+              </a:rPr>
+              <a:t> </a:t>
+            </a:r>
+            <a:r>
+              <a:rPr lang="en-US" sz="2400" dirty="0" err="1">
+                <a:latin typeface="Times New Roman" panose="02020603050405020304" pitchFamily="18" charset="0"/>
+                <a:cs typeface="Times New Roman" panose="02020603050405020304" pitchFamily="18" charset="0"/>
+              </a:rPr>
+              <a:t>prikazane</a:t>
+            </a:r>
+            <a:r>
+              <a:rPr lang="en-US" sz="2400" dirty="0">
+                <a:latin typeface="Times New Roman" panose="02020603050405020304" pitchFamily="18" charset="0"/>
+                <a:cs typeface="Times New Roman" panose="02020603050405020304" pitchFamily="18" charset="0"/>
+              </a:rPr>
+              <a:t> </a:t>
+            </a:r>
+            <a:r>
+              <a:rPr lang="en-US" sz="2400" dirty="0" err="1">
+                <a:latin typeface="Times New Roman" panose="02020603050405020304" pitchFamily="18" charset="0"/>
+                <a:cs typeface="Times New Roman" panose="02020603050405020304" pitchFamily="18" charset="0"/>
+              </a:rPr>
+              <a:t>na</a:t>
+            </a:r>
+            <a:r>
+              <a:rPr lang="en-US" sz="2400" dirty="0">
+                <a:latin typeface="Times New Roman" panose="02020603050405020304" pitchFamily="18" charset="0"/>
+                <a:cs typeface="Times New Roman" panose="02020603050405020304" pitchFamily="18" charset="0"/>
+              </a:rPr>
+              <a:t> </a:t>
+            </a:r>
+            <a:r>
+              <a:rPr lang="en-US" sz="2400" err="1">
+                <a:latin typeface="Times New Roman" panose="02020603050405020304" pitchFamily="18" charset="0"/>
+                <a:cs typeface="Times New Roman" panose="02020603050405020304" pitchFamily="18" charset="0"/>
+              </a:rPr>
+              <a:t>grafikonu</a:t>
+            </a:r>
+            <a:r>
+              <a:rPr lang="en-US" sz="2400">
+                <a:latin typeface="Times New Roman" panose="02020603050405020304" pitchFamily="18" charset="0"/>
+                <a:cs typeface="Times New Roman" panose="02020603050405020304" pitchFamily="18" charset="0"/>
+              </a:rPr>
+              <a:t>.</a:t>
+            </a:r>
+          </a:p>
+          <a:p>
+            <a:endParaRPr lang="sr-Latn-RS" sz="2400" dirty="0">
+              <a:latin typeface="Times New Roman" panose="02020603050405020304" pitchFamily="18" charset="0"/>
+              <a:cs typeface="Times New Roman" panose="02020603050405020304" pitchFamily="18" charset="0"/>
+            </a:endParaRPr>
+          </a:p>
+        </p:txBody>
+      </p:sp>
+      <p:pic>
+        <p:nvPicPr>
+          <p:cNvPr id="5" name="Picture 4">
+            <a:extLst>
+              <a:ext uri="{FF2B5EF4-FFF2-40B4-BE49-F238E27FC236}">
+                <a16:creationId xmlns:a16="http://schemas.microsoft.com/office/drawing/2014/main" id="{86FC175F-F7E6-4956-8295-7142F8D352AF}"/>
+              </a:ext>
+            </a:extLst>
+          </p:cNvPr>
+          <p:cNvPicPr>
+            <a:picLocks noChangeAspect="1"/>
+          </p:cNvPicPr>
+          <p:nvPr/>
+        </p:nvPicPr>
+        <p:blipFill>
+          <a:blip r:embed="rId3"/>
+          <a:stretch>
+            <a:fillRect/>
+          </a:stretch>
+        </p:blipFill>
+        <p:spPr>
+          <a:xfrm>
+            <a:off x="1637115" y="3950730"/>
+            <a:ext cx="8907118" cy="1457528"/>
+          </a:xfrm>
+          <a:prstGeom prst="rect">
+            <a:avLst/>
+          </a:prstGeom>
+        </p:spPr>
+      </p:pic>
+      <p:pic>
+        <p:nvPicPr>
+          <p:cNvPr id="7" name="Picture 6">
+            <a:extLst>
+              <a:ext uri="{FF2B5EF4-FFF2-40B4-BE49-F238E27FC236}">
+                <a16:creationId xmlns:a16="http://schemas.microsoft.com/office/drawing/2014/main" id="{0BD19DC5-286A-490E-9B85-47DE461D476B}"/>
+              </a:ext>
+            </a:extLst>
+          </p:cNvPr>
+          <p:cNvPicPr>
+            <a:picLocks noChangeAspect="1"/>
+          </p:cNvPicPr>
+          <p:nvPr/>
+        </p:nvPicPr>
+        <p:blipFill>
+          <a:blip r:embed="rId4"/>
+          <a:stretch>
+            <a:fillRect/>
+          </a:stretch>
+        </p:blipFill>
+        <p:spPr>
+          <a:xfrm>
+            <a:off x="3237538" y="5727161"/>
+            <a:ext cx="5706271" cy="619211"/>
+          </a:xfrm>
+          <a:prstGeom prst="rect">
+            <a:avLst/>
+          </a:prstGeom>
+        </p:spPr>
+      </p:pic>
+    </p:spTree>
+    <p:extLst>
+      <p:ext uri="{BB962C8B-B14F-4D97-AF65-F5344CB8AC3E}">
+        <p14:creationId xmlns:p14="http://schemas.microsoft.com/office/powerpoint/2010/main" val="766289194"/>
       </p:ext>
     </p:extLst>
   </p:cSld>
@@ -9318,7 +8799,7 @@
           <p:cNvPr id="2" name="Title 1">
             <a:extLst>
               <a:ext uri="{FF2B5EF4-FFF2-40B4-BE49-F238E27FC236}">
-                <a16:creationId xmlns:a16="http://schemas.microsoft.com/office/drawing/2014/main" id="{3EE38D53-E81B-E14B-06A4-97EAAE8C00B4}"/>
+                <a16:creationId xmlns:a16="http://schemas.microsoft.com/office/drawing/2014/main" id="{E38C318A-143E-89D6-7925-D23C7767FABA}"/>
               </a:ext>
             </a:extLst>
           </p:cNvPr>
@@ -9329,12 +8810,39 @@
             <p:ph type="title"/>
           </p:nvPr>
         </p:nvSpPr>
-        <p:spPr>
-          <a:xfrm>
-            <a:off x="913794" y="741233"/>
-            <a:ext cx="10353762" cy="970450"/>
-          </a:xfrm>
-        </p:spPr>
+        <p:spPr/>
+        <p:txBody>
+          <a:bodyPr/>
+          <a:lstStyle/>
+          <a:p>
+            <a:r>
+              <a:rPr lang="en-US" sz="4000" b="1">
+                <a:latin typeface="Times New Roman" panose="02020603050405020304" pitchFamily="18" charset="0"/>
+                <a:cs typeface="Times New Roman" panose="02020603050405020304" pitchFamily="18" charset="0"/>
+              </a:rPr>
+              <a:t>IZBOR ARHITEKTURE</a:t>
+            </a:r>
+            <a:endParaRPr lang="en-GB"/>
+          </a:p>
+        </p:txBody>
+      </p:sp>
+      <p:sp>
+        <p:nvSpPr>
+          <p:cNvPr id="3" name="Content Placeholder 2">
+            <a:extLst>
+              <a:ext uri="{FF2B5EF4-FFF2-40B4-BE49-F238E27FC236}">
+                <a16:creationId xmlns:a16="http://schemas.microsoft.com/office/drawing/2014/main" id="{CCFF89E9-CE9A-7792-EABA-6A7D6D85B518}"/>
+              </a:ext>
+            </a:extLst>
+          </p:cNvPr>
+          <p:cNvSpPr>
+            <a:spLocks noGrp="1"/>
+          </p:cNvSpPr>
+          <p:nvPr>
+            <p:ph idx="1"/>
+          </p:nvPr>
+        </p:nvSpPr>
+        <p:spPr/>
         <p:txBody>
           <a:bodyPr>
             <a:normAutofit/>
@@ -9342,430 +8850,94 @@
           <a:lstStyle/>
           <a:p>
             <a:r>
-              <a:rPr lang="sr-Latn-RS" sz="4400" b="1" dirty="0">
-                <a:latin typeface="Times New Roman" panose="02020603050405020304" pitchFamily="18" charset="0"/>
-                <a:cs typeface="Times New Roman" panose="02020603050405020304" pitchFamily="18" charset="0"/>
-              </a:rPr>
-              <a:t>KORISNIČKI INTERFEJS (UI)</a:t>
-            </a:r>
-            <a:endParaRPr lang="en-US" sz="4400" b="1" dirty="0">
+              <a:rPr lang="en-GB" sz="2400"/>
+              <a:t>Tačnosti – koliko model prosečno odstupa od realnih vrednosti</a:t>
+            </a:r>
+          </a:p>
+          <a:p>
+            <a:r>
+              <a:rPr lang="en-GB" sz="2400"/>
+              <a:t>Stabilnosti – da li model pravi ekstremne greške</a:t>
+            </a:r>
+          </a:p>
+          <a:p>
+            <a:r>
+              <a:rPr lang="en-GB" sz="2400"/>
+              <a:t>Robusnosti – koliko je model osetljiv na neuobičajene podatke</a:t>
+            </a:r>
+            <a:endParaRPr lang="sr-Latn-RS" sz="2400"/>
+          </a:p>
+          <a:p>
+            <a:r>
+              <a:rPr lang="en-US" sz="2400">
+                <a:latin typeface="Times New Roman" panose="02020603050405020304" pitchFamily="18" charset="0"/>
+                <a:cs typeface="Times New Roman" panose="02020603050405020304" pitchFamily="18" charset="0"/>
+              </a:rPr>
+              <a:t>Aplikacija omogućava izbor modela</a:t>
+            </a:r>
+            <a:r>
+              <a:rPr lang="sr-Latn-RS" sz="2400">
+                <a:latin typeface="Times New Roman" panose="02020603050405020304" pitchFamily="18" charset="0"/>
+                <a:cs typeface="Times New Roman" panose="02020603050405020304" pitchFamily="18" charset="0"/>
+              </a:rPr>
+              <a:t>:</a:t>
+            </a:r>
+            <a:r>
+              <a:rPr lang="en-US" sz="2400">
+                <a:latin typeface="Times New Roman" panose="02020603050405020304" pitchFamily="18" charset="0"/>
+                <a:cs typeface="Times New Roman" panose="02020603050405020304" pitchFamily="18" charset="0"/>
+              </a:rPr>
+              <a:t> </a:t>
+            </a:r>
+            <a:endParaRPr lang="sr-Latn-RS" sz="2400">
               <a:latin typeface="Times New Roman" panose="02020603050405020304" pitchFamily="18" charset="0"/>
               <a:cs typeface="Times New Roman" panose="02020603050405020304" pitchFamily="18" charset="0"/>
             </a:endParaRPr>
           </a:p>
-        </p:txBody>
-      </p:sp>
-      <p:sp>
-        <p:nvSpPr>
-          <p:cNvPr id="3" name="Content Placeholder 2">
-            <a:extLst>
-              <a:ext uri="{FF2B5EF4-FFF2-40B4-BE49-F238E27FC236}">
-                <a16:creationId xmlns:a16="http://schemas.microsoft.com/office/drawing/2014/main" id="{C6C87EDF-59D9-2DBC-D23D-F9843223E3CF}"/>
-              </a:ext>
-            </a:extLst>
-          </p:cNvPr>
-          <p:cNvSpPr>
-            <a:spLocks noGrp="1"/>
-          </p:cNvSpPr>
-          <p:nvPr>
-            <p:ph idx="1"/>
-          </p:nvPr>
-        </p:nvSpPr>
-        <p:spPr>
-          <a:xfrm>
-            <a:off x="321247" y="2414619"/>
-            <a:ext cx="11538857" cy="3216923"/>
-          </a:xfrm>
-        </p:spPr>
-        <p:txBody>
-          <a:bodyPr>
-            <a:normAutofit/>
-          </a:bodyPr>
-          <a:lstStyle/>
-          <a:p>
-            <a:r>
-              <a:rPr lang="en-US" sz="2400" dirty="0" err="1">
-                <a:latin typeface="Times New Roman" panose="02020603050405020304" pitchFamily="18" charset="0"/>
-                <a:cs typeface="Times New Roman" panose="02020603050405020304" pitchFamily="18" charset="0"/>
-              </a:rPr>
-              <a:t>Aplikacija</a:t>
-            </a:r>
-            <a:r>
-              <a:rPr lang="en-US" sz="2400" dirty="0">
-                <a:latin typeface="Times New Roman" panose="02020603050405020304" pitchFamily="18" charset="0"/>
-                <a:cs typeface="Times New Roman" panose="02020603050405020304" pitchFamily="18" charset="0"/>
-              </a:rPr>
-              <a:t> </a:t>
-            </a:r>
-            <a:r>
-              <a:rPr lang="en-US" sz="2400" dirty="0" err="1">
-                <a:latin typeface="Times New Roman" panose="02020603050405020304" pitchFamily="18" charset="0"/>
-                <a:cs typeface="Times New Roman" panose="02020603050405020304" pitchFamily="18" charset="0"/>
-              </a:rPr>
-              <a:t>omogućava</a:t>
-            </a:r>
-            <a:r>
-              <a:rPr lang="en-US" sz="2400" dirty="0">
-                <a:latin typeface="Times New Roman" panose="02020603050405020304" pitchFamily="18" charset="0"/>
-                <a:cs typeface="Times New Roman" panose="02020603050405020304" pitchFamily="18" charset="0"/>
-              </a:rPr>
-              <a:t> </a:t>
-            </a:r>
-            <a:r>
-              <a:rPr lang="en-US" sz="2400" dirty="0" err="1">
-                <a:latin typeface="Times New Roman" panose="02020603050405020304" pitchFamily="18" charset="0"/>
-                <a:cs typeface="Times New Roman" panose="02020603050405020304" pitchFamily="18" charset="0"/>
-              </a:rPr>
-              <a:t>izbor</a:t>
-            </a:r>
-            <a:r>
-              <a:rPr lang="en-US" sz="2400" dirty="0">
-                <a:latin typeface="Times New Roman" panose="02020603050405020304" pitchFamily="18" charset="0"/>
-                <a:cs typeface="Times New Roman" panose="02020603050405020304" pitchFamily="18" charset="0"/>
-              </a:rPr>
-              <a:t> </a:t>
-            </a:r>
-            <a:r>
-              <a:rPr lang="en-US" sz="2400" dirty="0" err="1">
-                <a:latin typeface="Times New Roman" panose="02020603050405020304" pitchFamily="18" charset="0"/>
-                <a:cs typeface="Times New Roman" panose="02020603050405020304" pitchFamily="18" charset="0"/>
-              </a:rPr>
-              <a:t>modela</a:t>
-            </a:r>
-            <a:r>
-              <a:rPr lang="en-US" sz="2400" dirty="0">
-                <a:latin typeface="Times New Roman" panose="02020603050405020304" pitchFamily="18" charset="0"/>
-                <a:cs typeface="Times New Roman" panose="02020603050405020304" pitchFamily="18" charset="0"/>
-              </a:rPr>
-              <a:t>, </a:t>
-            </a:r>
-            <a:r>
-              <a:rPr lang="en-US" sz="2400" dirty="0" err="1">
-                <a:latin typeface="Times New Roman" panose="02020603050405020304" pitchFamily="18" charset="0"/>
-                <a:cs typeface="Times New Roman" panose="02020603050405020304" pitchFamily="18" charset="0"/>
-              </a:rPr>
-              <a:t>podešavanje</a:t>
-            </a:r>
-            <a:r>
-              <a:rPr lang="en-US" sz="2400" dirty="0">
-                <a:latin typeface="Times New Roman" panose="02020603050405020304" pitchFamily="18" charset="0"/>
-                <a:cs typeface="Times New Roman" panose="02020603050405020304" pitchFamily="18" charset="0"/>
-              </a:rPr>
-              <a:t> </a:t>
-            </a:r>
-            <a:r>
-              <a:rPr lang="en-US" sz="2400" dirty="0" err="1">
-                <a:latin typeface="Times New Roman" panose="02020603050405020304" pitchFamily="18" charset="0"/>
-                <a:cs typeface="Times New Roman" panose="02020603050405020304" pitchFamily="18" charset="0"/>
-              </a:rPr>
-              <a:t>tačnosti</a:t>
-            </a:r>
-            <a:r>
-              <a:rPr lang="en-US" sz="2400" dirty="0">
-                <a:latin typeface="Times New Roman" panose="02020603050405020304" pitchFamily="18" charset="0"/>
-                <a:cs typeface="Times New Roman" panose="02020603050405020304" pitchFamily="18" charset="0"/>
-              </a:rPr>
-              <a:t> </a:t>
-            </a:r>
-            <a:r>
-              <a:rPr lang="en-US" sz="2400" dirty="0" err="1">
-                <a:latin typeface="Times New Roman" panose="02020603050405020304" pitchFamily="18" charset="0"/>
-                <a:cs typeface="Times New Roman" panose="02020603050405020304" pitchFamily="18" charset="0"/>
-              </a:rPr>
-              <a:t>i</a:t>
-            </a:r>
-            <a:r>
-              <a:rPr lang="en-US" sz="2400" dirty="0">
-                <a:latin typeface="Times New Roman" panose="02020603050405020304" pitchFamily="18" charset="0"/>
-                <a:cs typeface="Times New Roman" panose="02020603050405020304" pitchFamily="18" charset="0"/>
-              </a:rPr>
-              <a:t> </a:t>
-            </a:r>
-            <a:r>
-              <a:rPr lang="en-US" sz="2400" dirty="0" err="1">
-                <a:latin typeface="Times New Roman" panose="02020603050405020304" pitchFamily="18" charset="0"/>
-                <a:cs typeface="Times New Roman" panose="02020603050405020304" pitchFamily="18" charset="0"/>
-              </a:rPr>
-              <a:t>pokretanje</a:t>
-            </a:r>
-            <a:r>
-              <a:rPr lang="en-US" sz="2400" dirty="0">
-                <a:latin typeface="Times New Roman" panose="02020603050405020304" pitchFamily="18" charset="0"/>
-                <a:cs typeface="Times New Roman" panose="02020603050405020304" pitchFamily="18" charset="0"/>
-              </a:rPr>
-              <a:t> </a:t>
-            </a:r>
-            <a:r>
-              <a:rPr lang="en-US" sz="2400" dirty="0" err="1">
-                <a:latin typeface="Times New Roman" panose="02020603050405020304" pitchFamily="18" charset="0"/>
-                <a:cs typeface="Times New Roman" panose="02020603050405020304" pitchFamily="18" charset="0"/>
-              </a:rPr>
-              <a:t>simulacije</a:t>
-            </a:r>
-            <a:r>
-              <a:rPr lang="en-US" sz="2400" dirty="0">
-                <a:latin typeface="Times New Roman" panose="02020603050405020304" pitchFamily="18" charset="0"/>
-                <a:cs typeface="Times New Roman" panose="02020603050405020304" pitchFamily="18" charset="0"/>
-              </a:rPr>
-              <a:t>.</a:t>
-            </a:r>
-            <a:endParaRPr lang="sr-Latn-RS" sz="2400" dirty="0">
+          <a:p>
+            <a:pPr lvl="1"/>
+            <a:r>
+              <a:rPr lang="en-US" sz="2200">
+                <a:latin typeface="Times New Roman" panose="02020603050405020304" pitchFamily="18" charset="0"/>
+                <a:cs typeface="Times New Roman" panose="02020603050405020304" pitchFamily="18" charset="0"/>
+              </a:rPr>
+              <a:t>singl-model</a:t>
+            </a:r>
+            <a:endParaRPr lang="sr-Latn-RS" sz="2200">
               <a:latin typeface="Times New Roman" panose="02020603050405020304" pitchFamily="18" charset="0"/>
               <a:cs typeface="Times New Roman" panose="02020603050405020304" pitchFamily="18" charset="0"/>
             </a:endParaRPr>
           </a:p>
           <a:p>
-            <a:r>
-              <a:rPr lang="en-US" sz="2400" dirty="0" err="1">
-                <a:latin typeface="Times New Roman" panose="02020603050405020304" pitchFamily="18" charset="0"/>
-                <a:cs typeface="Times New Roman" panose="02020603050405020304" pitchFamily="18" charset="0"/>
-              </a:rPr>
-              <a:t>Greške</a:t>
-            </a:r>
-            <a:r>
-              <a:rPr lang="en-US" sz="2400" dirty="0">
-                <a:latin typeface="Times New Roman" panose="02020603050405020304" pitchFamily="18" charset="0"/>
-                <a:cs typeface="Times New Roman" panose="02020603050405020304" pitchFamily="18" charset="0"/>
-              </a:rPr>
-              <a:t> se </a:t>
-            </a:r>
-            <a:r>
-              <a:rPr lang="en-US" sz="2400" dirty="0" err="1">
-                <a:latin typeface="Times New Roman" panose="02020603050405020304" pitchFamily="18" charset="0"/>
-                <a:cs typeface="Times New Roman" panose="02020603050405020304" pitchFamily="18" charset="0"/>
-              </a:rPr>
-              <a:t>prikazuju</a:t>
-            </a:r>
-            <a:r>
-              <a:rPr lang="en-US" sz="2400" dirty="0">
-                <a:latin typeface="Times New Roman" panose="02020603050405020304" pitchFamily="18" charset="0"/>
-                <a:cs typeface="Times New Roman" panose="02020603050405020304" pitchFamily="18" charset="0"/>
-              </a:rPr>
-              <a:t> </a:t>
-            </a:r>
-            <a:r>
-              <a:rPr lang="en-US" sz="2400" dirty="0" err="1">
-                <a:latin typeface="Times New Roman" panose="02020603050405020304" pitchFamily="18" charset="0"/>
-                <a:cs typeface="Times New Roman" panose="02020603050405020304" pitchFamily="18" charset="0"/>
-              </a:rPr>
-              <a:t>kroz</a:t>
-            </a:r>
-            <a:r>
-              <a:rPr lang="en-US" sz="2400" dirty="0">
-                <a:latin typeface="Times New Roman" panose="02020603050405020304" pitchFamily="18" charset="0"/>
-                <a:cs typeface="Times New Roman" panose="02020603050405020304" pitchFamily="18" charset="0"/>
-              </a:rPr>
-              <a:t> </a:t>
-            </a:r>
-            <a:r>
-              <a:rPr lang="en-US" sz="2400" b="1" dirty="0">
-                <a:latin typeface="Times New Roman" panose="02020603050405020304" pitchFamily="18" charset="0"/>
-                <a:cs typeface="Times New Roman" panose="02020603050405020304" pitchFamily="18" charset="0"/>
-              </a:rPr>
-              <a:t>MAE </a:t>
-            </a:r>
-            <a:r>
-              <a:rPr lang="en-US" sz="2400" b="1" dirty="0" err="1">
-                <a:latin typeface="Times New Roman" panose="02020603050405020304" pitchFamily="18" charset="0"/>
-                <a:cs typeface="Times New Roman" panose="02020603050405020304" pitchFamily="18" charset="0"/>
-              </a:rPr>
-              <a:t>i</a:t>
-            </a:r>
-            <a:r>
-              <a:rPr lang="en-US" sz="2400" b="1" dirty="0">
-                <a:latin typeface="Times New Roman" panose="02020603050405020304" pitchFamily="18" charset="0"/>
-                <a:cs typeface="Times New Roman" panose="02020603050405020304" pitchFamily="18" charset="0"/>
-              </a:rPr>
-              <a:t> RMSE</a:t>
-            </a:r>
-            <a:r>
-              <a:rPr lang="en-US" sz="2400" dirty="0">
-                <a:latin typeface="Times New Roman" panose="02020603050405020304" pitchFamily="18" charset="0"/>
-                <a:cs typeface="Times New Roman" panose="02020603050405020304" pitchFamily="18" charset="0"/>
-              </a:rPr>
-              <a:t>, a </a:t>
-            </a:r>
-            <a:r>
-              <a:rPr lang="en-US" sz="2400" dirty="0" err="1">
-                <a:latin typeface="Times New Roman" panose="02020603050405020304" pitchFamily="18" charset="0"/>
-                <a:cs typeface="Times New Roman" panose="02020603050405020304" pitchFamily="18" charset="0"/>
-              </a:rPr>
-              <a:t>predikcije</a:t>
-            </a:r>
-            <a:r>
-              <a:rPr lang="en-US" sz="2400" dirty="0">
-                <a:latin typeface="Times New Roman" panose="02020603050405020304" pitchFamily="18" charset="0"/>
-                <a:cs typeface="Times New Roman" panose="02020603050405020304" pitchFamily="18" charset="0"/>
-              </a:rPr>
-              <a:t> </a:t>
-            </a:r>
-            <a:r>
-              <a:rPr lang="en-US" sz="2400" dirty="0" err="1">
-                <a:latin typeface="Times New Roman" panose="02020603050405020304" pitchFamily="18" charset="0"/>
-                <a:cs typeface="Times New Roman" panose="02020603050405020304" pitchFamily="18" charset="0"/>
-              </a:rPr>
-              <a:t>su</a:t>
-            </a:r>
-            <a:r>
-              <a:rPr lang="en-US" sz="2400" dirty="0">
-                <a:latin typeface="Times New Roman" panose="02020603050405020304" pitchFamily="18" charset="0"/>
-                <a:cs typeface="Times New Roman" panose="02020603050405020304" pitchFamily="18" charset="0"/>
-              </a:rPr>
-              <a:t> </a:t>
-            </a:r>
-            <a:r>
-              <a:rPr lang="en-US" sz="2400" dirty="0" err="1">
-                <a:latin typeface="Times New Roman" panose="02020603050405020304" pitchFamily="18" charset="0"/>
-                <a:cs typeface="Times New Roman" panose="02020603050405020304" pitchFamily="18" charset="0"/>
-              </a:rPr>
-              <a:t>vizuelno</a:t>
-            </a:r>
-            <a:r>
-              <a:rPr lang="en-US" sz="2400" dirty="0">
-                <a:latin typeface="Times New Roman" panose="02020603050405020304" pitchFamily="18" charset="0"/>
-                <a:cs typeface="Times New Roman" panose="02020603050405020304" pitchFamily="18" charset="0"/>
-              </a:rPr>
-              <a:t> </a:t>
-            </a:r>
-            <a:r>
-              <a:rPr lang="en-US" sz="2400" dirty="0" err="1">
-                <a:latin typeface="Times New Roman" panose="02020603050405020304" pitchFamily="18" charset="0"/>
-                <a:cs typeface="Times New Roman" panose="02020603050405020304" pitchFamily="18" charset="0"/>
-              </a:rPr>
-              <a:t>prikazane</a:t>
-            </a:r>
-            <a:r>
-              <a:rPr lang="en-US" sz="2400" dirty="0">
-                <a:latin typeface="Times New Roman" panose="02020603050405020304" pitchFamily="18" charset="0"/>
-                <a:cs typeface="Times New Roman" panose="02020603050405020304" pitchFamily="18" charset="0"/>
-              </a:rPr>
-              <a:t> </a:t>
-            </a:r>
-            <a:r>
-              <a:rPr lang="en-US" sz="2400" dirty="0" err="1">
-                <a:latin typeface="Times New Roman" panose="02020603050405020304" pitchFamily="18" charset="0"/>
-                <a:cs typeface="Times New Roman" panose="02020603050405020304" pitchFamily="18" charset="0"/>
-              </a:rPr>
-              <a:t>na</a:t>
-            </a:r>
-            <a:r>
-              <a:rPr lang="en-US" sz="2400" dirty="0">
-                <a:latin typeface="Times New Roman" panose="02020603050405020304" pitchFamily="18" charset="0"/>
-                <a:cs typeface="Times New Roman" panose="02020603050405020304" pitchFamily="18" charset="0"/>
-              </a:rPr>
-              <a:t> </a:t>
-            </a:r>
-            <a:r>
-              <a:rPr lang="en-US" sz="2400" dirty="0" err="1">
-                <a:latin typeface="Times New Roman" panose="02020603050405020304" pitchFamily="18" charset="0"/>
-                <a:cs typeface="Times New Roman" panose="02020603050405020304" pitchFamily="18" charset="0"/>
-              </a:rPr>
-              <a:t>grafikonu</a:t>
-            </a:r>
-            <a:r>
-              <a:rPr lang="en-US" sz="2400" dirty="0">
-                <a:latin typeface="Times New Roman" panose="02020603050405020304" pitchFamily="18" charset="0"/>
-                <a:cs typeface="Times New Roman" panose="02020603050405020304" pitchFamily="18" charset="0"/>
-              </a:rPr>
-              <a:t>.</a:t>
-            </a:r>
-            <a:endParaRPr lang="sr-Latn-RS" sz="2400" dirty="0">
+            <a:pPr lvl="1"/>
+            <a:r>
+              <a:rPr lang="en-US" sz="2200">
+                <a:latin typeface="Times New Roman" panose="02020603050405020304" pitchFamily="18" charset="0"/>
+                <a:cs typeface="Times New Roman" panose="02020603050405020304" pitchFamily="18" charset="0"/>
+              </a:rPr>
+              <a:t>multi-model</a:t>
+            </a:r>
+            <a:endParaRPr lang="sr-Latn-RS" sz="2200">
               <a:latin typeface="Times New Roman" panose="02020603050405020304" pitchFamily="18" charset="0"/>
               <a:cs typeface="Times New Roman" panose="02020603050405020304" pitchFamily="18" charset="0"/>
             </a:endParaRPr>
           </a:p>
           <a:p>
-            <a:r>
-              <a:rPr lang="en-US" sz="2400" dirty="0" err="1">
-                <a:latin typeface="Times New Roman" panose="02020603050405020304" pitchFamily="18" charset="0"/>
-                <a:cs typeface="Times New Roman" panose="02020603050405020304" pitchFamily="18" charset="0"/>
-              </a:rPr>
-              <a:t>Interfejs</a:t>
-            </a:r>
-            <a:r>
-              <a:rPr lang="en-US" sz="2400" dirty="0">
-                <a:latin typeface="Times New Roman" panose="02020603050405020304" pitchFamily="18" charset="0"/>
-                <a:cs typeface="Times New Roman" panose="02020603050405020304" pitchFamily="18" charset="0"/>
-              </a:rPr>
-              <a:t> je </a:t>
-            </a:r>
-            <a:r>
-              <a:rPr lang="en-US" sz="2400" dirty="0" err="1">
-                <a:latin typeface="Times New Roman" panose="02020603050405020304" pitchFamily="18" charset="0"/>
-                <a:cs typeface="Times New Roman" panose="02020603050405020304" pitchFamily="18" charset="0"/>
-              </a:rPr>
-              <a:t>jednostavan</a:t>
-            </a:r>
-            <a:r>
-              <a:rPr lang="en-US" sz="2400" dirty="0">
-                <a:latin typeface="Times New Roman" panose="02020603050405020304" pitchFamily="18" charset="0"/>
-                <a:cs typeface="Times New Roman" panose="02020603050405020304" pitchFamily="18" charset="0"/>
-              </a:rPr>
-              <a:t>, </a:t>
-            </a:r>
-            <a:r>
-              <a:rPr lang="en-US" sz="2400" dirty="0" err="1">
-                <a:latin typeface="Times New Roman" panose="02020603050405020304" pitchFamily="18" charset="0"/>
-                <a:cs typeface="Times New Roman" panose="02020603050405020304" pitchFamily="18" charset="0"/>
-              </a:rPr>
-              <a:t>pregledan</a:t>
-            </a:r>
-            <a:r>
-              <a:rPr lang="en-US" sz="2400" dirty="0">
-                <a:latin typeface="Times New Roman" panose="02020603050405020304" pitchFamily="18" charset="0"/>
-                <a:cs typeface="Times New Roman" panose="02020603050405020304" pitchFamily="18" charset="0"/>
-              </a:rPr>
-              <a:t> </a:t>
-            </a:r>
-            <a:r>
-              <a:rPr lang="en-US" sz="2400" dirty="0" err="1">
-                <a:latin typeface="Times New Roman" panose="02020603050405020304" pitchFamily="18" charset="0"/>
-                <a:cs typeface="Times New Roman" panose="02020603050405020304" pitchFamily="18" charset="0"/>
-              </a:rPr>
-              <a:t>i</a:t>
-            </a:r>
-            <a:r>
-              <a:rPr lang="en-US" sz="2400" dirty="0">
-                <a:latin typeface="Times New Roman" panose="02020603050405020304" pitchFamily="18" charset="0"/>
-                <a:cs typeface="Times New Roman" panose="02020603050405020304" pitchFamily="18" charset="0"/>
-              </a:rPr>
-              <a:t> </a:t>
-            </a:r>
-            <a:r>
-              <a:rPr lang="en-US" sz="2400" dirty="0" err="1">
-                <a:latin typeface="Times New Roman" panose="02020603050405020304" pitchFamily="18" charset="0"/>
-                <a:cs typeface="Times New Roman" panose="02020603050405020304" pitchFamily="18" charset="0"/>
-              </a:rPr>
-              <a:t>prilagođen</a:t>
-            </a:r>
-            <a:r>
-              <a:rPr lang="en-US" sz="2400" dirty="0">
-                <a:latin typeface="Times New Roman" panose="02020603050405020304" pitchFamily="18" charset="0"/>
-                <a:cs typeface="Times New Roman" panose="02020603050405020304" pitchFamily="18" charset="0"/>
-              </a:rPr>
-              <a:t> </a:t>
-            </a:r>
-            <a:r>
-              <a:rPr lang="en-US" sz="2400" dirty="0" err="1">
-                <a:latin typeface="Times New Roman" panose="02020603050405020304" pitchFamily="18" charset="0"/>
-                <a:cs typeface="Times New Roman" panose="02020603050405020304" pitchFamily="18" charset="0"/>
-              </a:rPr>
-              <a:t>korisniku</a:t>
-            </a:r>
-            <a:r>
-              <a:rPr lang="en-US" sz="2400" dirty="0">
-                <a:latin typeface="Times New Roman" panose="02020603050405020304" pitchFamily="18" charset="0"/>
-                <a:cs typeface="Times New Roman" panose="02020603050405020304" pitchFamily="18" charset="0"/>
-              </a:rPr>
-              <a:t>.</a:t>
-            </a:r>
+            <a:pPr lvl="1"/>
+            <a:endParaRPr lang="sr-Latn-RS" sz="2200">
+              <a:latin typeface="Times New Roman" panose="02020603050405020304" pitchFamily="18" charset="0"/>
+              <a:cs typeface="Times New Roman" panose="02020603050405020304" pitchFamily="18" charset="0"/>
+            </a:endParaRPr>
+          </a:p>
+          <a:p>
+            <a:endParaRPr lang="en-GB" sz="2400"/>
           </a:p>
         </p:txBody>
       </p:sp>
     </p:spTree>
     <p:extLst>
       <p:ext uri="{BB962C8B-B14F-4D97-AF65-F5344CB8AC3E}">
-        <p14:creationId xmlns:p14="http://schemas.microsoft.com/office/powerpoint/2010/main" val="766289194"/>
+        <p14:creationId xmlns:p14="http://schemas.microsoft.com/office/powerpoint/2010/main" val="3914195020"/>
       </p:ext>
     </p:extLst>
   </p:cSld>
@@ -9797,183 +8969,6 @@
           <p:cNvPr id="2" name="Title 1">
             <a:extLst>
               <a:ext uri="{FF2B5EF4-FFF2-40B4-BE49-F238E27FC236}">
-                <a16:creationId xmlns:a16="http://schemas.microsoft.com/office/drawing/2014/main" id="{AB7FC4D8-CEDE-F32D-91EA-B7B463CCB589}"/>
-              </a:ext>
-            </a:extLst>
-          </p:cNvPr>
-          <p:cNvSpPr>
-            <a:spLocks noGrp="1"/>
-          </p:cNvSpPr>
-          <p:nvPr>
-            <p:ph type="title"/>
-          </p:nvPr>
-        </p:nvSpPr>
-        <p:spPr>
-          <a:xfrm>
-            <a:off x="913795" y="348343"/>
-            <a:ext cx="10353762" cy="970450"/>
-          </a:xfrm>
-        </p:spPr>
-        <p:txBody>
-          <a:bodyPr>
-            <a:normAutofit/>
-          </a:bodyPr>
-          <a:lstStyle/>
-          <a:p>
-            <a:r>
-              <a:rPr lang="sr-Latn-RS" sz="4400" b="1" dirty="0">
-                <a:latin typeface="Times New Roman" panose="02020603050405020304" pitchFamily="18" charset="0"/>
-                <a:cs typeface="Times New Roman" panose="02020603050405020304" pitchFamily="18" charset="0"/>
-              </a:rPr>
-              <a:t>SIMULACIJA: MULTI-MODEL</a:t>
-            </a:r>
-            <a:endParaRPr lang="en-US" sz="4400" b="1" dirty="0">
-              <a:latin typeface="Times New Roman" panose="02020603050405020304" pitchFamily="18" charset="0"/>
-              <a:cs typeface="Times New Roman" panose="02020603050405020304" pitchFamily="18" charset="0"/>
-            </a:endParaRPr>
-          </a:p>
-        </p:txBody>
-      </p:sp>
-      <p:sp>
-        <p:nvSpPr>
-          <p:cNvPr id="3" name="Content Placeholder 2">
-            <a:extLst>
-              <a:ext uri="{FF2B5EF4-FFF2-40B4-BE49-F238E27FC236}">
-                <a16:creationId xmlns:a16="http://schemas.microsoft.com/office/drawing/2014/main" id="{01EE122E-64B8-94DC-12BA-1BFC88172375}"/>
-              </a:ext>
-            </a:extLst>
-          </p:cNvPr>
-          <p:cNvSpPr>
-            <a:spLocks noGrp="1"/>
-          </p:cNvSpPr>
-          <p:nvPr>
-            <p:ph idx="1"/>
-          </p:nvPr>
-        </p:nvSpPr>
-        <p:spPr>
-          <a:xfrm>
-            <a:off x="913794" y="1318793"/>
-            <a:ext cx="10353762" cy="5539207"/>
-          </a:xfrm>
-        </p:spPr>
-        <p:txBody>
-          <a:bodyPr>
-            <a:normAutofit/>
-          </a:bodyPr>
-          <a:lstStyle/>
-          <a:p>
-            <a:r>
-              <a:rPr lang="sr-Latn-RS" sz="2400" dirty="0">
-                <a:latin typeface="Times New Roman" panose="02020603050405020304" pitchFamily="18" charset="0"/>
-                <a:cs typeface="Times New Roman" panose="02020603050405020304" pitchFamily="18" charset="0"/>
-              </a:rPr>
-              <a:t> Predikcija za 2026-01-17</a:t>
-            </a:r>
-          </a:p>
-          <a:p>
-            <a:r>
-              <a:rPr lang="sr-Latn-RS" sz="2400" dirty="0">
-                <a:latin typeface="Times New Roman" panose="02020603050405020304" pitchFamily="18" charset="0"/>
-                <a:cs typeface="Times New Roman" panose="02020603050405020304" pitchFamily="18" charset="0"/>
-              </a:rPr>
-              <a:t>MAE: 1216.17, Accuracy: 0.0%</a:t>
-            </a:r>
-          </a:p>
-          <a:p>
-            <a:r>
-              <a:rPr lang="sr-Latn-RS" sz="2400" dirty="0">
-                <a:latin typeface="Times New Roman" panose="02020603050405020304" pitchFamily="18" charset="0"/>
-                <a:cs typeface="Times New Roman" panose="02020603050405020304" pitchFamily="18" charset="0"/>
-              </a:rPr>
-              <a:t>Model: low</a:t>
-            </a:r>
-          </a:p>
-          <a:p>
-            <a:r>
-              <a:rPr lang="sr-Latn-RS" sz="2400" dirty="0">
-                <a:latin typeface="Times New Roman" panose="02020603050405020304" pitchFamily="18" charset="0"/>
-                <a:cs typeface="Times New Roman" panose="02020603050405020304" pitchFamily="18" charset="0"/>
-              </a:rPr>
-              <a:t>Vizuelni prikaz: crvena vs. plava linija</a:t>
-            </a:r>
-            <a:endParaRPr lang="en-US" sz="2400" dirty="0">
-              <a:latin typeface="Times New Roman" panose="02020603050405020304" pitchFamily="18" charset="0"/>
-              <a:cs typeface="Times New Roman" panose="02020603050405020304" pitchFamily="18" charset="0"/>
-            </a:endParaRPr>
-          </a:p>
-        </p:txBody>
-      </p:sp>
-      <p:pic>
-        <p:nvPicPr>
-          <p:cNvPr id="5" name="Picture 4">
-            <a:extLst>
-              <a:ext uri="{FF2B5EF4-FFF2-40B4-BE49-F238E27FC236}">
-                <a16:creationId xmlns:a16="http://schemas.microsoft.com/office/drawing/2014/main" id="{E7A1E8B0-2DFE-7164-8C99-4BD879640E89}"/>
-              </a:ext>
-            </a:extLst>
-          </p:cNvPr>
-          <p:cNvPicPr>
-            <a:picLocks noChangeAspect="1"/>
-          </p:cNvPicPr>
-          <p:nvPr/>
-        </p:nvPicPr>
-        <p:blipFill>
-          <a:blip r:embed="rId2">
-            <a:extLst>
-              <a:ext uri="{28A0092B-C50C-407E-A947-70E740481C1C}">
-                <a14:useLocalDpi xmlns:a14="http://schemas.microsoft.com/office/drawing/2010/main" val="0"/>
-              </a:ext>
-            </a:extLst>
-          </a:blip>
-          <a:stretch>
-            <a:fillRect/>
-          </a:stretch>
-        </p:blipFill>
-        <p:spPr>
-          <a:xfrm>
-            <a:off x="4455886" y="3285028"/>
-            <a:ext cx="7736114" cy="3572972"/>
-          </a:xfrm>
-          <a:prstGeom prst="rect">
-            <a:avLst/>
-          </a:prstGeom>
-        </p:spPr>
-      </p:pic>
-    </p:spTree>
-    <p:extLst>
-      <p:ext uri="{BB962C8B-B14F-4D97-AF65-F5344CB8AC3E}">
-        <p14:creationId xmlns:p14="http://schemas.microsoft.com/office/powerpoint/2010/main" val="3260024341"/>
-      </p:ext>
-    </p:extLst>
-  </p:cSld>
-  <p:clrMapOvr>
-    <a:masterClrMapping/>
-  </p:clrMapOvr>
-</p:sld>
-</file>
-
-<file path=ppt/slides/slide8.xml><?xml version="1.0" encoding="utf-8"?>
-<p:sld xmlns:a="http://schemas.openxmlformats.org/drawingml/2006/main" xmlns:r="http://schemas.openxmlformats.org/officeDocument/2006/relationships" xmlns:p="http://schemas.openxmlformats.org/presentationml/2006/main">
-  <p:cSld>
-    <p:spTree>
-      <p:nvGrpSpPr>
-        <p:cNvPr id="1" name=""/>
-        <p:cNvGrpSpPr/>
-        <p:nvPr/>
-      </p:nvGrpSpPr>
-      <p:grpSpPr>
-        <a:xfrm>
-          <a:off x="0" y="0"/>
-          <a:ext cx="0" cy="0"/>
-          <a:chOff x="0" y="0"/>
-          <a:chExt cx="0" cy="0"/>
-        </a:xfrm>
-      </p:grpSpPr>
-      <p:sp>
-        <p:nvSpPr>
-          <p:cNvPr id="2" name="Title 1">
-            <a:extLst>
-              <a:ext uri="{FF2B5EF4-FFF2-40B4-BE49-F238E27FC236}">
                 <a16:creationId xmlns:a16="http://schemas.microsoft.com/office/drawing/2014/main" id="{905CC31C-4D23-F6A2-A80D-C6B7EF92F424}"/>
               </a:ext>
             </a:extLst>
@@ -10039,33 +9034,25 @@
           </a:bodyPr>
           <a:lstStyle/>
           <a:p>
-            <a:r>
-              <a:rPr lang="en-US" sz="2400" dirty="0" err="1">
-                <a:latin typeface="Times New Roman" panose="02020603050405020304" pitchFamily="18" charset="0"/>
-                <a:cs typeface="Times New Roman" panose="02020603050405020304" pitchFamily="18" charset="0"/>
-              </a:rPr>
-              <a:t>Predikcija</a:t>
-            </a:r>
-            <a:r>
-              <a:rPr lang="en-US" sz="2400" dirty="0">
-                <a:latin typeface="Times New Roman" panose="02020603050405020304" pitchFamily="18" charset="0"/>
-                <a:cs typeface="Times New Roman" panose="02020603050405020304" pitchFamily="18" charset="0"/>
-              </a:rPr>
-              <a:t> za </a:t>
-            </a:r>
-            <a:r>
-              <a:rPr lang="en-US" sz="2400" dirty="0" err="1">
-                <a:latin typeface="Times New Roman" panose="02020603050405020304" pitchFamily="18" charset="0"/>
-                <a:cs typeface="Times New Roman" panose="02020603050405020304" pitchFamily="18" charset="0"/>
-              </a:rPr>
-              <a:t>isti</a:t>
-            </a:r>
-            <a:r>
-              <a:rPr lang="en-US" sz="2400" dirty="0">
-                <a:latin typeface="Times New Roman" panose="02020603050405020304" pitchFamily="18" charset="0"/>
-                <a:cs typeface="Times New Roman" panose="02020603050405020304" pitchFamily="18" charset="0"/>
-              </a:rPr>
-              <a:t> dan</a:t>
+            <a:endParaRPr lang="en-US" sz="2400">
+              <a:latin typeface="Times New Roman" panose="02020603050405020304" pitchFamily="18" charset="0"/>
+              <a:cs typeface="Times New Roman" panose="02020603050405020304" pitchFamily="18" charset="0"/>
+            </a:endParaRPr>
+          </a:p>
+          <a:p>
+            <a:r>
+              <a:rPr lang="en-US" sz="2400">
+                <a:latin typeface="Times New Roman" panose="02020603050405020304" pitchFamily="18" charset="0"/>
+                <a:cs typeface="Times New Roman" panose="02020603050405020304" pitchFamily="18" charset="0"/>
+              </a:rPr>
+              <a:t>Predikcija za </a:t>
+            </a:r>
+            <a:r>
+              <a:rPr lang="sr-Latn-RS" sz="2400">
+                <a:latin typeface="Times New Roman" panose="02020603050405020304" pitchFamily="18" charset="0"/>
+                <a:cs typeface="Times New Roman" panose="02020603050405020304" pitchFamily="18" charset="0"/>
+              </a:rPr>
+              <a:t>sutra</a:t>
             </a:r>
             <a:endParaRPr lang="sr-Latn-RS" sz="2400" dirty="0">
               <a:latin typeface="Times New Roman" panose="02020603050405020304" pitchFamily="18" charset="0"/>
@@ -10107,60 +9094,11 @@
               <a:t>Zaključak</a:t>
             </a:r>
             <a:r>
-              <a:rPr lang="en-US" sz="2400" dirty="0">
-                <a:latin typeface="Times New Roman" panose="02020603050405020304" pitchFamily="18" charset="0"/>
-                <a:cs typeface="Times New Roman" panose="02020603050405020304" pitchFamily="18" charset="0"/>
-              </a:rPr>
-              <a:t>: </a:t>
-            </a:r>
-            <a:r>
-              <a:rPr lang="en-US" sz="2400" dirty="0" err="1">
-                <a:latin typeface="Times New Roman" panose="02020603050405020304" pitchFamily="18" charset="0"/>
-                <a:cs typeface="Times New Roman" panose="02020603050405020304" pitchFamily="18" charset="0"/>
-              </a:rPr>
-              <a:t>bolja</a:t>
-            </a:r>
-            <a:r>
-              <a:rPr lang="en-US" sz="2400" dirty="0">
-                <a:latin typeface="Times New Roman" panose="02020603050405020304" pitchFamily="18" charset="0"/>
-                <a:cs typeface="Times New Roman" panose="02020603050405020304" pitchFamily="18" charset="0"/>
-              </a:rPr>
-              <a:t> </a:t>
-            </a:r>
-            <a:r>
-              <a:rPr lang="en-US" sz="2400" dirty="0" err="1">
-                <a:latin typeface="Times New Roman" panose="02020603050405020304" pitchFamily="18" charset="0"/>
-                <a:cs typeface="Times New Roman" panose="02020603050405020304" pitchFamily="18" charset="0"/>
-              </a:rPr>
-              <a:t>tačnost</a:t>
-            </a:r>
-            <a:r>
-              <a:rPr lang="en-US" sz="2400" dirty="0">
-                <a:latin typeface="Times New Roman" panose="02020603050405020304" pitchFamily="18" charset="0"/>
-                <a:cs typeface="Times New Roman" panose="02020603050405020304" pitchFamily="18" charset="0"/>
-              </a:rPr>
-              <a:t> </a:t>
-            </a:r>
-            <a:r>
-              <a:rPr lang="en-US" sz="2400" dirty="0" err="1">
-                <a:latin typeface="Times New Roman" panose="02020603050405020304" pitchFamily="18" charset="0"/>
-                <a:cs typeface="Times New Roman" panose="02020603050405020304" pitchFamily="18" charset="0"/>
-              </a:rPr>
-              <a:t>kod</a:t>
-            </a:r>
-            <a:r>
-              <a:rPr lang="en-US" sz="2400" dirty="0">
-                <a:latin typeface="Times New Roman" panose="02020603050405020304" pitchFamily="18" charset="0"/>
-                <a:cs typeface="Times New Roman" panose="02020603050405020304" pitchFamily="18" charset="0"/>
-              </a:rPr>
-              <a:t> single-</a:t>
-            </a:r>
-            <a:r>
-              <a:rPr lang="en-US" sz="2400" dirty="0" err="1">
-                <a:latin typeface="Times New Roman" panose="02020603050405020304" pitchFamily="18" charset="0"/>
-                <a:cs typeface="Times New Roman" panose="02020603050405020304" pitchFamily="18" charset="0"/>
-              </a:rPr>
-              <a:t>modela</a:t>
+              <a:rPr lang="en-US" sz="2400">
+                <a:latin typeface="Times New Roman" panose="02020603050405020304" pitchFamily="18" charset="0"/>
+                <a:cs typeface="Times New Roman" panose="02020603050405020304" pitchFamily="18" charset="0"/>
+              </a:rPr>
+              <a:t>: “bolja tačnost”</a:t>
             </a:r>
             <a:endParaRPr lang="en-US" sz="2400" dirty="0">
               <a:latin typeface="Times New Roman" panose="02020603050405020304" pitchFamily="18" charset="0"/>
@@ -10197,7 +9135,7 @@
         </p:blipFill>
         <p:spPr>
           <a:xfrm>
-            <a:off x="6749143" y="3132967"/>
+            <a:off x="5835348" y="2273431"/>
             <a:ext cx="5442857" cy="3725033"/>
           </a:xfrm>
           <a:prstGeom prst="rect">
@@ -10209,6 +9147,252 @@
     <p:extLst>
       <p:ext uri="{BB962C8B-B14F-4D97-AF65-F5344CB8AC3E}">
         <p14:creationId xmlns:p14="http://schemas.microsoft.com/office/powerpoint/2010/main" val="1917841647"/>
+      </p:ext>
+    </p:extLst>
+  </p:cSld>
+  <p:clrMapOvr>
+    <a:masterClrMapping/>
+  </p:clrMapOvr>
+</p:sld>
+</file>
+
+<file path=ppt/slides/slide8.xml><?xml version="1.0" encoding="utf-8"?>
+<p:sld xmlns:a="http://schemas.openxmlformats.org/drawingml/2006/main" xmlns:r="http://schemas.openxmlformats.org/officeDocument/2006/relationships" xmlns:p="http://schemas.openxmlformats.org/presentationml/2006/main">
+  <p:cSld>
+    <p:spTree>
+      <p:nvGrpSpPr>
+        <p:cNvPr id="1" name=""/>
+        <p:cNvGrpSpPr/>
+        <p:nvPr/>
+      </p:nvGrpSpPr>
+      <p:grpSpPr>
+        <a:xfrm>
+          <a:off x="0" y="0"/>
+          <a:ext cx="0" cy="0"/>
+          <a:chOff x="0" y="0"/>
+          <a:chExt cx="0" cy="0"/>
+        </a:xfrm>
+      </p:grpSpPr>
+      <p:sp>
+        <p:nvSpPr>
+          <p:cNvPr id="2" name="Title 1">
+            <a:extLst>
+              <a:ext uri="{FF2B5EF4-FFF2-40B4-BE49-F238E27FC236}">
+                <a16:creationId xmlns:a16="http://schemas.microsoft.com/office/drawing/2014/main" id="{AB7FC4D8-CEDE-F32D-91EA-B7B463CCB589}"/>
+              </a:ext>
+            </a:extLst>
+          </p:cNvPr>
+          <p:cNvSpPr>
+            <a:spLocks noGrp="1"/>
+          </p:cNvSpPr>
+          <p:nvPr>
+            <p:ph type="title"/>
+          </p:nvPr>
+        </p:nvSpPr>
+        <p:spPr>
+          <a:xfrm>
+            <a:off x="913795" y="348343"/>
+            <a:ext cx="10353762" cy="970450"/>
+          </a:xfrm>
+        </p:spPr>
+        <p:txBody>
+          <a:bodyPr>
+            <a:normAutofit/>
+          </a:bodyPr>
+          <a:lstStyle/>
+          <a:p>
+            <a:r>
+              <a:rPr lang="sr-Latn-RS" sz="4400" b="1" dirty="0">
+                <a:latin typeface="Times New Roman" panose="02020603050405020304" pitchFamily="18" charset="0"/>
+                <a:cs typeface="Times New Roman" panose="02020603050405020304" pitchFamily="18" charset="0"/>
+              </a:rPr>
+              <a:t>SIMULACIJA: MULTI-MODEL</a:t>
+            </a:r>
+            <a:endParaRPr lang="en-US" sz="4400" b="1" dirty="0">
+              <a:latin typeface="Times New Roman" panose="02020603050405020304" pitchFamily="18" charset="0"/>
+              <a:cs typeface="Times New Roman" panose="02020603050405020304" pitchFamily="18" charset="0"/>
+            </a:endParaRPr>
+          </a:p>
+        </p:txBody>
+      </p:sp>
+      <p:sp>
+        <p:nvSpPr>
+          <p:cNvPr id="3" name="Content Placeholder 2">
+            <a:extLst>
+              <a:ext uri="{FF2B5EF4-FFF2-40B4-BE49-F238E27FC236}">
+                <a16:creationId xmlns:a16="http://schemas.microsoft.com/office/drawing/2014/main" id="{01EE122E-64B8-94DC-12BA-1BFC88172375}"/>
+              </a:ext>
+            </a:extLst>
+          </p:cNvPr>
+          <p:cNvSpPr>
+            <a:spLocks noGrp="1"/>
+          </p:cNvSpPr>
+          <p:nvPr>
+            <p:ph idx="1"/>
+          </p:nvPr>
+        </p:nvSpPr>
+        <p:spPr>
+          <a:xfrm>
+            <a:off x="913794" y="1318793"/>
+            <a:ext cx="10353762" cy="5539207"/>
+          </a:xfrm>
+        </p:spPr>
+        <p:txBody>
+          <a:bodyPr>
+            <a:normAutofit/>
+          </a:bodyPr>
+          <a:lstStyle/>
+          <a:p>
+            <a:endParaRPr lang="en-US" sz="2400">
+              <a:latin typeface="Times New Roman" panose="02020603050405020304" pitchFamily="18" charset="0"/>
+              <a:cs typeface="Times New Roman" panose="02020603050405020304" pitchFamily="18" charset="0"/>
+            </a:endParaRPr>
+          </a:p>
+          <a:p>
+            <a:r>
+              <a:rPr lang="sr-Latn-RS" sz="2400">
+                <a:latin typeface="Times New Roman" panose="02020603050405020304" pitchFamily="18" charset="0"/>
+                <a:cs typeface="Times New Roman" panose="02020603050405020304" pitchFamily="18" charset="0"/>
+              </a:rPr>
+              <a:t>Predikcija za sutra</a:t>
+            </a:r>
+            <a:endParaRPr lang="sr-Latn-RS" sz="2400" dirty="0">
+              <a:latin typeface="Times New Roman" panose="02020603050405020304" pitchFamily="18" charset="0"/>
+              <a:cs typeface="Times New Roman" panose="02020603050405020304" pitchFamily="18" charset="0"/>
+            </a:endParaRPr>
+          </a:p>
+          <a:p>
+            <a:r>
+              <a:rPr lang="sr-Latn-RS" sz="2400" dirty="0">
+                <a:latin typeface="Times New Roman" panose="02020603050405020304" pitchFamily="18" charset="0"/>
+                <a:cs typeface="Times New Roman" panose="02020603050405020304" pitchFamily="18" charset="0"/>
+              </a:rPr>
+              <a:t>MAE: 1216.17, Accuracy</a:t>
+            </a:r>
+            <a:r>
+              <a:rPr lang="sr-Latn-RS" sz="2400">
+                <a:latin typeface="Times New Roman" panose="02020603050405020304" pitchFamily="18" charset="0"/>
+                <a:cs typeface="Times New Roman" panose="02020603050405020304" pitchFamily="18" charset="0"/>
+              </a:rPr>
+              <a:t>: </a:t>
+            </a:r>
+            <a:r>
+              <a:rPr lang="en-US" sz="2400">
+                <a:latin typeface="Times New Roman" panose="02020603050405020304" pitchFamily="18" charset="0"/>
+                <a:cs typeface="Times New Roman" panose="02020603050405020304" pitchFamily="18" charset="0"/>
+              </a:rPr>
+              <a:t>20</a:t>
+            </a:r>
+            <a:r>
+              <a:rPr lang="sr-Latn-RS" sz="2400">
+                <a:latin typeface="Times New Roman" panose="02020603050405020304" pitchFamily="18" charset="0"/>
+                <a:cs typeface="Times New Roman" panose="02020603050405020304" pitchFamily="18" charset="0"/>
+              </a:rPr>
+              <a:t>.0</a:t>
+            </a:r>
+            <a:r>
+              <a:rPr lang="sr-Latn-RS" sz="2400" dirty="0">
+                <a:latin typeface="Times New Roman" panose="02020603050405020304" pitchFamily="18" charset="0"/>
+                <a:cs typeface="Times New Roman" panose="02020603050405020304" pitchFamily="18" charset="0"/>
+              </a:rPr>
+              <a:t>%</a:t>
+            </a:r>
+          </a:p>
+          <a:p>
+            <a:r>
+              <a:rPr lang="en-US" sz="2400">
+                <a:latin typeface="Times New Roman" panose="02020603050405020304" pitchFamily="18" charset="0"/>
+                <a:cs typeface="Times New Roman" panose="02020603050405020304" pitchFamily="18" charset="0"/>
+              </a:rPr>
+              <a:t>Zakljucak: “lo</a:t>
+            </a:r>
+            <a:r>
+              <a:rPr lang="sr-Latn-RS" sz="2400">
+                <a:latin typeface="Times New Roman" panose="02020603050405020304" pitchFamily="18" charset="0"/>
+                <a:cs typeface="Times New Roman" panose="02020603050405020304" pitchFamily="18" charset="0"/>
+              </a:rPr>
+              <a:t>šija tačnost</a:t>
+            </a:r>
+            <a:r>
+              <a:rPr lang="en-US" sz="2400">
+                <a:latin typeface="Times New Roman" panose="02020603050405020304" pitchFamily="18" charset="0"/>
+                <a:cs typeface="Times New Roman" panose="02020603050405020304" pitchFamily="18" charset="0"/>
+              </a:rPr>
+              <a:t>”</a:t>
+            </a:r>
+          </a:p>
+          <a:p>
+            <a:pPr lvl="1"/>
+            <a:r>
+              <a:rPr lang="en-US" sz="2200">
+                <a:latin typeface="Times New Roman" panose="02020603050405020304" pitchFamily="18" charset="0"/>
+                <a:cs typeface="Times New Roman" panose="02020603050405020304" pitchFamily="18" charset="0"/>
+              </a:rPr>
+              <a:t>Bolje prati realne tro</a:t>
+            </a:r>
+            <a:r>
+              <a:rPr lang="sr-Latn-RS" sz="2200">
+                <a:latin typeface="Times New Roman" panose="02020603050405020304" pitchFamily="18" charset="0"/>
+                <a:cs typeface="Times New Roman" panose="02020603050405020304" pitchFamily="18" charset="0"/>
+              </a:rPr>
+              <a:t>škove</a:t>
+            </a:r>
+          </a:p>
+          <a:p>
+            <a:pPr lvl="1"/>
+            <a:r>
+              <a:rPr lang="sr-Latn-RS" sz="2200">
+                <a:latin typeface="Times New Roman" panose="02020603050405020304" pitchFamily="18" charset="0"/>
+                <a:cs typeface="Times New Roman" panose="02020603050405020304" pitchFamily="18" charset="0"/>
+              </a:rPr>
+              <a:t>Na velikom broju dana veća preciznost</a:t>
+            </a:r>
+            <a:endParaRPr lang="en-US" sz="2200" dirty="0">
+              <a:latin typeface="Times New Roman" panose="02020603050405020304" pitchFamily="18" charset="0"/>
+              <a:cs typeface="Times New Roman" panose="02020603050405020304" pitchFamily="18" charset="0"/>
+            </a:endParaRPr>
+          </a:p>
+        </p:txBody>
+      </p:sp>
+      <p:pic>
+        <p:nvPicPr>
+          <p:cNvPr id="5" name="Picture 4">
+            <a:extLst>
+              <a:ext uri="{FF2B5EF4-FFF2-40B4-BE49-F238E27FC236}">
+                <a16:creationId xmlns:a16="http://schemas.microsoft.com/office/drawing/2014/main" id="{E7A1E8B0-2DFE-7164-8C99-4BD879640E89}"/>
+              </a:ext>
+            </a:extLst>
+          </p:cNvPr>
+          <p:cNvPicPr>
+            <a:picLocks noChangeAspect="1"/>
+          </p:cNvPicPr>
+          <p:nvPr/>
+        </p:nvPicPr>
+        <p:blipFill>
+          <a:blip r:embed="rId2">
+            <a:extLst>
+              <a:ext uri="{28A0092B-C50C-407E-A947-70E740481C1C}">
+                <a14:useLocalDpi xmlns:a14="http://schemas.microsoft.com/office/drawing/2010/main" val="0"/>
+              </a:ext>
+            </a:extLst>
+          </a:blip>
+          <a:srcRect l="18415" t="471" r="22486" b="5605"/>
+          <a:stretch/>
+        </p:blipFill>
+        <p:spPr>
+          <a:xfrm>
+            <a:off x="6190488" y="2551175"/>
+            <a:ext cx="4928616" cy="3617605"/>
+          </a:xfrm>
+          <a:prstGeom prst="rect">
+            <a:avLst/>
+          </a:prstGeom>
+        </p:spPr>
+      </p:pic>
+    </p:spTree>
+    <p:extLst>
+      <p:ext uri="{BB962C8B-B14F-4D97-AF65-F5344CB8AC3E}">
+        <p14:creationId xmlns:p14="http://schemas.microsoft.com/office/powerpoint/2010/main" val="3260024341"/>
       </p:ext>
     </p:extLst>
   </p:cSld>
@@ -10264,11 +9448,11 @@
           <a:lstStyle/>
           <a:p>
             <a:r>
-              <a:rPr lang="sr-Latn-RS" sz="4400" b="1" dirty="0">
-                <a:latin typeface="Times New Roman" panose="02020603050405020304" pitchFamily="18" charset="0"/>
-                <a:cs typeface="Times New Roman" panose="02020603050405020304" pitchFamily="18" charset="0"/>
-              </a:rPr>
-              <a:t>ROLLING PREDIKCIJE</a:t>
+              <a:rPr lang="sr-Latn-RS" sz="4400" b="1">
+                <a:latin typeface="Times New Roman" panose="02020603050405020304" pitchFamily="18" charset="0"/>
+                <a:cs typeface="Times New Roman" panose="02020603050405020304" pitchFamily="18" charset="0"/>
+              </a:rPr>
+              <a:t>SIMULATE PREDIKCIJA</a:t>
             </a:r>
             <a:endParaRPr lang="en-US" sz="4400" b="1" dirty="0">
               <a:latin typeface="Times New Roman" panose="02020603050405020304" pitchFamily="18" charset="0"/>
@@ -10381,33 +9565,30 @@
               <a:t> </a:t>
             </a:r>
             <a:r>
-              <a:rPr lang="en-US" sz="2400" dirty="0" err="1">
+              <a:rPr lang="en-US" sz="2400" err="1">
                 <a:latin typeface="Times New Roman" panose="02020603050405020304" pitchFamily="18" charset="0"/>
                 <a:cs typeface="Times New Roman" panose="02020603050405020304" pitchFamily="18" charset="0"/>
               </a:rPr>
               <a:t>modela</a:t>
             </a:r>
             <a:r>
-              <a:rPr lang="en-US" sz="2400" dirty="0">
-                <a:latin typeface="Times New Roman" panose="02020603050405020304" pitchFamily="18" charset="0"/>
-                <a:cs typeface="Times New Roman" panose="02020603050405020304" pitchFamily="18" charset="0"/>
-              </a:rPr>
-              <a:t> po </a:t>
-            </a:r>
-            <a:r>
-              <a:rPr lang="en-US" sz="2400" dirty="0" err="1">
-                <a:latin typeface="Times New Roman" panose="02020603050405020304" pitchFamily="18" charset="0"/>
-                <a:cs typeface="Times New Roman" panose="02020603050405020304" pitchFamily="18" charset="0"/>
-              </a:rPr>
-              <a:t>danima</a:t>
-            </a:r>
-            <a:r>
-              <a:rPr lang="en-US" sz="2400" dirty="0">
-                <a:latin typeface="Times New Roman" panose="02020603050405020304" pitchFamily="18" charset="0"/>
-                <a:cs typeface="Times New Roman" panose="02020603050405020304" pitchFamily="18" charset="0"/>
-              </a:rPr>
-              <a:t> (mid, low)</a:t>
-            </a:r>
+              <a:rPr lang="en-US" sz="2400">
+                <a:latin typeface="Times New Roman" panose="02020603050405020304" pitchFamily="18" charset="0"/>
+                <a:cs typeface="Times New Roman" panose="02020603050405020304" pitchFamily="18" charset="0"/>
+              </a:rPr>
+              <a:t> po danim</a:t>
+            </a:r>
+            <a:r>
+              <a:rPr lang="sr-Latn-RS" sz="2400">
+                <a:latin typeface="Times New Roman" panose="02020603050405020304" pitchFamily="18" charset="0"/>
+                <a:cs typeface="Times New Roman" panose="02020603050405020304" pitchFamily="18" charset="0"/>
+              </a:rPr>
+              <a:t>a</a:t>
+            </a:r>
+            <a:endParaRPr lang="en-US" sz="2400" dirty="0">
+              <a:latin typeface="Times New Roman" panose="02020603050405020304" pitchFamily="18" charset="0"/>
+              <a:cs typeface="Times New Roman" panose="02020603050405020304" pitchFamily="18" charset="0"/>
+            </a:endParaRPr>
           </a:p>
         </p:txBody>
       </p:sp>
@@ -10440,7 +9621,7 @@
         <p:spPr>
           <a:xfrm>
             <a:off x="4527117" y="3288962"/>
-            <a:ext cx="7780998" cy="3569038"/>
+            <a:ext cx="7186347" cy="3296280"/>
           </a:xfrm>
           <a:prstGeom prst="rect">
             <a:avLst/>
@@ -10700,4 +9881,299 @@
     </a:ext>
   </a:extLst>
 </a:theme>
+</file>
+
+<file path=ppt/theme/theme2.xml><?xml version="1.0" encoding="utf-8"?>
+<a:theme xmlns:a="http://schemas.openxmlformats.org/drawingml/2006/main" name="Office Theme">
+  <a:themeElements>
+    <a:clrScheme name="Office">
+      <a:dk1>
+        <a:sysClr val="windowText" lastClr="000000"/>
+      </a:dk1>
+      <a:lt1>
+        <a:sysClr val="window" lastClr="FFFFFF"/>
+      </a:lt1>
+      <a:dk2>
+        <a:srgbClr val="44546A"/>
+      </a:dk2>
+      <a:lt2>
+        <a:srgbClr val="E7E6E6"/>
+      </a:lt2>
+      <a:accent1>
+        <a:srgbClr val="4472C4"/>
+      </a:accent1>
+      <a:accent2>
+        <a:srgbClr val="ED7D31"/>
+      </a:accent2>
+      <a:accent3>
+        <a:srgbClr val="A5A5A5"/>
+      </a:accent3>
+      <a:accent4>
+        <a:srgbClr val="FFC000"/>
+      </a:accent4>
+      <a:accent5>
+        <a:srgbClr val="5B9BD5"/>
+      </a:accent5>
+      <a:accent6>
+        <a:srgbClr val="70AD47"/>
+      </a:accent6>
+      <a:hlink>
+        <a:srgbClr val="0563C1"/>
+      </a:hlink>
+      <a:folHlink>
+        <a:srgbClr val="954F72"/>
+      </a:folHlink>
+    </a:clrScheme>
+    <a:fontScheme name="Office">
+      <a:majorFont>
+        <a:latin typeface="Calibri Light" panose="020F0302020204030204"/>
+        <a:ea typeface=""/>
+        <a:cs typeface=""/>
+        <a:font script="Jpan" typeface="游ゴシック Light"/>
+        <a:font script="Hang" typeface="맑은 고딕"/>
+        <a:font script="Hans" typeface="等线 Light"/>
+        <a:font script="Hant" typeface="新細明體"/>
+        <a:font script="Arab" typeface="Times New Roman"/>
+        <a:font script="Hebr" typeface="Times New Roman"/>
+        <a:font script="Thai" typeface="Angsana New"/>
+        <a:font script="Ethi" typeface="Nyala"/>
+        <a:font script="Beng" typeface="Vrinda"/>
+        <a:font script="Gujr" typeface="Shruti"/>
+        <a:font script="Khmr" typeface="MoolBoran"/>
+        <a:font script="Knda" typeface="Tunga"/>
+        <a:font script="Guru" typeface="Raavi"/>
+        <a:font script="Cans" typeface="Euphemia"/>
+        <a:font script="Cher" typeface="Plantagenet Cherokee"/>
+        <a:font script="Yiii" typeface="Microsoft Yi Baiti"/>
+        <a:font script="Tibt" typeface="Microsoft Himalaya"/>
+        <a:font script="Thaa" typeface="MV Boli"/>
+        <a:font script="Deva" typeface="Mangal"/>
+        <a:font script="Telu" typeface="Gautami"/>
+        <a:font script="Taml" typeface="Latha"/>
+        <a:font script="Syrc" typeface="Estrangelo Edessa"/>
+        <a:font script="Orya" typeface="Kalinga"/>
+        <a:font script="Mlym" typeface="Kartika"/>
+        <a:font script="Laoo" typeface="DokChampa"/>
+        <a:font script="Sinh" typeface="Iskoola Pota"/>
+        <a:font script="Mong" typeface="Mongolian Baiti"/>
+        <a:font script="Viet" typeface="Times New Roman"/>
+        <a:font script="Uigh" typeface="Microsoft Uighur"/>
+        <a:font script="Geor" typeface="Sylfaen"/>
+        <a:font script="Armn" typeface="Arial"/>
+        <a:font script="Bugi" typeface="Leelawadee UI"/>
+        <a:font script="Bopo" typeface="Microsoft JhengHei"/>
+        <a:font script="Java" typeface="Javanese Text"/>
+        <a:font script="Lisu" typeface="Segoe UI"/>
+        <a:font script="Mymr" typeface="Myanmar Text"/>
+        <a:font script="Nkoo" typeface="Ebrima"/>
+        <a:font script="Olck" typeface="Nirmala UI"/>
+        <a:font script="Osma" typeface="Ebrima"/>
+        <a:font script="Phag" typeface="Phagspa"/>
+        <a:font script="Syrn" typeface="Estrangelo Edessa"/>
+        <a:font script="Syrj" typeface="Estrangelo Edessa"/>
+        <a:font script="Syre" typeface="Estrangelo Edessa"/>
+        <a:font script="Sora" typeface="Nirmala UI"/>
+        <a:font script="Tale" typeface="Microsoft Tai Le"/>
+        <a:font script="Talu" typeface="Microsoft New Tai Lue"/>
+        <a:font script="Tfng" typeface="Ebrima"/>
+      </a:majorFont>
+      <a:minorFont>
+        <a:latin typeface="Calibri" panose="020F0502020204030204"/>
+        <a:ea typeface=""/>
+        <a:cs typeface=""/>
+        <a:font script="Jpan" typeface="游ゴシック"/>
+        <a:font script="Hang" typeface="맑은 고딕"/>
+        <a:font script="Hans" typeface="等线"/>
+        <a:font script="Hant" typeface="新細明體"/>
+        <a:font script="Arab" typeface="Arial"/>
+        <a:font script="Hebr" typeface="Arial"/>
+        <a:font script="Thai" typeface="Cordia New"/>
+        <a:font script="Ethi" typeface="Nyala"/>
+        <a:font script="Beng" typeface="Vrinda"/>
+        <a:font script="Gujr" typeface="Shruti"/>
+        <a:font script="Khmr" typeface="DaunPenh"/>
+        <a:font script="Knda" typeface="Tunga"/>
+        <a:font script="Guru" typeface="Raavi"/>
+        <a:font script="Cans" typeface="Euphemia"/>
+        <a:font script="Cher" typeface="Plantagenet Cherokee"/>
+        <a:font script="Yiii" typeface="Microsoft Yi Baiti"/>
+        <a:font script="Tibt" typeface="Microsoft Himalaya"/>
+        <a:font script="Thaa" typeface="MV Boli"/>
+        <a:font script="Deva" typeface="Mangal"/>
+        <a:font script="Telu" typeface="Gautami"/>
+        <a:font script="Taml" typeface="Latha"/>
+        <a:font script="Syrc" typeface="Estrangelo Edessa"/>
+        <a:font script="Orya" typeface="Kalinga"/>
+        <a:font script="Mlym" typeface="Kartika"/>
+        <a:font script="Laoo" typeface="DokChampa"/>
+        <a:font script="Sinh" typeface="Iskoola Pota"/>
+        <a:font script="Mong" typeface="Mongolian Baiti"/>
+        <a:font script="Viet" typeface="Arial"/>
+        <a:font script="Uigh" typeface="Microsoft Uighur"/>
+        <a:font script="Geor" typeface="Sylfaen"/>
+        <a:font script="Armn" typeface="Arial"/>
+        <a:font script="Bugi" typeface="Leelawadee UI"/>
+        <a:font script="Bopo" typeface="Microsoft JhengHei"/>
+        <a:font script="Java" typeface="Javanese Text"/>
+        <a:font script="Lisu" typeface="Segoe UI"/>
+        <a:font script="Mymr" typeface="Myanmar Text"/>
+        <a:font script="Nkoo" typeface="Ebrima"/>
+        <a:font script="Olck" typeface="Nirmala UI"/>
+        <a:font script="Osma" typeface="Ebrima"/>
+        <a:font script="Phag" typeface="Phagspa"/>
+        <a:font script="Syrn" typeface="Estrangelo Edessa"/>
+        <a:font script="Syrj" typeface="Estrangelo Edessa"/>
+        <a:font script="Syre" typeface="Estrangelo Edessa"/>
+        <a:font script="Sora" typeface="Nirmala UI"/>
+        <a:font script="Tale" typeface="Microsoft Tai Le"/>
+        <a:font script="Talu" typeface="Microsoft New Tai Lue"/>
+        <a:font script="Tfng" typeface="Ebrima"/>
+      </a:minorFont>
+    </a:fontScheme>
+    <a:fmtScheme name="Office">
+      <a:fillStyleLst>
+        <a:solidFill>
+          <a:schemeClr val="phClr"/>
+        </a:solidFill>
+        <a:gradFill rotWithShape="1">
+          <a:gsLst>
+            <a:gs pos="0">
+              <a:schemeClr val="phClr">
+                <a:lumMod val="110000"/>
+                <a:satMod val="105000"/>
+                <a:tint val="67000"/>
+              </a:schemeClr>
+            </a:gs>
+            <a:gs pos="50000">
+              <a:schemeClr val="phClr">
+                <a:lumMod val="105000"/>
+                <a:satMod val="103000"/>
+                <a:tint val="73000"/>
+              </a:schemeClr>
+            </a:gs>
+            <a:gs pos="100000">
+              <a:schemeClr val="phClr">
+                <a:lumMod val="105000"/>
+                <a:satMod val="109000"/>
+                <a:tint val="81000"/>
+              </a:schemeClr>
+            </a:gs>
+          </a:gsLst>
+          <a:lin ang="5400000" scaled="0"/>
+        </a:gradFill>
+        <a:gradFill rotWithShape="1">
+          <a:gsLst>
+            <a:gs pos="0">
+              <a:schemeClr val="phClr">
+                <a:satMod val="103000"/>
+                <a:lumMod val="102000"/>
+                <a:tint val="94000"/>
+              </a:schemeClr>
+            </a:gs>
+            <a:gs pos="50000">
+              <a:schemeClr val="phClr">
+                <a:satMod val="110000"/>
+                <a:lumMod val="100000"/>
+                <a:shade val="100000"/>
+              </a:schemeClr>
+            </a:gs>
+            <a:gs pos="100000">
+              <a:schemeClr val="phClr">
+                <a:lumMod val="99000"/>
+                <a:satMod val="120000"/>
+                <a:shade val="78000"/>
+              </a:schemeClr>
+            </a:gs>
+          </a:gsLst>
+          <a:lin ang="5400000" scaled="0"/>
+        </a:gradFill>
+      </a:fillStyleLst>
+      <a:lnStyleLst>
+        <a:ln w="6350" cap="flat" cmpd="sng" algn="ctr">
+          <a:solidFill>
+            <a:schemeClr val="phClr"/>
+          </a:solidFill>
+          <a:prstDash val="solid"/>
+          <a:miter lim="800000"/>
+        </a:ln>
+        <a:ln w="12700" cap="flat" cmpd="sng" algn="ctr">
+          <a:solidFill>
+            <a:schemeClr val="phClr"/>
+          </a:solidFill>
+          <a:prstDash val="solid"/>
+          <a:miter lim="800000"/>
+        </a:ln>
+        <a:ln w="19050" cap="flat" cmpd="sng" algn="ctr">
+          <a:solidFill>
+            <a:schemeClr val="phClr"/>
+          </a:solidFill>
+          <a:prstDash val="solid"/>
+          <a:miter lim="800000"/>
+        </a:ln>
+      </a:lnStyleLst>
+      <a:effectStyleLst>
+        <a:effectStyle>
+          <a:effectLst/>
+        </a:effectStyle>
+        <a:effectStyle>
+          <a:effectLst/>
+        </a:effectStyle>
+        <a:effectStyle>
+          <a:effectLst>
+            <a:outerShdw blurRad="57150" dist="19050" dir="5400000" algn="ctr" rotWithShape="0">
+              <a:srgbClr val="000000">
+                <a:alpha val="63000"/>
+              </a:srgbClr>
+            </a:outerShdw>
+          </a:effectLst>
+        </a:effectStyle>
+      </a:effectStyleLst>
+      <a:bgFillStyleLst>
+        <a:solidFill>
+          <a:schemeClr val="phClr"/>
+        </a:solidFill>
+        <a:solidFill>
+          <a:schemeClr val="phClr">
+            <a:tint val="95000"/>
+            <a:satMod val="170000"/>
+          </a:schemeClr>
+        </a:solidFill>
+        <a:gradFill rotWithShape="1">
+          <a:gsLst>
+            <a:gs pos="0">
+              <a:schemeClr val="phClr">
+                <a:tint val="93000"/>
+                <a:satMod val="150000"/>
+                <a:shade val="98000"/>
+                <a:lumMod val="102000"/>
+              </a:schemeClr>
+            </a:gs>
+            <a:gs pos="50000">
+              <a:schemeClr val="phClr">
+                <a:tint val="98000"/>
+                <a:satMod val="130000"/>
+                <a:shade val="90000"/>
+                <a:lumMod val="103000"/>
+              </a:schemeClr>
+            </a:gs>
+            <a:gs pos="100000">
+              <a:schemeClr val="phClr">
+                <a:shade val="63000"/>
+                <a:satMod val="120000"/>
+              </a:schemeClr>
+            </a:gs>
+          </a:gsLst>
+          <a:lin ang="5400000" scaled="0"/>
+        </a:gradFill>
+      </a:bgFillStyleLst>
+    </a:fmtScheme>
+  </a:themeElements>
+  <a:objectDefaults/>
+  <a:extraClrSchemeLst/>
+  <a:extLst>
+    <a:ext uri="{05A4C25C-085E-4340-85A3-A5531E510DB2}">
+      <thm15:themeFamily xmlns:thm15="http://schemas.microsoft.com/office/thememl/2012/main" name="Office Theme" id="{62F939B6-93AF-4DB8-9C6B-D6C7DFDC589F}" vid="{4A3C46E8-61CC-4603-A589-7422A47A8E4A}"/>
+    </a:ext>
+  </a:extLst>
+</a:theme>
 </file>